--- a/SEVEN-G/pptx/en/SEVEN-G_Curso_Consultor.pptx
+++ b/SEVEN-G/pptx/en/SEVEN-G_Curso_Consultor.pptx
@@ -7222,6 +7222,40 @@
           </a:p>
         </p:txBody>
       </p:sp>
+      <p:sp>
+        <p:nvSpPr>
+          <p:cNvPr id="254" name="Texto 254"/>
+          <p:cNvSpPr txBox="1"/>
+          <p:nvPr/>
+        </p:nvSpPr>
+        <p:spPr>
+          <a:xfrm>
+            <a:off x="609600" y="5550000"/>
+            <a:ext cx="10972800" cy="1000000"/>
+          </a:xfrm>
+          <a:prstGeom prst="rect">
+            <a:avLst/>
+          </a:prstGeom>
+          <a:noFill/>
+        </p:spPr>
+        <p:txBody>
+          <a:bodyPr wrap="square" anchor="t" lIns="45720" rIns="45720">
+            <a:noAutofit/>
+          </a:bodyPr>
+          <a:lstStyle/>
+          <a:p>
+            <a:pPr algn="ctr"/>
+            <a:r>
+              <a:rPr lang="es-ES" sz="1000" dirty="0">
+                <a:solidFill>
+                  <a:srgbClr val="564D47"/>
+                </a:solidFill>
+              </a:rPr>
+              <a:t>Legal notice: a generic, free methodological aid provided "as is" for information purposes; it is not legal advice and has not been legally reviewed for any case. Each organisation adapts it and is responsible for its legal review and its regulatory compliance; it may not reflect recent regulatory changes. To the fullest extent permitted by law, the author accepts no liability whatsoever for the effects of its application. It does not grant certification of any kind. Details in document 93.</a:t>
+            </a:r>
+          </a:p>
+        </p:txBody>
+      </p:sp>
     </p:spTree>
   </p:cSld>
   <p:clrMapOvr>

--- a/SEVEN-G/pptx/en/SEVEN-G_Curso_Consultor.pptx
+++ b/SEVEN-G/pptx/en/SEVEN-G_Curso_Consultor.pptx
@@ -31,6 +31,7 @@
     <p:sldId id="279" r:id="rIdS24"/>
     <p:sldId id="280" r:id="rIdS25"/>
     <p:sldId id="281" r:id="rIdS26"/>
+    <p:sldId id="282" r:id="rIdS27"/>
   </p:sldIdLst>
   <p:sldSz cx="12192000" cy="6858000" type="screen16x9"/>
   <p:notesSz cx="6858000" cy="9144000"/>
@@ -1125,7 +1126,7 @@
       </p:sp>
       <p:pic>
         <p:nvPicPr>
-          <p:cNvPr id="124" name="Imagen 124" descr="Board dashboard with the portfolio and value cards"/>
+          <p:cNvPr id="124" name="Imagen 124" descr="Board dashboard: portfolio and value cards and the «What holds back scaling» reading"/>
           <p:cNvPicPr>
             <a:picLocks noChangeAspect="1"/>
           </p:cNvPicPr>
@@ -1190,7 +1191,7 @@
                   <a:srgbClr val="2F2B28"/>
                 </a:solidFill>
               </a:rPr>
-              <a:t>15 cases: how many are in use, in development, in proof of concept, proposed and out.</a:t>
+              <a:t>At the top, the figures: 15 cases, costs of €2.4M a year, total return of €7.3M and annual net of €4.8M. Each figure can be clicked to open its cases.</a:t>
             </a:r>
           </a:p>
           <a:p>
@@ -1210,7 +1211,7 @@
                   <a:srgbClr val="2F2B28"/>
                 </a:solidFill>
               </a:rPr>
-              <a:t>Costs of €2.4M a year and total return of €7.3M (efficiencies plus return): annual net is €4.8M.</a:t>
+              <a:t>The yellow card is the one that matters: only 36% of the value is validated by finance. In red: only 3 of 15 cases have all the controls.</a:t>
             </a:r>
           </a:p>
           <a:p>
@@ -1230,7 +1231,7 @@
                   <a:srgbClr val="2F2B28"/>
                 </a:solidFill>
               </a:rPr>
-              <a:t>The yellow card is the one that matters: only 36% of the value is validated by finance. The rest is declared or estimated.</a:t>
+              <a:t>Below, «What holds back scaling»: the three barriers to start with, with what they block, what to do, who and the value at stake (document 60 §10.4).</a:t>
             </a:r>
           </a:p>
           <a:p>
@@ -1250,7 +1251,7 @@
                   <a:srgbClr val="2F2B28"/>
                 </a:solidFill>
               </a:rPr>
-              <a:t>Released capacity that has not been materialised is shown separately and does not add up.</a:t>
+              <a:t>In the example: first risk and compliance (blocks G5), then unvalidated value (blocks G7 · Scale) and cases that do not move forward.</a:t>
             </a:r>
           </a:p>
           <a:p>
@@ -1270,9 +1271,254 @@
                   <a:srgbClr val="2F2B28"/>
                 </a:solidFill>
               </a:rPr>
-              <a:t>In red: only 3 of 15 cases have all the controls (impact assessments, security, user manual).</a:t>
-            </a:r>
-          </a:p>
+              <a:t>The value at stake ranks, it does not promise: it is declared, not validated.</a:t>
+            </a:r>
+          </a:p>
+        </p:txBody>
+      </p:sp>
+      <p:sp>
+        <p:nvSpPr>
+          <p:cNvPr id="126" name="Texto 126"/>
+          <p:cNvSpPr txBox="1"/>
+          <p:nvPr/>
+        </p:nvSpPr>
+        <p:spPr>
+          <a:xfrm>
+            <a:off x="609600" y="6260000"/>
+            <a:ext cx="10972800" cy="450000"/>
+          </a:xfrm>
+          <a:prstGeom prst="rect">
+            <a:avLst/>
+          </a:prstGeom>
+          <a:noFill/>
+        </p:spPr>
+        <p:txBody>
+          <a:bodyPr wrap="square" anchor="t" lIns="45720" rIns="45720">
+            <a:noAutofit/>
+          </a:bodyPr>
+          <a:lstStyle/>
+          <a:p>
+            <a:pPr algn="l"/>
+            <a:r>
+              <a:rPr lang="es-ES" sz="1300" b="1" dirty="0">
+                <a:solidFill>
+                  <a:srgbClr val="0F5499"/>
+                </a:solidFill>
+              </a:rPr>
+              <a:t>If a figure on the dashboard looks wrong, the dashboard is not touched: the evidence is fixed in the register and it is generated again.</a:t>
+            </a:r>
+          </a:p>
+        </p:txBody>
+      </p:sp>
+    </p:spTree>
+  </p:cSld>
+  <p:clrMapOvr>
+    <a:overrideClrMapping bg1="lt1" tx1="dk1" bg2="lt2" tx2="dk2" accent1="accent1" accent2="accent2" accent3="accent3" accent4="accent4" accent5="accent5" accent6="accent6" hlink="hlink" folHlink="folHlink"/>
+  </p:clrMapOvr>
+</p:sld>
+</file>
+
+<file path=ppt/slides/slide13.xml><?xml version="1.0" encoding="utf-8"?>
+<p:sld xmlns:a="http://schemas.openxmlformats.org/drawingml/2006/main" xmlns:r="http://schemas.openxmlformats.org/officeDocument/2006/relationships" xmlns:p="http://schemas.openxmlformats.org/presentationml/2006/main">
+  <p:cSld>
+    <p:bg>
+      <p:bgPr>
+        <a:solidFill>
+          <a:srgbClr val="FBE2CD"/>
+        </a:solidFill>
+        <a:effectLst/>
+      </p:bgPr>
+    </p:bg>
+    <p:spTree>
+      <p:nvGrpSpPr>
+        <p:cNvPr id="1" name=""/>
+        <p:cNvGrpSpPr/>
+        <p:nvPr/>
+      </p:nvGrpSpPr>
+      <p:grpSpPr>
+        <a:xfrm>
+          <a:off x="0" y="0"/>
+          <a:ext cx="0" cy="0"/>
+          <a:chOff x="0" y="0"/>
+          <a:chExt cx="0" cy="0"/>
+        </a:xfrm>
+      </p:grpSpPr>
+      <p:sp>
+        <p:nvSpPr>
+          <p:cNvPr id="134" name="Marca"/>
+          <p:cNvSpPr/>
+          <p:nvPr/>
+        </p:nvSpPr>
+        <p:spPr>
+          <a:xfrm>
+            <a:off x="609600" y="365760"/>
+            <a:ext cx="182880" cy="182880"/>
+          </a:xfrm>
+          <a:prstGeom prst="rect">
+            <a:avLst/>
+          </a:prstGeom>
+          <a:solidFill>
+            <a:srgbClr val="990F3D"/>
+          </a:solidFill>
+        </p:spPr>
+        <p:txBody>
+          <a:bodyPr/>
+          <a:lstStyle/>
+          <a:p/>
+        </p:txBody>
+      </p:sp>
+      <p:sp>
+        <p:nvSpPr>
+          <p:cNvPr id="135" name="Texto 135"/>
+          <p:cNvSpPr txBox="1"/>
+          <p:nvPr/>
+        </p:nvSpPr>
+        <p:spPr>
+          <a:xfrm>
+            <a:off x="838200" y="300000"/>
+            <a:ext cx="10500000" cy="320000"/>
+          </a:xfrm>
+          <a:prstGeom prst="rect">
+            <a:avLst/>
+          </a:prstGeom>
+          <a:noFill/>
+        </p:spPr>
+        <p:txBody>
+          <a:bodyPr wrap="square" anchor="ctr" lIns="45720" rIns="45720">
+            <a:noAutofit/>
+          </a:bodyPr>
+          <a:lstStyle/>
+          <a:p>
+            <a:pPr algn="l"/>
+            <a:r>
+              <a:rPr lang="es-ES" sz="1400" b="1" dirty="0">
+                <a:solidFill>
+                  <a:srgbClr val="1A1817"/>
+                </a:solidFill>
+              </a:rPr>
+              <a:t>SEVEN-G · COURSE · CONSULTANT · SUPPORTING CLIENTS</a:t>
+            </a:r>
+          </a:p>
+        </p:txBody>
+      </p:sp>
+      <p:sp>
+        <p:nvSpPr>
+          <p:cNvPr id="136" name="Texto 136"/>
+          <p:cNvSpPr txBox="1"/>
+          <p:nvPr/>
+        </p:nvSpPr>
+        <p:spPr>
+          <a:xfrm>
+            <a:off x="609600" y="700000"/>
+            <a:ext cx="10972800" cy="650000"/>
+          </a:xfrm>
+          <a:prstGeom prst="rect">
+            <a:avLst/>
+          </a:prstGeom>
+          <a:noFill/>
+        </p:spPr>
+        <p:txBody>
+          <a:bodyPr wrap="square" anchor="t" lIns="45720" rIns="45720">
+            <a:noAutofit/>
+          </a:bodyPr>
+          <a:lstStyle/>
+          <a:p>
+            <a:pPr algn="l"/>
+            <a:r>
+              <a:rPr lang="es-ES" sz="2700" b="1" dirty="0">
+                <a:solidFill>
+                  <a:srgbClr val="990F3D"/>
+                </a:solidFill>
+              </a:rPr>
+              <a:t>Where the impact is: spheres × ambition</a:t>
+            </a:r>
+          </a:p>
+        </p:txBody>
+      </p:sp>
+      <p:sp>
+        <p:nvSpPr>
+          <p:cNvPr id="137" name="Texto 137"/>
+          <p:cNvSpPr txBox="1"/>
+          <p:nvPr/>
+        </p:nvSpPr>
+        <p:spPr>
+          <a:xfrm>
+            <a:off x="609600" y="1330000"/>
+            <a:ext cx="10972800" cy="450000"/>
+          </a:xfrm>
+          <a:prstGeom prst="rect">
+            <a:avLst/>
+          </a:prstGeom>
+          <a:noFill/>
+        </p:spPr>
+        <p:txBody>
+          <a:bodyPr wrap="square" anchor="t" lIns="45720" rIns="45720">
+            <a:noAutofit/>
+          </a:bodyPr>
+          <a:lstStyle/>
+          <a:p>
+            <a:pPr algn="l"/>
+            <a:r>
+              <a:rPr lang="es-ES" sz="1500" dirty="0">
+                <a:solidFill>
+                  <a:srgbClr val="564D47"/>
+                </a:solidFill>
+              </a:rPr>
+              <a:t>The portfolio heat map (T16) in the same dashboard. Fictitious data</a:t>
+            </a:r>
+          </a:p>
+        </p:txBody>
+      </p:sp>
+      <p:pic>
+        <p:nvPicPr>
+          <p:cNvPr id="131" name="Imagen 131" descr="Heat map of spheres by ambition level with cases, investment, net and gaps"/>
+          <p:cNvPicPr>
+            <a:picLocks noChangeAspect="1"/>
+          </p:cNvPicPr>
+          <p:nvPr/>
+        </p:nvPicPr>
+        <p:blipFill>
+          <a:blip r:embed="rIdImg_impacto"/>
+          <a:stretch>
+            <a:fillRect/>
+          </a:stretch>
+        </p:blipFill>
+        <p:spPr>
+          <a:xfrm>
+            <a:off x="609600" y="1900000"/>
+            <a:ext cx="6700000" cy="4243333"/>
+          </a:xfrm>
+          <a:prstGeom prst="rect">
+            <a:avLst/>
+          </a:prstGeom>
+          <a:ln w="12700">
+            <a:solidFill>
+              <a:srgbClr val="C9A78D"/>
+            </a:solidFill>
+          </a:ln>
+        </p:spPr>
+      </p:pic>
+      <p:sp>
+        <p:nvSpPr>
+          <p:cNvPr id="132" name="Texto 132"/>
+          <p:cNvSpPr txBox="1"/>
+          <p:nvPr/>
+        </p:nvSpPr>
+        <p:spPr>
+          <a:xfrm>
+            <a:off x="7509600" y="1850000"/>
+            <a:ext cx="4072800" cy="4400000"/>
+          </a:xfrm>
+          <a:prstGeom prst="rect">
+            <a:avLst/>
+          </a:prstGeom>
+          <a:noFill/>
+        </p:spPr>
+        <p:txBody>
+          <a:bodyPr wrap="square" anchor="t" lIns="45720" rIns="45720">
+            <a:noAutofit/>
+          </a:bodyPr>
+          <a:lstStyle/>
           <a:p>
             <a:pPr marL="285750" indent="-285750">
               <a:spcAft>
@@ -1290,14 +1536,94 @@
                   <a:srgbClr val="2F2B28"/>
                 </a:solidFill>
               </a:rPr>
-              <a:t>Other pages: funnel and lifecycle, history and adoption, risk and compliance, inventory.</a:t>
-            </a:r>
-          </a:p>
-        </p:txBody>
-      </p:sp>
-      <p:sp>
-        <p:nvSpPr>
-          <p:cNvPr id="126" name="Texto 126"/>
+              <a:t>Rows: the areas where AI creates value (customer, product, people, operations, data, knowledge, decision). Columns: optimise, augment, transform.</a:t>
+            </a:r>
+          </a:p>
+          <a:p>
+            <a:pPr marL="285750" indent="-285750">
+              <a:spcAft>
+                <a:spcPts val="400"/>
+              </a:spcAft>
+              <a:buClr>
+                <a:srgbClr val="990F3D"/>
+              </a:buClr>
+              <a:buFont typeface="Arial"/>
+              <a:buChar char="•"/>
+            </a:pPr>
+            <a:r>
+              <a:rPr lang="es-ES" sz="1300" dirty="0">
+                <a:solidFill>
+                  <a:srgbClr val="2F2B28"/>
+                </a:solidFill>
+              </a:rPr>
+              <a:t>Each cell: cases, investment and cost, annual net and validated value; the colour shows where spending is concentrated.</a:t>
+            </a:r>
+          </a:p>
+          <a:p>
+            <a:pPr marL="285750" indent="-285750">
+              <a:spcAft>
+                <a:spcPts val="400"/>
+              </a:spcAft>
+              <a:buClr>
+                <a:srgbClr val="990F3D"/>
+              </a:buClr>
+              <a:buFont typeface="Arial"/>
+              <a:buChar char="•"/>
+            </a:pPr>
+            <a:r>
+              <a:rPr lang="es-ES" sz="1300" dirty="0">
+                <a:solidFill>
+                  <a:srgbClr val="2F2B28"/>
+                </a:solidFill>
+              </a:rPr>
+              <a:t>«Gap»: the ambition management approved in C2 for that sphere has no case that has passed G2.</a:t>
+            </a:r>
+          </a:p>
+          <a:p>
+            <a:pPr marL="285750" indent="-285750">
+              <a:spcAft>
+                <a:spcPts val="400"/>
+              </a:spcAft>
+              <a:buClr>
+                <a:srgbClr val="990F3D"/>
+              </a:buClr>
+              <a:buFont typeface="Arial"/>
+              <a:buChar char="•"/>
+            </a:pPr>
+            <a:r>
+              <a:rPr lang="es-ES" sz="1300" dirty="0">
+                <a:solidFill>
+                  <a:srgbClr val="2F2B28"/>
+                </a:solidFill>
+              </a:rPr>
+              <a:t>In the example: 40% of spending is in Customer, Data has no activity and five spheres have a gap.</a:t>
+            </a:r>
+          </a:p>
+          <a:p>
+            <a:pPr marL="285750" indent="-285750">
+              <a:spcAft>
+                <a:spcPts val="400"/>
+              </a:spcAft>
+              <a:buClr>
+                <a:srgbClr val="990F3D"/>
+              </a:buClr>
+              <a:buFont typeface="Arial"/>
+              <a:buChar char="•"/>
+            </a:pPr>
+            <a:r>
+              <a:rPr lang="es-ES" sz="1300" dirty="0">
+                <a:solidFill>
+                  <a:srgbClr val="2F2B28"/>
+                </a:solidFill>
+              </a:rPr>
+              <a:t>The target ambition comes from the thesis approved in the register; it is not written in the dashboard.</a:t>
+            </a:r>
+          </a:p>
+        </p:txBody>
+      </p:sp>
+      <p:sp>
+        <p:nvSpPr>
+          <p:cNvPr id="133" name="Texto 133"/>
           <p:cNvSpPr txBox="1"/>
           <p:nvPr/>
         </p:nvSpPr>
@@ -1324,7 +1650,7 @@
                   <a:srgbClr val="0F5499"/>
                 </a:solidFill>
               </a:rPr>
-              <a:t>If a figure on the dashboard looks wrong, the dashboard is not touched: the evidence is fixed in the register and it is generated again.</a:t>
+              <a:t>The question it answers: where does AI have most impact in the company and where are we not playing? (document 10 §8)</a:t>
             </a:r>
           </a:p>
         </p:txBody>
@@ -1337,7 +1663,7 @@
 </p:sld>
 </file>
 
-<file path=ppt/slides/slide13.xml><?xml version="1.0" encoding="utf-8"?>
+<file path=ppt/slides/slide14.xml><?xml version="1.0" encoding="utf-8"?>
 <p:sld xmlns:a="http://schemas.openxmlformats.org/drawingml/2006/main" xmlns:r="http://schemas.openxmlformats.org/officeDocument/2006/relationships" xmlns:p="http://schemas.openxmlformats.org/presentationml/2006/main">
   <p:cSld>
     <p:bg>
@@ -1364,7 +1690,7 @@
       </p:grpSpPr>
       <p:sp>
         <p:nvSpPr>
-          <p:cNvPr id="131" name="Marca"/>
+          <p:cNvPr id="138" name="Marca"/>
           <p:cNvSpPr/>
           <p:nvPr/>
         </p:nvSpPr>
@@ -1388,7 +1714,7 @@
       </p:sp>
       <p:sp>
         <p:nvSpPr>
-          <p:cNvPr id="132" name="Texto 132"/>
+          <p:cNvPr id="139" name="Texto 139"/>
           <p:cNvSpPr txBox="1"/>
           <p:nvPr/>
         </p:nvSpPr>
@@ -1422,7 +1748,7 @@
       </p:sp>
       <p:sp>
         <p:nvSpPr>
-          <p:cNvPr id="133" name="Texto 133"/>
+          <p:cNvPr id="140" name="Texto 140"/>
           <p:cNvSpPr txBox="1"/>
           <p:nvPr/>
         </p:nvSpPr>
@@ -1456,7 +1782,7 @@
       </p:sp>
       <p:sp>
         <p:nvSpPr>
-          <p:cNvPr id="134" name="Texto 134"/>
+          <p:cNvPr id="141" name="Texto 141"/>
           <p:cNvSpPr txBox="1"/>
           <p:nvPr/>
         </p:nvSpPr>
@@ -1484,349 +1810,6 @@
                 </a:solidFill>
               </a:rPr>
               <a:t>Fictitious, illustrative data: they do not describe any real company.</a:t>
-            </a:r>
-          </a:p>
-        </p:txBody>
-      </p:sp>
-    </p:spTree>
-  </p:cSld>
-  <p:clrMapOvr>
-    <a:overrideClrMapping bg1="lt1" tx1="dk1" bg2="lt2" tx2="dk2" accent1="accent1" accent2="accent2" accent3="accent3" accent4="accent4" accent5="accent5" accent6="accent6" hlink="hlink" folHlink="folHlink"/>
-  </p:clrMapOvr>
-</p:sld>
-</file>
-
-<file path=ppt/slides/slide14.xml><?xml version="1.0" encoding="utf-8"?>
-<p:sld xmlns:a="http://schemas.openxmlformats.org/drawingml/2006/main" xmlns:r="http://schemas.openxmlformats.org/officeDocument/2006/relationships" xmlns:p="http://schemas.openxmlformats.org/presentationml/2006/main">
-  <p:cSld>
-    <p:bg>
-      <p:bgPr>
-        <a:solidFill>
-          <a:srgbClr val="FBE2CD"/>
-        </a:solidFill>
-        <a:effectLst/>
-      </p:bgPr>
-    </p:bg>
-    <p:spTree>
-      <p:nvGrpSpPr>
-        <p:cNvPr id="1" name=""/>
-        <p:cNvGrpSpPr/>
-        <p:nvPr/>
-      </p:nvGrpSpPr>
-      <p:grpSpPr>
-        <a:xfrm>
-          <a:off x="0" y="0"/>
-          <a:ext cx="0" cy="0"/>
-          <a:chOff x="0" y="0"/>
-          <a:chExt cx="0" cy="0"/>
-        </a:xfrm>
-      </p:grpSpPr>
-      <p:sp>
-        <p:nvSpPr>
-          <p:cNvPr id="138" name="Marca"/>
-          <p:cNvSpPr/>
-          <p:nvPr/>
-        </p:nvSpPr>
-        <p:spPr>
-          <a:xfrm>
-            <a:off x="609600" y="365760"/>
-            <a:ext cx="182880" cy="182880"/>
-          </a:xfrm>
-          <a:prstGeom prst="rect">
-            <a:avLst/>
-          </a:prstGeom>
-          <a:solidFill>
-            <a:srgbClr val="990F3D"/>
-          </a:solidFill>
-        </p:spPr>
-        <p:txBody>
-          <a:bodyPr/>
-          <a:lstStyle/>
-          <a:p/>
-        </p:txBody>
-      </p:sp>
-      <p:sp>
-        <p:nvSpPr>
-          <p:cNvPr id="139" name="Texto 139"/>
-          <p:cNvSpPr txBox="1"/>
-          <p:nvPr/>
-        </p:nvSpPr>
-        <p:spPr>
-          <a:xfrm>
-            <a:off x="838200" y="300000"/>
-            <a:ext cx="10500000" cy="320000"/>
-          </a:xfrm>
-          <a:prstGeom prst="rect">
-            <a:avLst/>
-          </a:prstGeom>
-          <a:noFill/>
-        </p:spPr>
-        <p:txBody>
-          <a:bodyPr wrap="square" anchor="ctr" lIns="45720" rIns="45720">
-            <a:noAutofit/>
-          </a:bodyPr>
-          <a:lstStyle/>
-          <a:p>
-            <a:pPr algn="l"/>
-            <a:r>
-              <a:rPr lang="es-ES" sz="1400" b="1" dirty="0">
-                <a:solidFill>
-                  <a:srgbClr val="1A1817"/>
-                </a:solidFill>
-              </a:rPr>
-              <a:t>SEVEN-G · COURSE · CONSULTANT · SUPPORTING CLIENTS</a:t>
-            </a:r>
-          </a:p>
-        </p:txBody>
-      </p:sp>
-      <p:sp>
-        <p:nvSpPr>
-          <p:cNvPr id="140" name="Texto 140"/>
-          <p:cNvSpPr txBox="1"/>
-          <p:nvPr/>
-        </p:nvSpPr>
-        <p:spPr>
-          <a:xfrm>
-            <a:off x="609600" y="700000"/>
-            <a:ext cx="10972800" cy="650000"/>
-          </a:xfrm>
-          <a:prstGeom prst="rect">
-            <a:avLst/>
-          </a:prstGeom>
-          <a:noFill/>
-        </p:spPr>
-        <p:txBody>
-          <a:bodyPr wrap="square" anchor="t" lIns="45720" rIns="45720">
-            <a:noAutofit/>
-          </a:bodyPr>
-          <a:lstStyle/>
-          <a:p>
-            <a:pPr algn="l"/>
-            <a:r>
-              <a:rPr lang="es-ES" sz="2700" b="1" dirty="0">
-                <a:solidFill>
-                  <a:srgbClr val="990F3D"/>
-                </a:solidFill>
-              </a:rPr>
-              <a:t>Example 1 · When an initiative stops</a:t>
-            </a:r>
-          </a:p>
-        </p:txBody>
-      </p:sp>
-      <p:sp>
-        <p:nvSpPr>
-          <p:cNvPr id="135" name="Texto 135"/>
-          <p:cNvSpPr txBox="1"/>
-          <p:nvPr/>
-        </p:nvSpPr>
-        <p:spPr>
-          <a:xfrm>
-            <a:off x="609600" y="1330000"/>
-            <a:ext cx="10972800" cy="500000"/>
-          </a:xfrm>
-          <a:prstGeom prst="rect">
-            <a:avLst/>
-          </a:prstGeom>
-          <a:noFill/>
-        </p:spPr>
-        <p:txBody>
-          <a:bodyPr wrap="square" anchor="t" lIns="45720" rIns="45720">
-            <a:noAutofit/>
-          </a:bodyPr>
-          <a:lstStyle/>
-          <a:p>
-            <a:pPr algn="l"/>
-            <a:r>
-              <a:rPr lang="es-ES" sz="1700" b="1" dirty="0">
-                <a:solidFill>
-                  <a:srgbClr val="2F2B28"/>
-                </a:solidFill>
-              </a:rPr>
-              <a:t>Candidate screening in recruitment (HR)</a:t>
-            </a:r>
-          </a:p>
-        </p:txBody>
-      </p:sp>
-      <p:sp>
-        <p:nvSpPr>
-          <p:cNvPr id="136" name="Texto 136"/>
-          <p:cNvSpPr txBox="1"/>
-          <p:nvPr/>
-        </p:nvSpPr>
-        <p:spPr>
-          <a:xfrm>
-            <a:off x="609600" y="1900000"/>
-            <a:ext cx="10972800" cy="3550000"/>
-          </a:xfrm>
-          <a:prstGeom prst="rect">
-            <a:avLst/>
-          </a:prstGeom>
-          <a:noFill/>
-        </p:spPr>
-        <p:txBody>
-          <a:bodyPr wrap="square" anchor="t" lIns="45720" rIns="45720">
-            <a:noAutofit/>
-          </a:bodyPr>
-          <a:lstStyle/>
-          <a:p>
-            <a:pPr marL="285750" indent="-285750">
-              <a:spcAft>
-                <a:spcPts val="400"/>
-              </a:spcAft>
-              <a:buClr>
-                <a:srgbClr val="990F3D"/>
-              </a:buClr>
-              <a:buFont typeface="Arial"/>
-              <a:buChar char="•"/>
-            </a:pPr>
-            <a:r>
-              <a:rPr lang="es-ES" sz="1500" dirty="0">
-                <a:solidFill>
-                  <a:srgbClr val="2F2B28"/>
-                </a:solidFill>
-              </a:rPr>
-              <a:t>Phases 0 and 1: HR sponsors it (P01–P05). Because it decides about people, intensity is Enterprise (P04). It enters "Proposed".</a:t>
-            </a:r>
-          </a:p>
-          <a:p>
-            <a:pPr marL="285750" indent="-285750">
-              <a:spcAft>
-                <a:spcPts val="400"/>
-              </a:spcAft>
-              <a:buClr>
-                <a:srgbClr val="990F3D"/>
-              </a:buClr>
-              <a:buFont typeface="Arial"/>
-              <a:buChar char="•"/>
-            </a:pPr>
-            <a:r>
-              <a:rPr lang="es-ES" sz="1500" dirty="0">
-                <a:solidFill>
-                  <a:srgbClr val="2F2B28"/>
-                </a:solidFill>
-              </a:rPr>
-              <a:t>Phase 2: the hypothesis (P08) promises 40% less screening time against the baseline (P09). The pilot confirms it: G2, Proceed.</a:t>
-            </a:r>
-          </a:p>
-          <a:p>
-            <a:pPr marL="285750" indent="-285750">
-              <a:spcAft>
-                <a:spcPts val="400"/>
-              </a:spcAft>
-              <a:buClr>
-                <a:srgbClr val="990F3D"/>
-              </a:buClr>
-              <a:buFont typeface="Arial"/>
-              <a:buChar char="•"/>
-            </a:pPr>
-            <a:r>
-              <a:rPr lang="es-ES" sz="1500" dirty="0">
-                <a:solidFill>
-                  <a:srgbClr val="2F2B28"/>
-                </a:solidFill>
-              </a:rPr>
-              <a:t>Phase 3: the regulatory classification (P11) makes it a high-risk system. The bias test finds it penalises older candidates.</a:t>
-            </a:r>
-          </a:p>
-          <a:p>
-            <a:pPr marL="285750" indent="-285750">
-              <a:spcAft>
-                <a:spcPts val="400"/>
-              </a:spcAft>
-              <a:buClr>
-                <a:srgbClr val="990F3D"/>
-              </a:buClr>
-              <a:buFont typeface="Arial"/>
-              <a:buChar char="•"/>
-            </a:pPr>
-            <a:r>
-              <a:rPr lang="es-ES" sz="1500" dirty="0">
-                <a:solidFill>
-                  <a:srgbClr val="2F2B28"/>
-                </a:solidFill>
-              </a:rPr>
-              <a:t>It iterates twice, adjusting variables: fixing the bias destroys the predictive power that justified the project.</a:t>
-            </a:r>
-          </a:p>
-          <a:p>
-            <a:pPr marL="285750" indent="-285750">
-              <a:spcAft>
-                <a:spcPts val="400"/>
-              </a:spcAft>
-              <a:buClr>
-                <a:srgbClr val="990F3D"/>
-              </a:buClr>
-              <a:buFont typeface="Arial"/>
-              <a:buChar char="•"/>
-            </a:pPr>
-            <a:r>
-              <a:rPr lang="es-ES" sz="1500" dirty="0">
-                <a:solidFill>
-                  <a:srgbClr val="2F2B28"/>
-                </a:solidFill>
-              </a:rPr>
-              <a:t>G3: high residual risk with no viable mitigation (P12, P13). The AI committee decides to Stop; it is recorded in P29 with its reason.</a:t>
-            </a:r>
-          </a:p>
-          <a:p>
-            <a:pPr marL="285750" indent="-285750">
-              <a:spcAft>
-                <a:spcPts val="400"/>
-              </a:spcAft>
-              <a:buClr>
-                <a:srgbClr val="990F3D"/>
-              </a:buClr>
-              <a:buFont typeface="Arial"/>
-              <a:buChar char="•"/>
-            </a:pPr>
-            <a:r>
-              <a:rPr lang="es-ES" sz="1500" dirty="0">
-                <a:solidFill>
-                  <a:srgbClr val="2F2B28"/>
-                </a:solidFill>
-              </a:rPr>
-              <a:t>In the funnel it shows to the right of "Proof of concept": Discarded · unacceptable risk. Lesson: test for bias earlier, in phase 2.</a:t>
-            </a:r>
-          </a:p>
-        </p:txBody>
-      </p:sp>
-      <p:sp>
-        <p:nvSpPr>
-          <p:cNvPr id="137" name="Caja 137"/>
-          <p:cNvSpPr/>
-          <p:nvPr/>
-        </p:nvSpPr>
-        <p:spPr>
-          <a:xfrm>
-            <a:off x="609600" y="5600000"/>
-            <a:ext cx="10972800" cy="900000"/>
-          </a:xfrm>
-          <a:prstGeom prst="roundRect">
-            <a:avLst>
-              <a:gd name="adj" fmla="val 6000"/>
-            </a:avLst>
-          </a:prstGeom>
-          <a:solidFill>
-            <a:srgbClr val="990F3D"/>
-          </a:solidFill>
-          <a:ln>
-            <a:noFill/>
-          </a:ln>
-        </p:spPr>
-        <p:txBody>
-          <a:bodyPr wrap="square" anchor="ctr" lIns="45720" rIns="45720">
-            <a:noAutofit/>
-          </a:bodyPr>
-          <a:lstStyle/>
-          <a:p>
-            <a:pPr algn="ctr"/>
-            <a:r>
-              <a:rPr lang="es-ES" sz="2100" b="1" dirty="0">
-                <a:solidFill>
-                  <a:srgbClr val="FFFFFF"/>
-                </a:solidFill>
-              </a:rPr>
-              <a:t>STOPPED AT G3 · BUILDING AND RUNNING AN UNVIABLE SYSTEM WAS AVOIDED</a:t>
             </a:r>
           </a:p>
         </p:txBody>
@@ -1866,7 +1849,7 @@
       </p:grpSpPr>
       <p:sp>
         <p:nvSpPr>
-          <p:cNvPr id="158" name="Marca"/>
+          <p:cNvPr id="145" name="Marca"/>
           <p:cNvSpPr/>
           <p:nvPr/>
         </p:nvSpPr>
@@ -1890,7 +1873,7 @@
       </p:sp>
       <p:sp>
         <p:nvSpPr>
-          <p:cNvPr id="159" name="Texto 159"/>
+          <p:cNvPr id="146" name="Texto 146"/>
           <p:cNvSpPr txBox="1"/>
           <p:nvPr/>
         </p:nvSpPr>
@@ -1924,7 +1907,7 @@
       </p:sp>
       <p:sp>
         <p:nvSpPr>
-          <p:cNvPr id="160" name="Texto 160"/>
+          <p:cNvPr id="147" name="Texto 147"/>
           <p:cNvSpPr txBox="1"/>
           <p:nvPr/>
         </p:nvSpPr>
@@ -1951,21 +1934,21 @@
                   <a:srgbClr val="990F3D"/>
                 </a:solidFill>
               </a:rPr>
-              <a:t>Initiative 1, on the lifecycle</a:t>
-            </a:r>
-          </a:p>
-        </p:txBody>
-      </p:sp>
-      <p:sp>
-        <p:nvSpPr>
-          <p:cNvPr id="161" name="Texto 161"/>
+              <a:t>Example 1 · When an initiative stops</a:t>
+            </a:r>
+          </a:p>
+        </p:txBody>
+      </p:sp>
+      <p:sp>
+        <p:nvSpPr>
+          <p:cNvPr id="142" name="Texto 142"/>
           <p:cNvSpPr txBox="1"/>
           <p:nvPr/>
         </p:nvSpPr>
         <p:spPr>
           <a:xfrm>
             <a:off x="609600" y="1330000"/>
-            <a:ext cx="10972800" cy="450000"/>
+            <a:ext cx="10972800" cy="500000"/>
           </a:xfrm>
           <a:prstGeom prst="rect">
             <a:avLst/>
@@ -1980,26 +1963,169 @@
           <a:p>
             <a:pPr algn="l"/>
             <a:r>
+              <a:rPr lang="es-ES" sz="1700" b="1" dirty="0">
+                <a:solidFill>
+                  <a:srgbClr val="2F2B28"/>
+                </a:solidFill>
+              </a:rPr>
+              <a:t>Candidate screening in recruitment (HR)</a:t>
+            </a:r>
+          </a:p>
+        </p:txBody>
+      </p:sp>
+      <p:sp>
+        <p:nvSpPr>
+          <p:cNvPr id="143" name="Texto 143"/>
+          <p:cNvSpPr txBox="1"/>
+          <p:nvPr/>
+        </p:nvSpPr>
+        <p:spPr>
+          <a:xfrm>
+            <a:off x="609600" y="1900000"/>
+            <a:ext cx="10972800" cy="3550000"/>
+          </a:xfrm>
+          <a:prstGeom prst="rect">
+            <a:avLst/>
+          </a:prstGeom>
+          <a:noFill/>
+        </p:spPr>
+        <p:txBody>
+          <a:bodyPr wrap="square" anchor="t" lIns="45720" rIns="45720">
+            <a:noAutofit/>
+          </a:bodyPr>
+          <a:lstStyle/>
+          <a:p>
+            <a:pPr marL="285750" indent="-285750">
+              <a:spcAft>
+                <a:spcPts val="400"/>
+              </a:spcAft>
+              <a:buClr>
+                <a:srgbClr val="990F3D"/>
+              </a:buClr>
+              <a:buFont typeface="Arial"/>
+              <a:buChar char="•"/>
+            </a:pPr>
+            <a:r>
               <a:rPr lang="es-ES" sz="1500" dirty="0">
                 <a:solidFill>
-                  <a:srgbClr val="564D47"/>
-                </a:solidFill>
-              </a:rPr>
-              <a:t>It reached phase 3 and did not pass gate G3</a:t>
-            </a:r>
-          </a:p>
-        </p:txBody>
-      </p:sp>
-      <p:sp>
-        <p:nvSpPr>
-          <p:cNvPr id="141" name="Caja 141"/>
+                  <a:srgbClr val="2F2B28"/>
+                </a:solidFill>
+              </a:rPr>
+              <a:t>Phases 0 and 1: HR sponsors it (P01–P05). Because it decides about people, intensity is Enterprise (P04). It enters "Proposed".</a:t>
+            </a:r>
+          </a:p>
+          <a:p>
+            <a:pPr marL="285750" indent="-285750">
+              <a:spcAft>
+                <a:spcPts val="400"/>
+              </a:spcAft>
+              <a:buClr>
+                <a:srgbClr val="990F3D"/>
+              </a:buClr>
+              <a:buFont typeface="Arial"/>
+              <a:buChar char="•"/>
+            </a:pPr>
+            <a:r>
+              <a:rPr lang="es-ES" sz="1500" dirty="0">
+                <a:solidFill>
+                  <a:srgbClr val="2F2B28"/>
+                </a:solidFill>
+              </a:rPr>
+              <a:t>Phase 2: the hypothesis (P08) promises 40% less screening time against the baseline (P09). The pilot confirms it: G2, Proceed.</a:t>
+            </a:r>
+          </a:p>
+          <a:p>
+            <a:pPr marL="285750" indent="-285750">
+              <a:spcAft>
+                <a:spcPts val="400"/>
+              </a:spcAft>
+              <a:buClr>
+                <a:srgbClr val="990F3D"/>
+              </a:buClr>
+              <a:buFont typeface="Arial"/>
+              <a:buChar char="•"/>
+            </a:pPr>
+            <a:r>
+              <a:rPr lang="es-ES" sz="1500" dirty="0">
+                <a:solidFill>
+                  <a:srgbClr val="2F2B28"/>
+                </a:solidFill>
+              </a:rPr>
+              <a:t>Phase 3: the regulatory classification (P11) makes it a high-risk system. The bias test finds it penalises older candidates.</a:t>
+            </a:r>
+          </a:p>
+          <a:p>
+            <a:pPr marL="285750" indent="-285750">
+              <a:spcAft>
+                <a:spcPts val="400"/>
+              </a:spcAft>
+              <a:buClr>
+                <a:srgbClr val="990F3D"/>
+              </a:buClr>
+              <a:buFont typeface="Arial"/>
+              <a:buChar char="•"/>
+            </a:pPr>
+            <a:r>
+              <a:rPr lang="es-ES" sz="1500" dirty="0">
+                <a:solidFill>
+                  <a:srgbClr val="2F2B28"/>
+                </a:solidFill>
+              </a:rPr>
+              <a:t>It iterates twice, adjusting variables: fixing the bias destroys the predictive power that justified the project.</a:t>
+            </a:r>
+          </a:p>
+          <a:p>
+            <a:pPr marL="285750" indent="-285750">
+              <a:spcAft>
+                <a:spcPts val="400"/>
+              </a:spcAft>
+              <a:buClr>
+                <a:srgbClr val="990F3D"/>
+              </a:buClr>
+              <a:buFont typeface="Arial"/>
+              <a:buChar char="•"/>
+            </a:pPr>
+            <a:r>
+              <a:rPr lang="es-ES" sz="1500" dirty="0">
+                <a:solidFill>
+                  <a:srgbClr val="2F2B28"/>
+                </a:solidFill>
+              </a:rPr>
+              <a:t>G3: high residual risk with no viable mitigation (P12, P13). The AI committee decides to Stop; it is recorded in P29 with its reason.</a:t>
+            </a:r>
+          </a:p>
+          <a:p>
+            <a:pPr marL="285750" indent="-285750">
+              <a:spcAft>
+                <a:spcPts val="400"/>
+              </a:spcAft>
+              <a:buClr>
+                <a:srgbClr val="990F3D"/>
+              </a:buClr>
+              <a:buFont typeface="Arial"/>
+              <a:buChar char="•"/>
+            </a:pPr>
+            <a:r>
+              <a:rPr lang="es-ES" sz="1500" dirty="0">
+                <a:solidFill>
+                  <a:srgbClr val="2F2B28"/>
+                </a:solidFill>
+              </a:rPr>
+              <a:t>In the funnel it shows to the right of "Proof of concept": Discarded · unacceptable risk. Lesson: test for bias earlier, in phase 2.</a:t>
+            </a:r>
+          </a:p>
+        </p:txBody>
+      </p:sp>
+      <p:sp>
+        <p:nvSpPr>
+          <p:cNvPr id="144" name="Caja 144"/>
           <p:cNvSpPr/>
           <p:nvPr/>
         </p:nvSpPr>
         <p:spPr>
           <a:xfrm>
-            <a:off x="681000" y="2350000"/>
-            <a:ext cx="1240000" cy="1500000"/>
+            <a:off x="609600" y="5600000"/>
+            <a:ext cx="10972800" cy="900000"/>
           </a:xfrm>
           <a:prstGeom prst="roundRect">
             <a:avLst>
@@ -2021,693 +2147,12 @@
           <a:p>
             <a:pPr algn="ctr"/>
             <a:r>
-              <a:rPr lang="es-ES" sz="2400" b="1" dirty="0">
+              <a:rPr lang="es-ES" sz="2100" b="1" dirty="0">
                 <a:solidFill>
                   <a:srgbClr val="FFFFFF"/>
                 </a:solidFill>
               </a:rPr>
-              <a:t>F0</a:t>
-            </a:r>
-          </a:p>
-          <a:p>
-            <a:pPr algn="ctr"/>
-            <a:r>
-              <a:rPr lang="es-ES" sz="1050" dirty="0">
-                <a:solidFill>
-                  <a:srgbClr val="FFFFFF"/>
-                </a:solidFill>
-              </a:rPr>
-              <a:t>Context and constraints</a:t>
-            </a:r>
-          </a:p>
-        </p:txBody>
-      </p:sp>
-      <p:sp>
-        <p:nvSpPr>
-          <p:cNvPr id="142" name="Texto 142"/>
-          <p:cNvSpPr txBox="1"/>
-          <p:nvPr/>
-        </p:nvSpPr>
-        <p:spPr>
-          <a:xfrm>
-            <a:off x="1591000" y="3900000"/>
-            <a:ext cx="800000" cy="300000"/>
-          </a:xfrm>
-          <a:prstGeom prst="rect">
-            <a:avLst/>
-          </a:prstGeom>
-          <a:noFill/>
-        </p:spPr>
-        <p:txBody>
-          <a:bodyPr wrap="square" anchor="t" lIns="45720" rIns="45720">
-            <a:noAutofit/>
-          </a:bodyPr>
-          <a:lstStyle/>
-          <a:p>
-            <a:pPr algn="ctr"/>
-            <a:r>
-              <a:rPr lang="es-ES" sz="1200" b="1" dirty="0">
-                <a:solidFill>
-                  <a:srgbClr val="990F3D"/>
-                </a:solidFill>
-              </a:rPr>
-              <a:t>G0</a:t>
-            </a:r>
-          </a:p>
-        </p:txBody>
-      </p:sp>
-      <p:sp>
-        <p:nvSpPr>
-          <p:cNvPr id="143" name="Caja 143"/>
-          <p:cNvSpPr/>
-          <p:nvPr/>
-        </p:nvSpPr>
-        <p:spPr>
-          <a:xfrm>
-            <a:off x="2051000" y="2350000"/>
-            <a:ext cx="1240000" cy="1500000"/>
-          </a:xfrm>
-          <a:prstGeom prst="roundRect">
-            <a:avLst>
-              <a:gd name="adj" fmla="val 6000"/>
-            </a:avLst>
-          </a:prstGeom>
-          <a:solidFill>
-            <a:srgbClr val="990F3D"/>
-          </a:solidFill>
-          <a:ln>
-            <a:noFill/>
-          </a:ln>
-        </p:spPr>
-        <p:txBody>
-          <a:bodyPr wrap="square" anchor="ctr" lIns="45720" rIns="45720">
-            <a:noAutofit/>
-          </a:bodyPr>
-          <a:lstStyle/>
-          <a:p>
-            <a:pPr algn="ctr"/>
-            <a:r>
-              <a:rPr lang="es-ES" sz="2400" b="1" dirty="0">
-                <a:solidFill>
-                  <a:srgbClr val="FFFFFF"/>
-                </a:solidFill>
-              </a:rPr>
-              <a:t>F1</a:t>
-            </a:r>
-          </a:p>
-          <a:p>
-            <a:pPr algn="ctr"/>
-            <a:r>
-              <a:rPr lang="es-ES" sz="1050" dirty="0">
-                <a:solidFill>
-                  <a:srgbClr val="FFFFFF"/>
-                </a:solidFill>
-              </a:rPr>
-              <a:t>Opportunity discovery</a:t>
-            </a:r>
-          </a:p>
-        </p:txBody>
-      </p:sp>
-      <p:sp>
-        <p:nvSpPr>
-          <p:cNvPr id="144" name="Texto 144"/>
-          <p:cNvSpPr txBox="1"/>
-          <p:nvPr/>
-        </p:nvSpPr>
-        <p:spPr>
-          <a:xfrm>
-            <a:off x="2961000" y="3900000"/>
-            <a:ext cx="800000" cy="300000"/>
-          </a:xfrm>
-          <a:prstGeom prst="rect">
-            <a:avLst/>
-          </a:prstGeom>
-          <a:noFill/>
-        </p:spPr>
-        <p:txBody>
-          <a:bodyPr wrap="square" anchor="t" lIns="45720" rIns="45720">
-            <a:noAutofit/>
-          </a:bodyPr>
-          <a:lstStyle/>
-          <a:p>
-            <a:pPr algn="ctr"/>
-            <a:r>
-              <a:rPr lang="es-ES" sz="1200" b="1" dirty="0">
-                <a:solidFill>
-                  <a:srgbClr val="990F3D"/>
-                </a:solidFill>
-              </a:rPr>
-              <a:t>G1</a:t>
-            </a:r>
-          </a:p>
-        </p:txBody>
-      </p:sp>
-      <p:sp>
-        <p:nvSpPr>
-          <p:cNvPr id="145" name="Caja 145"/>
-          <p:cNvSpPr/>
-          <p:nvPr/>
-        </p:nvSpPr>
-        <p:spPr>
-          <a:xfrm>
-            <a:off x="3421000" y="2350000"/>
-            <a:ext cx="1240000" cy="1500000"/>
-          </a:xfrm>
-          <a:prstGeom prst="roundRect">
-            <a:avLst>
-              <a:gd name="adj" fmla="val 6000"/>
-            </a:avLst>
-          </a:prstGeom>
-          <a:solidFill>
-            <a:srgbClr val="990F3D"/>
-          </a:solidFill>
-          <a:ln>
-            <a:noFill/>
-          </a:ln>
-        </p:spPr>
-        <p:txBody>
-          <a:bodyPr wrap="square" anchor="ctr" lIns="45720" rIns="45720">
-            <a:noAutofit/>
-          </a:bodyPr>
-          <a:lstStyle/>
-          <a:p>
-            <a:pPr algn="ctr"/>
-            <a:r>
-              <a:rPr lang="es-ES" sz="2400" b="1" dirty="0">
-                <a:solidFill>
-                  <a:srgbClr val="FFFFFF"/>
-                </a:solidFill>
-              </a:rPr>
-              <a:t>F2</a:t>
-            </a:r>
-          </a:p>
-          <a:p>
-            <a:pPr algn="ctr"/>
-            <a:r>
-              <a:rPr lang="es-ES" sz="1050" dirty="0">
-                <a:solidFill>
-                  <a:srgbClr val="FFFFFF"/>
-                </a:solidFill>
-              </a:rPr>
-              <a:t>Value hypothesis</a:t>
-            </a:r>
-          </a:p>
-        </p:txBody>
-      </p:sp>
-      <p:sp>
-        <p:nvSpPr>
-          <p:cNvPr id="146" name="Texto 146"/>
-          <p:cNvSpPr txBox="1"/>
-          <p:nvPr/>
-        </p:nvSpPr>
-        <p:spPr>
-          <a:xfrm>
-            <a:off x="4331000" y="3900000"/>
-            <a:ext cx="800000" cy="300000"/>
-          </a:xfrm>
-          <a:prstGeom prst="rect">
-            <a:avLst/>
-          </a:prstGeom>
-          <a:noFill/>
-        </p:spPr>
-        <p:txBody>
-          <a:bodyPr wrap="square" anchor="t" lIns="45720" rIns="45720">
-            <a:noAutofit/>
-          </a:bodyPr>
-          <a:lstStyle/>
-          <a:p>
-            <a:pPr algn="ctr"/>
-            <a:r>
-              <a:rPr lang="es-ES" sz="1200" b="1" dirty="0">
-                <a:solidFill>
-                  <a:srgbClr val="990F3D"/>
-                </a:solidFill>
-              </a:rPr>
-              <a:t>G2</a:t>
-            </a:r>
-          </a:p>
-        </p:txBody>
-      </p:sp>
-      <p:sp>
-        <p:nvSpPr>
-          <p:cNvPr id="147" name="Caja 147"/>
-          <p:cNvSpPr/>
-          <p:nvPr/>
-        </p:nvSpPr>
-        <p:spPr>
-          <a:xfrm>
-            <a:off x="4791000" y="2350000"/>
-            <a:ext cx="1240000" cy="1500000"/>
-          </a:xfrm>
-          <a:prstGeom prst="roundRect">
-            <a:avLst>
-              <a:gd name="adj" fmla="val 6000"/>
-            </a:avLst>
-          </a:prstGeom>
-          <a:solidFill>
-            <a:srgbClr val="990F3D"/>
-          </a:solidFill>
-          <a:ln>
-            <a:noFill/>
-          </a:ln>
-        </p:spPr>
-        <p:txBody>
-          <a:bodyPr wrap="square" anchor="ctr" lIns="45720" rIns="45720">
-            <a:noAutofit/>
-          </a:bodyPr>
-          <a:lstStyle/>
-          <a:p>
-            <a:pPr algn="ctr"/>
-            <a:r>
-              <a:rPr lang="es-ES" sz="2400" b="1" dirty="0">
-                <a:solidFill>
-                  <a:srgbClr val="FFFFFF"/>
-                </a:solidFill>
-              </a:rPr>
-              <a:t>F3</a:t>
-            </a:r>
-          </a:p>
-          <a:p>
-            <a:pPr algn="ctr"/>
-            <a:r>
-              <a:rPr lang="es-ES" sz="1050" dirty="0">
-                <a:solidFill>
-                  <a:srgbClr val="FFFFFF"/>
-                </a:solidFill>
-              </a:rPr>
-              <a:t>Feasibility and risk</a:t>
-            </a:r>
-          </a:p>
-        </p:txBody>
-      </p:sp>
-      <p:sp>
-        <p:nvSpPr>
-          <p:cNvPr id="148" name="Texto 148"/>
-          <p:cNvSpPr txBox="1"/>
-          <p:nvPr/>
-        </p:nvSpPr>
-        <p:spPr>
-          <a:xfrm>
-            <a:off x="5701000" y="3900000"/>
-            <a:ext cx="800000" cy="300000"/>
-          </a:xfrm>
-          <a:prstGeom prst="rect">
-            <a:avLst/>
-          </a:prstGeom>
-          <a:noFill/>
-        </p:spPr>
-        <p:txBody>
-          <a:bodyPr wrap="square" anchor="t" lIns="45720" rIns="45720">
-            <a:noAutofit/>
-          </a:bodyPr>
-          <a:lstStyle/>
-          <a:p>
-            <a:pPr algn="ctr"/>
-            <a:r>
-              <a:rPr lang="es-ES" sz="1200" b="1" dirty="0">
-                <a:solidFill>
-                  <a:srgbClr val="990F3D"/>
-                </a:solidFill>
-              </a:rPr>
-              <a:t>G3</a:t>
-            </a:r>
-          </a:p>
-        </p:txBody>
-      </p:sp>
-      <p:sp>
-        <p:nvSpPr>
-          <p:cNvPr id="149" name="Caja 149"/>
-          <p:cNvSpPr/>
-          <p:nvPr/>
-        </p:nvSpPr>
-        <p:spPr>
-          <a:xfrm>
-            <a:off x="6161000" y="2350000"/>
-            <a:ext cx="1240000" cy="1500000"/>
-          </a:xfrm>
-          <a:prstGeom prst="roundRect">
-            <a:avLst>
-              <a:gd name="adj" fmla="val 6000"/>
-            </a:avLst>
-          </a:prstGeom>
-          <a:solidFill>
-            <a:srgbClr val="C9A78D"/>
-          </a:solidFill>
-          <a:ln>
-            <a:noFill/>
-          </a:ln>
-        </p:spPr>
-        <p:txBody>
-          <a:bodyPr wrap="square" anchor="ctr" lIns="45720" rIns="45720">
-            <a:noAutofit/>
-          </a:bodyPr>
-          <a:lstStyle/>
-          <a:p>
-            <a:pPr algn="ctr"/>
-            <a:r>
-              <a:rPr lang="es-ES" sz="2400" b="1" dirty="0">
-                <a:solidFill>
-                  <a:srgbClr val="564D47"/>
-                </a:solidFill>
-              </a:rPr>
-              <a:t>F4</a:t>
-            </a:r>
-          </a:p>
-          <a:p>
-            <a:pPr algn="ctr"/>
-            <a:r>
-              <a:rPr lang="es-ES" sz="1050" dirty="0">
-                <a:solidFill>
-                  <a:srgbClr val="564D47"/>
-                </a:solidFill>
-              </a:rPr>
-              <a:t>Solution design</a:t>
-            </a:r>
-          </a:p>
-        </p:txBody>
-      </p:sp>
-      <p:sp>
-        <p:nvSpPr>
-          <p:cNvPr id="150" name="Texto 150"/>
-          <p:cNvSpPr txBox="1"/>
-          <p:nvPr/>
-        </p:nvSpPr>
-        <p:spPr>
-          <a:xfrm>
-            <a:off x="7071000" y="3900000"/>
-            <a:ext cx="800000" cy="300000"/>
-          </a:xfrm>
-          <a:prstGeom prst="rect">
-            <a:avLst/>
-          </a:prstGeom>
-          <a:noFill/>
-        </p:spPr>
-        <p:txBody>
-          <a:bodyPr wrap="square" anchor="t" lIns="45720" rIns="45720">
-            <a:noAutofit/>
-          </a:bodyPr>
-          <a:lstStyle/>
-          <a:p>
-            <a:pPr algn="ctr"/>
-            <a:r>
-              <a:rPr lang="es-ES" sz="1200" b="1" dirty="0">
-                <a:solidFill>
-                  <a:srgbClr val="990F3D"/>
-                </a:solidFill>
-              </a:rPr>
-              <a:t>G4</a:t>
-            </a:r>
-          </a:p>
-        </p:txBody>
-      </p:sp>
-      <p:sp>
-        <p:nvSpPr>
-          <p:cNvPr id="151" name="Caja 151"/>
-          <p:cNvSpPr/>
-          <p:nvPr/>
-        </p:nvSpPr>
-        <p:spPr>
-          <a:xfrm>
-            <a:off x="7531000" y="2350000"/>
-            <a:ext cx="1240000" cy="1500000"/>
-          </a:xfrm>
-          <a:prstGeom prst="roundRect">
-            <a:avLst>
-              <a:gd name="adj" fmla="val 6000"/>
-            </a:avLst>
-          </a:prstGeom>
-          <a:solidFill>
-            <a:srgbClr val="C9A78D"/>
-          </a:solidFill>
-          <a:ln>
-            <a:noFill/>
-          </a:ln>
-        </p:spPr>
-        <p:txBody>
-          <a:bodyPr wrap="square" anchor="ctr" lIns="45720" rIns="45720">
-            <a:noAutofit/>
-          </a:bodyPr>
-          <a:lstStyle/>
-          <a:p>
-            <a:pPr algn="ctr"/>
-            <a:r>
-              <a:rPr lang="es-ES" sz="2400" b="1" dirty="0">
-                <a:solidFill>
-                  <a:srgbClr val="564D47"/>
-                </a:solidFill>
-              </a:rPr>
-              <a:t>F5</a:t>
-            </a:r>
-          </a:p>
-          <a:p>
-            <a:pPr algn="ctr"/>
-            <a:r>
-              <a:rPr lang="es-ES" sz="1050" dirty="0">
-                <a:solidFill>
-                  <a:srgbClr val="564D47"/>
-                </a:solidFill>
-              </a:rPr>
-              <a:t>Delivery and validation</a:t>
-            </a:r>
-          </a:p>
-        </p:txBody>
-      </p:sp>
-      <p:sp>
-        <p:nvSpPr>
-          <p:cNvPr id="152" name="Texto 152"/>
-          <p:cNvSpPr txBox="1"/>
-          <p:nvPr/>
-        </p:nvSpPr>
-        <p:spPr>
-          <a:xfrm>
-            <a:off x="8441000" y="3900000"/>
-            <a:ext cx="800000" cy="300000"/>
-          </a:xfrm>
-          <a:prstGeom prst="rect">
-            <a:avLst/>
-          </a:prstGeom>
-          <a:noFill/>
-        </p:spPr>
-        <p:txBody>
-          <a:bodyPr wrap="square" anchor="t" lIns="45720" rIns="45720">
-            <a:noAutofit/>
-          </a:bodyPr>
-          <a:lstStyle/>
-          <a:p>
-            <a:pPr algn="ctr"/>
-            <a:r>
-              <a:rPr lang="es-ES" sz="1200" b="1" dirty="0">
-                <a:solidFill>
-                  <a:srgbClr val="990F3D"/>
-                </a:solidFill>
-              </a:rPr>
-              <a:t>G5</a:t>
-            </a:r>
-          </a:p>
-        </p:txBody>
-      </p:sp>
-      <p:sp>
-        <p:nvSpPr>
-          <p:cNvPr id="153" name="Caja 153"/>
-          <p:cNvSpPr/>
-          <p:nvPr/>
-        </p:nvSpPr>
-        <p:spPr>
-          <a:xfrm>
-            <a:off x="8901000" y="2350000"/>
-            <a:ext cx="1240000" cy="1500000"/>
-          </a:xfrm>
-          <a:prstGeom prst="roundRect">
-            <a:avLst>
-              <a:gd name="adj" fmla="val 6000"/>
-            </a:avLst>
-          </a:prstGeom>
-          <a:solidFill>
-            <a:srgbClr val="C9A78D"/>
-          </a:solidFill>
-          <a:ln>
-            <a:noFill/>
-          </a:ln>
-        </p:spPr>
-        <p:txBody>
-          <a:bodyPr wrap="square" anchor="ctr" lIns="45720" rIns="45720">
-            <a:noAutofit/>
-          </a:bodyPr>
-          <a:lstStyle/>
-          <a:p>
-            <a:pPr algn="ctr"/>
-            <a:r>
-              <a:rPr lang="es-ES" sz="2400" b="1" dirty="0">
-                <a:solidFill>
-                  <a:srgbClr val="564D47"/>
-                </a:solidFill>
-              </a:rPr>
-              <a:t>F6</a:t>
-            </a:r>
-          </a:p>
-          <a:p>
-            <a:pPr algn="ctr"/>
-            <a:r>
-              <a:rPr lang="es-ES" sz="1050" dirty="0">
-                <a:solidFill>
-                  <a:srgbClr val="564D47"/>
-                </a:solidFill>
-              </a:rPr>
-              <a:t>Operation and governance</a:t>
-            </a:r>
-          </a:p>
-        </p:txBody>
-      </p:sp>
-      <p:sp>
-        <p:nvSpPr>
-          <p:cNvPr id="154" name="Texto 154"/>
-          <p:cNvSpPr txBox="1"/>
-          <p:nvPr/>
-        </p:nvSpPr>
-        <p:spPr>
-          <a:xfrm>
-            <a:off x="9811000" y="3900000"/>
-            <a:ext cx="800000" cy="300000"/>
-          </a:xfrm>
-          <a:prstGeom prst="rect">
-            <a:avLst/>
-          </a:prstGeom>
-          <a:noFill/>
-        </p:spPr>
-        <p:txBody>
-          <a:bodyPr wrap="square" anchor="t" lIns="45720" rIns="45720">
-            <a:noAutofit/>
-          </a:bodyPr>
-          <a:lstStyle/>
-          <a:p>
-            <a:pPr algn="ctr"/>
-            <a:r>
-              <a:rPr lang="es-ES" sz="1200" b="1" dirty="0">
-                <a:solidFill>
-                  <a:srgbClr val="990F3D"/>
-                </a:solidFill>
-              </a:rPr>
-              <a:t>R6</a:t>
-            </a:r>
-          </a:p>
-        </p:txBody>
-      </p:sp>
-      <p:sp>
-        <p:nvSpPr>
-          <p:cNvPr id="155" name="Caja 155"/>
-          <p:cNvSpPr/>
-          <p:nvPr/>
-        </p:nvSpPr>
-        <p:spPr>
-          <a:xfrm>
-            <a:off x="10271000" y="2350000"/>
-            <a:ext cx="1240000" cy="1500000"/>
-          </a:xfrm>
-          <a:prstGeom prst="roundRect">
-            <a:avLst>
-              <a:gd name="adj" fmla="val 6000"/>
-            </a:avLst>
-          </a:prstGeom>
-          <a:solidFill>
-            <a:srgbClr val="C9A78D"/>
-          </a:solidFill>
-          <a:ln>
-            <a:noFill/>
-          </a:ln>
-        </p:spPr>
-        <p:txBody>
-          <a:bodyPr wrap="square" anchor="ctr" lIns="45720" rIns="45720">
-            <a:noAutofit/>
-          </a:bodyPr>
-          <a:lstStyle/>
-          <a:p>
-            <a:pPr algn="ctr"/>
-            <a:r>
-              <a:rPr lang="es-ES" sz="2400" b="1" dirty="0">
-                <a:solidFill>
-                  <a:srgbClr val="564D47"/>
-                </a:solidFill>
-              </a:rPr>
-              <a:t>F7</a:t>
-            </a:r>
-          </a:p>
-          <a:p>
-            <a:pPr algn="ctr"/>
-            <a:r>
-              <a:rPr lang="es-ES" sz="1050" dirty="0">
-                <a:solidFill>
-                  <a:srgbClr val="564D47"/>
-                </a:solidFill>
-              </a:rPr>
-              <a:t>Evolution or retirement</a:t>
-            </a:r>
-          </a:p>
-        </p:txBody>
-      </p:sp>
-      <p:sp>
-        <p:nvSpPr>
-          <p:cNvPr id="156" name="Texto 156"/>
-          <p:cNvSpPr txBox="1"/>
-          <p:nvPr/>
-        </p:nvSpPr>
-        <p:spPr>
-          <a:xfrm>
-            <a:off x="11181000" y="3900000"/>
-            <a:ext cx="800000" cy="300000"/>
-          </a:xfrm>
-          <a:prstGeom prst="rect">
-            <a:avLst/>
-          </a:prstGeom>
-          <a:noFill/>
-        </p:spPr>
-        <p:txBody>
-          <a:bodyPr wrap="square" anchor="t" lIns="45720" rIns="45720">
-            <a:noAutofit/>
-          </a:bodyPr>
-          <a:lstStyle/>
-          <a:p>
-            <a:pPr algn="ctr"/>
-            <a:r>
-              <a:rPr lang="es-ES" sz="1200" b="1" dirty="0">
-                <a:solidFill>
-                  <a:srgbClr val="990F3D"/>
-                </a:solidFill>
-              </a:rPr>
-              <a:t>G7</a:t>
-            </a:r>
-          </a:p>
-        </p:txBody>
-      </p:sp>
-      <p:sp>
-        <p:nvSpPr>
-          <p:cNvPr id="157" name="Texto 157"/>
-          <p:cNvSpPr txBox="1"/>
-          <p:nvPr/>
-        </p:nvSpPr>
-        <p:spPr>
-          <a:xfrm>
-            <a:off x="609600" y="4430000"/>
-            <a:ext cx="10972800" cy="600000"/>
-          </a:xfrm>
-          <a:prstGeom prst="rect">
-            <a:avLst/>
-          </a:prstGeom>
-          <a:noFill/>
-        </p:spPr>
-        <p:txBody>
-          <a:bodyPr wrap="square" anchor="t" lIns="45720" rIns="45720">
-            <a:noAutofit/>
-          </a:bodyPr>
-          <a:lstStyle/>
-          <a:p>
-            <a:pPr algn="ctr"/>
-            <a:r>
-              <a:rPr lang="es-ES" sz="2200" b="1" dirty="0">
-                <a:solidFill>
-                  <a:srgbClr val="990F3D"/>
-                </a:solidFill>
-              </a:rPr>
-              <a:t>STOPPED AT G3 · it leaves the funnel as "Discarded", with its reason</a:t>
+              <a:t>STOPPED AT G3 · BUILDING AND RUNNING AN UNVIABLE SYSTEM WAS AVOIDED</a:t>
             </a:r>
           </a:p>
         </p:txBody>
@@ -2832,21 +2277,21 @@
                   <a:srgbClr val="990F3D"/>
                 </a:solidFill>
               </a:rPr>
-              <a:t>Example 2 · When an initiative reaches production</a:t>
-            </a:r>
-          </a:p>
-        </p:txBody>
-      </p:sp>
-      <p:sp>
-        <p:nvSpPr>
-          <p:cNvPr id="162" name="Texto 162"/>
+              <a:t>Initiative 1, on the lifecycle</a:t>
+            </a:r>
+          </a:p>
+        </p:txBody>
+      </p:sp>
+      <p:sp>
+        <p:nvSpPr>
+          <p:cNvPr id="168" name="Texto 168"/>
           <p:cNvSpPr txBox="1"/>
           <p:nvPr/>
         </p:nvSpPr>
         <p:spPr>
           <a:xfrm>
             <a:off x="609600" y="1330000"/>
-            <a:ext cx="10972800" cy="500000"/>
+            <a:ext cx="10972800" cy="450000"/>
           </a:xfrm>
           <a:prstGeom prst="rect">
             <a:avLst/>
@@ -2861,169 +2306,26 @@
           <a:p>
             <a:pPr algn="l"/>
             <a:r>
-              <a:rPr lang="es-ES" sz="1700" b="1" dirty="0">
-                <a:solidFill>
-                  <a:srgbClr val="2F2B28"/>
-                </a:solidFill>
-              </a:rPr>
-              <a:t>First-line IT incident response assistant</a:t>
-            </a:r>
-          </a:p>
-        </p:txBody>
-      </p:sp>
-      <p:sp>
-        <p:nvSpPr>
-          <p:cNvPr id="163" name="Texto 163"/>
-          <p:cNvSpPr txBox="1"/>
-          <p:nvPr/>
-        </p:nvSpPr>
-        <p:spPr>
-          <a:xfrm>
-            <a:off x="609600" y="1900000"/>
-            <a:ext cx="10972800" cy="3550000"/>
-          </a:xfrm>
-          <a:prstGeom prst="rect">
-            <a:avLst/>
-          </a:prstGeom>
-          <a:noFill/>
-        </p:spPr>
-        <p:txBody>
-          <a:bodyPr wrap="square" anchor="t" lIns="45720" rIns="45720">
-            <a:noAutofit/>
-          </a:bodyPr>
-          <a:lstStyle/>
-          <a:p>
-            <a:pPr marL="285750" indent="-285750">
-              <a:spcAft>
-                <a:spcPts val="400"/>
-              </a:spcAft>
-              <a:buClr>
-                <a:srgbClr val="990F3D"/>
-              </a:buClr>
-              <a:buFont typeface="Arial"/>
-              <a:buChar char="•"/>
-            </a:pPr>
-            <a:r>
               <a:rPr lang="es-ES" sz="1500" dirty="0">
                 <a:solidFill>
-                  <a:srgbClr val="2F2B28"/>
-                </a:solidFill>
-              </a:rPr>
-              <a:t>Phases 0 and 1: IT sponsors it; against the non-AI alternative (more staff), the operations sphere with Optimise ambition is proposed (P07).</a:t>
-            </a:r>
-          </a:p>
-          <a:p>
-            <a:pPr marL="285750" indent="-285750">
-              <a:spcAft>
-                <a:spcPts val="400"/>
-              </a:spcAft>
-              <a:buClr>
-                <a:srgbClr val="990F3D"/>
-              </a:buClr>
-              <a:buFont typeface="Arial"/>
-              <a:buChar char="•"/>
-            </a:pPr>
-            <a:r>
-              <a:rPr lang="es-ES" sz="1500" dirty="0">
-                <a:solidFill>
-                  <a:srgbClr val="2F2B28"/>
-                </a:solidFill>
-              </a:rPr>
-              <a:t>Phase 2: hypothesis of 30% less resolution time for simple incidents; the controlled pilot yields 32%.</a:t>
-            </a:r>
-          </a:p>
-          <a:p>
-            <a:pPr marL="285750" indent="-285750">
-              <a:spcAft>
-                <a:spcPts val="400"/>
-              </a:spcAft>
-              <a:buClr>
-                <a:srgbClr val="990F3D"/>
-              </a:buClr>
-              <a:buFont typeface="Arial"/>
-              <a:buChar char="•"/>
-            </a:pPr>
-            <a:r>
-              <a:rPr lang="es-ES" sz="1500" dirty="0">
-                <a:solidFill>
-                  <a:srgbClr val="2F2B28"/>
-                </a:solidFill>
-              </a:rPr>
-              <a:t>Phase 3: no relevant bias, medium residual risk accepted by the right body (P12), supplier assessed (P14). G3, Proceed.</a:t>
-            </a:r>
-          </a:p>
-          <a:p>
-            <a:pPr marL="285750" indent="-285750">
-              <a:spcAft>
-                <a:spcPts val="400"/>
-              </a:spcAft>
-              <a:buClr>
-                <a:srgbClr val="990F3D"/>
-              </a:buClr>
-              <a:buFont typeface="Arial"/>
-              <a:buChar char="•"/>
-            </a:pPr>
-            <a:r>
-              <a:rPr lang="es-ES" sz="1500" dirty="0">
-                <a:solidFill>
-                  <a:srgbClr val="2F2B28"/>
-                </a:solidFill>
-              </a:rPr>
-              <a:t>Phases 4 and 5: mandatory human oversight above a severity level (P17), tested rollback (P19) and go-live sign-off (P23).</a:t>
-            </a:r>
-          </a:p>
-          <a:p>
-            <a:pPr marL="285750" indent="-285750">
-              <a:spcAft>
-                <a:spcPts val="400"/>
-              </a:spcAft>
-              <a:buClr>
-                <a:srgbClr val="990F3D"/>
-              </a:buClr>
-              <a:buFont typeface="Arial"/>
-              <a:buChar char="•"/>
-            </a:pPr>
-            <a:r>
-              <a:rPr lang="es-ES" sz="1500" dirty="0">
-                <a:solidFill>
-                  <a:srgbClr val="2F2B28"/>
-                </a:solidFill>
-              </a:rPr>
-              <a:t>Phase 6: fourteen months in use. Finance validates €1.1M a year (P28); released capacity was reassigned to complex incidents.</a:t>
-            </a:r>
-          </a:p>
-          <a:p>
-            <a:pPr marL="285750" indent="-285750">
-              <a:spcAft>
-                <a:spcPts val="400"/>
-              </a:spcAft>
-              <a:buClr>
-                <a:srgbClr val="990F3D"/>
-              </a:buClr>
-              <a:buFont typeface="Arial"/>
-              <a:buChar char="•"/>
-            </a:pPr>
-            <a:r>
-              <a:rPr lang="es-ES" sz="1500" dirty="0">
-                <a:solidFill>
-                  <a:srgbClr val="2F2B28"/>
-                </a:solidFill>
-              </a:rPr>
-              <a:t>In the funnel it sits under "In use"; on the dashboard it adds to annual net because its value is validated, not declared.</a:t>
-            </a:r>
-          </a:p>
-        </p:txBody>
-      </p:sp>
-      <p:sp>
-        <p:nvSpPr>
-          <p:cNvPr id="164" name="Caja 164"/>
+                  <a:srgbClr val="564D47"/>
+                </a:solidFill>
+              </a:rPr>
+              <a:t>It reached phase 3 and did not pass gate G3</a:t>
+            </a:r>
+          </a:p>
+        </p:txBody>
+      </p:sp>
+      <p:sp>
+        <p:nvSpPr>
+          <p:cNvPr id="148" name="Caja 148"/>
           <p:cNvSpPr/>
           <p:nvPr/>
         </p:nvSpPr>
         <p:spPr>
           <a:xfrm>
-            <a:off x="609600" y="5600000"/>
-            <a:ext cx="10972800" cy="900000"/>
+            <a:off x="681000" y="2350000"/>
+            <a:ext cx="1240000" cy="1500000"/>
           </a:xfrm>
           <a:prstGeom prst="roundRect">
             <a:avLst>
@@ -3031,7 +2333,7 @@
             </a:avLst>
           </a:prstGeom>
           <a:solidFill>
-            <a:srgbClr val="0D7680"/>
+            <a:srgbClr val="990F3D"/>
           </a:solidFill>
           <a:ln>
             <a:noFill/>
@@ -3045,12 +2347,693 @@
           <a:p>
             <a:pPr algn="ctr"/>
             <a:r>
-              <a:rPr lang="es-ES" sz="2100" b="1" dirty="0">
+              <a:rPr lang="es-ES" sz="2400" b="1" dirty="0">
                 <a:solidFill>
                   <a:srgbClr val="FFFFFF"/>
                 </a:solidFill>
               </a:rPr>
-              <a:t>IN PRODUCTION · €1.1M OF VALIDATED ANNUAL RETURN · QUARTERLY R6</a:t>
+              <a:t>F0</a:t>
+            </a:r>
+          </a:p>
+          <a:p>
+            <a:pPr algn="ctr"/>
+            <a:r>
+              <a:rPr lang="es-ES" sz="1050" dirty="0">
+                <a:solidFill>
+                  <a:srgbClr val="FFFFFF"/>
+                </a:solidFill>
+              </a:rPr>
+              <a:t>Context and constraints</a:t>
+            </a:r>
+          </a:p>
+        </p:txBody>
+      </p:sp>
+      <p:sp>
+        <p:nvSpPr>
+          <p:cNvPr id="149" name="Texto 149"/>
+          <p:cNvSpPr txBox="1"/>
+          <p:nvPr/>
+        </p:nvSpPr>
+        <p:spPr>
+          <a:xfrm>
+            <a:off x="1591000" y="3900000"/>
+            <a:ext cx="800000" cy="300000"/>
+          </a:xfrm>
+          <a:prstGeom prst="rect">
+            <a:avLst/>
+          </a:prstGeom>
+          <a:noFill/>
+        </p:spPr>
+        <p:txBody>
+          <a:bodyPr wrap="square" anchor="t" lIns="45720" rIns="45720">
+            <a:noAutofit/>
+          </a:bodyPr>
+          <a:lstStyle/>
+          <a:p>
+            <a:pPr algn="ctr"/>
+            <a:r>
+              <a:rPr lang="es-ES" sz="1200" b="1" dirty="0">
+                <a:solidFill>
+                  <a:srgbClr val="990F3D"/>
+                </a:solidFill>
+              </a:rPr>
+              <a:t>G0</a:t>
+            </a:r>
+          </a:p>
+        </p:txBody>
+      </p:sp>
+      <p:sp>
+        <p:nvSpPr>
+          <p:cNvPr id="150" name="Caja 150"/>
+          <p:cNvSpPr/>
+          <p:nvPr/>
+        </p:nvSpPr>
+        <p:spPr>
+          <a:xfrm>
+            <a:off x="2051000" y="2350000"/>
+            <a:ext cx="1240000" cy="1500000"/>
+          </a:xfrm>
+          <a:prstGeom prst="roundRect">
+            <a:avLst>
+              <a:gd name="adj" fmla="val 6000"/>
+            </a:avLst>
+          </a:prstGeom>
+          <a:solidFill>
+            <a:srgbClr val="990F3D"/>
+          </a:solidFill>
+          <a:ln>
+            <a:noFill/>
+          </a:ln>
+        </p:spPr>
+        <p:txBody>
+          <a:bodyPr wrap="square" anchor="ctr" lIns="45720" rIns="45720">
+            <a:noAutofit/>
+          </a:bodyPr>
+          <a:lstStyle/>
+          <a:p>
+            <a:pPr algn="ctr"/>
+            <a:r>
+              <a:rPr lang="es-ES" sz="2400" b="1" dirty="0">
+                <a:solidFill>
+                  <a:srgbClr val="FFFFFF"/>
+                </a:solidFill>
+              </a:rPr>
+              <a:t>F1</a:t>
+            </a:r>
+          </a:p>
+          <a:p>
+            <a:pPr algn="ctr"/>
+            <a:r>
+              <a:rPr lang="es-ES" sz="1050" dirty="0">
+                <a:solidFill>
+                  <a:srgbClr val="FFFFFF"/>
+                </a:solidFill>
+              </a:rPr>
+              <a:t>Opportunity discovery</a:t>
+            </a:r>
+          </a:p>
+        </p:txBody>
+      </p:sp>
+      <p:sp>
+        <p:nvSpPr>
+          <p:cNvPr id="151" name="Texto 151"/>
+          <p:cNvSpPr txBox="1"/>
+          <p:nvPr/>
+        </p:nvSpPr>
+        <p:spPr>
+          <a:xfrm>
+            <a:off x="2961000" y="3900000"/>
+            <a:ext cx="800000" cy="300000"/>
+          </a:xfrm>
+          <a:prstGeom prst="rect">
+            <a:avLst/>
+          </a:prstGeom>
+          <a:noFill/>
+        </p:spPr>
+        <p:txBody>
+          <a:bodyPr wrap="square" anchor="t" lIns="45720" rIns="45720">
+            <a:noAutofit/>
+          </a:bodyPr>
+          <a:lstStyle/>
+          <a:p>
+            <a:pPr algn="ctr"/>
+            <a:r>
+              <a:rPr lang="es-ES" sz="1200" b="1" dirty="0">
+                <a:solidFill>
+                  <a:srgbClr val="990F3D"/>
+                </a:solidFill>
+              </a:rPr>
+              <a:t>G1</a:t>
+            </a:r>
+          </a:p>
+        </p:txBody>
+      </p:sp>
+      <p:sp>
+        <p:nvSpPr>
+          <p:cNvPr id="152" name="Caja 152"/>
+          <p:cNvSpPr/>
+          <p:nvPr/>
+        </p:nvSpPr>
+        <p:spPr>
+          <a:xfrm>
+            <a:off x="3421000" y="2350000"/>
+            <a:ext cx="1240000" cy="1500000"/>
+          </a:xfrm>
+          <a:prstGeom prst="roundRect">
+            <a:avLst>
+              <a:gd name="adj" fmla="val 6000"/>
+            </a:avLst>
+          </a:prstGeom>
+          <a:solidFill>
+            <a:srgbClr val="990F3D"/>
+          </a:solidFill>
+          <a:ln>
+            <a:noFill/>
+          </a:ln>
+        </p:spPr>
+        <p:txBody>
+          <a:bodyPr wrap="square" anchor="ctr" lIns="45720" rIns="45720">
+            <a:noAutofit/>
+          </a:bodyPr>
+          <a:lstStyle/>
+          <a:p>
+            <a:pPr algn="ctr"/>
+            <a:r>
+              <a:rPr lang="es-ES" sz="2400" b="1" dirty="0">
+                <a:solidFill>
+                  <a:srgbClr val="FFFFFF"/>
+                </a:solidFill>
+              </a:rPr>
+              <a:t>F2</a:t>
+            </a:r>
+          </a:p>
+          <a:p>
+            <a:pPr algn="ctr"/>
+            <a:r>
+              <a:rPr lang="es-ES" sz="1050" dirty="0">
+                <a:solidFill>
+                  <a:srgbClr val="FFFFFF"/>
+                </a:solidFill>
+              </a:rPr>
+              <a:t>Value hypothesis</a:t>
+            </a:r>
+          </a:p>
+        </p:txBody>
+      </p:sp>
+      <p:sp>
+        <p:nvSpPr>
+          <p:cNvPr id="153" name="Texto 153"/>
+          <p:cNvSpPr txBox="1"/>
+          <p:nvPr/>
+        </p:nvSpPr>
+        <p:spPr>
+          <a:xfrm>
+            <a:off x="4331000" y="3900000"/>
+            <a:ext cx="800000" cy="300000"/>
+          </a:xfrm>
+          <a:prstGeom prst="rect">
+            <a:avLst/>
+          </a:prstGeom>
+          <a:noFill/>
+        </p:spPr>
+        <p:txBody>
+          <a:bodyPr wrap="square" anchor="t" lIns="45720" rIns="45720">
+            <a:noAutofit/>
+          </a:bodyPr>
+          <a:lstStyle/>
+          <a:p>
+            <a:pPr algn="ctr"/>
+            <a:r>
+              <a:rPr lang="es-ES" sz="1200" b="1" dirty="0">
+                <a:solidFill>
+                  <a:srgbClr val="990F3D"/>
+                </a:solidFill>
+              </a:rPr>
+              <a:t>G2</a:t>
+            </a:r>
+          </a:p>
+        </p:txBody>
+      </p:sp>
+      <p:sp>
+        <p:nvSpPr>
+          <p:cNvPr id="154" name="Caja 154"/>
+          <p:cNvSpPr/>
+          <p:nvPr/>
+        </p:nvSpPr>
+        <p:spPr>
+          <a:xfrm>
+            <a:off x="4791000" y="2350000"/>
+            <a:ext cx="1240000" cy="1500000"/>
+          </a:xfrm>
+          <a:prstGeom prst="roundRect">
+            <a:avLst>
+              <a:gd name="adj" fmla="val 6000"/>
+            </a:avLst>
+          </a:prstGeom>
+          <a:solidFill>
+            <a:srgbClr val="990F3D"/>
+          </a:solidFill>
+          <a:ln>
+            <a:noFill/>
+          </a:ln>
+        </p:spPr>
+        <p:txBody>
+          <a:bodyPr wrap="square" anchor="ctr" lIns="45720" rIns="45720">
+            <a:noAutofit/>
+          </a:bodyPr>
+          <a:lstStyle/>
+          <a:p>
+            <a:pPr algn="ctr"/>
+            <a:r>
+              <a:rPr lang="es-ES" sz="2400" b="1" dirty="0">
+                <a:solidFill>
+                  <a:srgbClr val="FFFFFF"/>
+                </a:solidFill>
+              </a:rPr>
+              <a:t>F3</a:t>
+            </a:r>
+          </a:p>
+          <a:p>
+            <a:pPr algn="ctr"/>
+            <a:r>
+              <a:rPr lang="es-ES" sz="1050" dirty="0">
+                <a:solidFill>
+                  <a:srgbClr val="FFFFFF"/>
+                </a:solidFill>
+              </a:rPr>
+              <a:t>Feasibility and risk</a:t>
+            </a:r>
+          </a:p>
+        </p:txBody>
+      </p:sp>
+      <p:sp>
+        <p:nvSpPr>
+          <p:cNvPr id="155" name="Texto 155"/>
+          <p:cNvSpPr txBox="1"/>
+          <p:nvPr/>
+        </p:nvSpPr>
+        <p:spPr>
+          <a:xfrm>
+            <a:off x="5701000" y="3900000"/>
+            <a:ext cx="800000" cy="300000"/>
+          </a:xfrm>
+          <a:prstGeom prst="rect">
+            <a:avLst/>
+          </a:prstGeom>
+          <a:noFill/>
+        </p:spPr>
+        <p:txBody>
+          <a:bodyPr wrap="square" anchor="t" lIns="45720" rIns="45720">
+            <a:noAutofit/>
+          </a:bodyPr>
+          <a:lstStyle/>
+          <a:p>
+            <a:pPr algn="ctr"/>
+            <a:r>
+              <a:rPr lang="es-ES" sz="1200" b="1" dirty="0">
+                <a:solidFill>
+                  <a:srgbClr val="990F3D"/>
+                </a:solidFill>
+              </a:rPr>
+              <a:t>G3</a:t>
+            </a:r>
+          </a:p>
+        </p:txBody>
+      </p:sp>
+      <p:sp>
+        <p:nvSpPr>
+          <p:cNvPr id="156" name="Caja 156"/>
+          <p:cNvSpPr/>
+          <p:nvPr/>
+        </p:nvSpPr>
+        <p:spPr>
+          <a:xfrm>
+            <a:off x="6161000" y="2350000"/>
+            <a:ext cx="1240000" cy="1500000"/>
+          </a:xfrm>
+          <a:prstGeom prst="roundRect">
+            <a:avLst>
+              <a:gd name="adj" fmla="val 6000"/>
+            </a:avLst>
+          </a:prstGeom>
+          <a:solidFill>
+            <a:srgbClr val="C9A78D"/>
+          </a:solidFill>
+          <a:ln>
+            <a:noFill/>
+          </a:ln>
+        </p:spPr>
+        <p:txBody>
+          <a:bodyPr wrap="square" anchor="ctr" lIns="45720" rIns="45720">
+            <a:noAutofit/>
+          </a:bodyPr>
+          <a:lstStyle/>
+          <a:p>
+            <a:pPr algn="ctr"/>
+            <a:r>
+              <a:rPr lang="es-ES" sz="2400" b="1" dirty="0">
+                <a:solidFill>
+                  <a:srgbClr val="564D47"/>
+                </a:solidFill>
+              </a:rPr>
+              <a:t>F4</a:t>
+            </a:r>
+          </a:p>
+          <a:p>
+            <a:pPr algn="ctr"/>
+            <a:r>
+              <a:rPr lang="es-ES" sz="1050" dirty="0">
+                <a:solidFill>
+                  <a:srgbClr val="564D47"/>
+                </a:solidFill>
+              </a:rPr>
+              <a:t>Solution design</a:t>
+            </a:r>
+          </a:p>
+        </p:txBody>
+      </p:sp>
+      <p:sp>
+        <p:nvSpPr>
+          <p:cNvPr id="157" name="Texto 157"/>
+          <p:cNvSpPr txBox="1"/>
+          <p:nvPr/>
+        </p:nvSpPr>
+        <p:spPr>
+          <a:xfrm>
+            <a:off x="7071000" y="3900000"/>
+            <a:ext cx="800000" cy="300000"/>
+          </a:xfrm>
+          <a:prstGeom prst="rect">
+            <a:avLst/>
+          </a:prstGeom>
+          <a:noFill/>
+        </p:spPr>
+        <p:txBody>
+          <a:bodyPr wrap="square" anchor="t" lIns="45720" rIns="45720">
+            <a:noAutofit/>
+          </a:bodyPr>
+          <a:lstStyle/>
+          <a:p>
+            <a:pPr algn="ctr"/>
+            <a:r>
+              <a:rPr lang="es-ES" sz="1200" b="1" dirty="0">
+                <a:solidFill>
+                  <a:srgbClr val="990F3D"/>
+                </a:solidFill>
+              </a:rPr>
+              <a:t>G4</a:t>
+            </a:r>
+          </a:p>
+        </p:txBody>
+      </p:sp>
+      <p:sp>
+        <p:nvSpPr>
+          <p:cNvPr id="158" name="Caja 158"/>
+          <p:cNvSpPr/>
+          <p:nvPr/>
+        </p:nvSpPr>
+        <p:spPr>
+          <a:xfrm>
+            <a:off x="7531000" y="2350000"/>
+            <a:ext cx="1240000" cy="1500000"/>
+          </a:xfrm>
+          <a:prstGeom prst="roundRect">
+            <a:avLst>
+              <a:gd name="adj" fmla="val 6000"/>
+            </a:avLst>
+          </a:prstGeom>
+          <a:solidFill>
+            <a:srgbClr val="C9A78D"/>
+          </a:solidFill>
+          <a:ln>
+            <a:noFill/>
+          </a:ln>
+        </p:spPr>
+        <p:txBody>
+          <a:bodyPr wrap="square" anchor="ctr" lIns="45720" rIns="45720">
+            <a:noAutofit/>
+          </a:bodyPr>
+          <a:lstStyle/>
+          <a:p>
+            <a:pPr algn="ctr"/>
+            <a:r>
+              <a:rPr lang="es-ES" sz="2400" b="1" dirty="0">
+                <a:solidFill>
+                  <a:srgbClr val="564D47"/>
+                </a:solidFill>
+              </a:rPr>
+              <a:t>F5</a:t>
+            </a:r>
+          </a:p>
+          <a:p>
+            <a:pPr algn="ctr"/>
+            <a:r>
+              <a:rPr lang="es-ES" sz="1050" dirty="0">
+                <a:solidFill>
+                  <a:srgbClr val="564D47"/>
+                </a:solidFill>
+              </a:rPr>
+              <a:t>Delivery and validation</a:t>
+            </a:r>
+          </a:p>
+        </p:txBody>
+      </p:sp>
+      <p:sp>
+        <p:nvSpPr>
+          <p:cNvPr id="159" name="Texto 159"/>
+          <p:cNvSpPr txBox="1"/>
+          <p:nvPr/>
+        </p:nvSpPr>
+        <p:spPr>
+          <a:xfrm>
+            <a:off x="8441000" y="3900000"/>
+            <a:ext cx="800000" cy="300000"/>
+          </a:xfrm>
+          <a:prstGeom prst="rect">
+            <a:avLst/>
+          </a:prstGeom>
+          <a:noFill/>
+        </p:spPr>
+        <p:txBody>
+          <a:bodyPr wrap="square" anchor="t" lIns="45720" rIns="45720">
+            <a:noAutofit/>
+          </a:bodyPr>
+          <a:lstStyle/>
+          <a:p>
+            <a:pPr algn="ctr"/>
+            <a:r>
+              <a:rPr lang="es-ES" sz="1200" b="1" dirty="0">
+                <a:solidFill>
+                  <a:srgbClr val="990F3D"/>
+                </a:solidFill>
+              </a:rPr>
+              <a:t>G5</a:t>
+            </a:r>
+          </a:p>
+        </p:txBody>
+      </p:sp>
+      <p:sp>
+        <p:nvSpPr>
+          <p:cNvPr id="160" name="Caja 160"/>
+          <p:cNvSpPr/>
+          <p:nvPr/>
+        </p:nvSpPr>
+        <p:spPr>
+          <a:xfrm>
+            <a:off x="8901000" y="2350000"/>
+            <a:ext cx="1240000" cy="1500000"/>
+          </a:xfrm>
+          <a:prstGeom prst="roundRect">
+            <a:avLst>
+              <a:gd name="adj" fmla="val 6000"/>
+            </a:avLst>
+          </a:prstGeom>
+          <a:solidFill>
+            <a:srgbClr val="C9A78D"/>
+          </a:solidFill>
+          <a:ln>
+            <a:noFill/>
+          </a:ln>
+        </p:spPr>
+        <p:txBody>
+          <a:bodyPr wrap="square" anchor="ctr" lIns="45720" rIns="45720">
+            <a:noAutofit/>
+          </a:bodyPr>
+          <a:lstStyle/>
+          <a:p>
+            <a:pPr algn="ctr"/>
+            <a:r>
+              <a:rPr lang="es-ES" sz="2400" b="1" dirty="0">
+                <a:solidFill>
+                  <a:srgbClr val="564D47"/>
+                </a:solidFill>
+              </a:rPr>
+              <a:t>F6</a:t>
+            </a:r>
+          </a:p>
+          <a:p>
+            <a:pPr algn="ctr"/>
+            <a:r>
+              <a:rPr lang="es-ES" sz="1050" dirty="0">
+                <a:solidFill>
+                  <a:srgbClr val="564D47"/>
+                </a:solidFill>
+              </a:rPr>
+              <a:t>Operation and governance</a:t>
+            </a:r>
+          </a:p>
+        </p:txBody>
+      </p:sp>
+      <p:sp>
+        <p:nvSpPr>
+          <p:cNvPr id="161" name="Texto 161"/>
+          <p:cNvSpPr txBox="1"/>
+          <p:nvPr/>
+        </p:nvSpPr>
+        <p:spPr>
+          <a:xfrm>
+            <a:off x="9811000" y="3900000"/>
+            <a:ext cx="800000" cy="300000"/>
+          </a:xfrm>
+          <a:prstGeom prst="rect">
+            <a:avLst/>
+          </a:prstGeom>
+          <a:noFill/>
+        </p:spPr>
+        <p:txBody>
+          <a:bodyPr wrap="square" anchor="t" lIns="45720" rIns="45720">
+            <a:noAutofit/>
+          </a:bodyPr>
+          <a:lstStyle/>
+          <a:p>
+            <a:pPr algn="ctr"/>
+            <a:r>
+              <a:rPr lang="es-ES" sz="1200" b="1" dirty="0">
+                <a:solidFill>
+                  <a:srgbClr val="990F3D"/>
+                </a:solidFill>
+              </a:rPr>
+              <a:t>R6</a:t>
+            </a:r>
+          </a:p>
+        </p:txBody>
+      </p:sp>
+      <p:sp>
+        <p:nvSpPr>
+          <p:cNvPr id="162" name="Caja 162"/>
+          <p:cNvSpPr/>
+          <p:nvPr/>
+        </p:nvSpPr>
+        <p:spPr>
+          <a:xfrm>
+            <a:off x="10271000" y="2350000"/>
+            <a:ext cx="1240000" cy="1500000"/>
+          </a:xfrm>
+          <a:prstGeom prst="roundRect">
+            <a:avLst>
+              <a:gd name="adj" fmla="val 6000"/>
+            </a:avLst>
+          </a:prstGeom>
+          <a:solidFill>
+            <a:srgbClr val="C9A78D"/>
+          </a:solidFill>
+          <a:ln>
+            <a:noFill/>
+          </a:ln>
+        </p:spPr>
+        <p:txBody>
+          <a:bodyPr wrap="square" anchor="ctr" lIns="45720" rIns="45720">
+            <a:noAutofit/>
+          </a:bodyPr>
+          <a:lstStyle/>
+          <a:p>
+            <a:pPr algn="ctr"/>
+            <a:r>
+              <a:rPr lang="es-ES" sz="2400" b="1" dirty="0">
+                <a:solidFill>
+                  <a:srgbClr val="564D47"/>
+                </a:solidFill>
+              </a:rPr>
+              <a:t>F7</a:t>
+            </a:r>
+          </a:p>
+          <a:p>
+            <a:pPr algn="ctr"/>
+            <a:r>
+              <a:rPr lang="es-ES" sz="1050" dirty="0">
+                <a:solidFill>
+                  <a:srgbClr val="564D47"/>
+                </a:solidFill>
+              </a:rPr>
+              <a:t>Evolution or retirement</a:t>
+            </a:r>
+          </a:p>
+        </p:txBody>
+      </p:sp>
+      <p:sp>
+        <p:nvSpPr>
+          <p:cNvPr id="163" name="Texto 163"/>
+          <p:cNvSpPr txBox="1"/>
+          <p:nvPr/>
+        </p:nvSpPr>
+        <p:spPr>
+          <a:xfrm>
+            <a:off x="11181000" y="3900000"/>
+            <a:ext cx="800000" cy="300000"/>
+          </a:xfrm>
+          <a:prstGeom prst="rect">
+            <a:avLst/>
+          </a:prstGeom>
+          <a:noFill/>
+        </p:spPr>
+        <p:txBody>
+          <a:bodyPr wrap="square" anchor="t" lIns="45720" rIns="45720">
+            <a:noAutofit/>
+          </a:bodyPr>
+          <a:lstStyle/>
+          <a:p>
+            <a:pPr algn="ctr"/>
+            <a:r>
+              <a:rPr lang="es-ES" sz="1200" b="1" dirty="0">
+                <a:solidFill>
+                  <a:srgbClr val="990F3D"/>
+                </a:solidFill>
+              </a:rPr>
+              <a:t>G7</a:t>
+            </a:r>
+          </a:p>
+        </p:txBody>
+      </p:sp>
+      <p:sp>
+        <p:nvSpPr>
+          <p:cNvPr id="164" name="Texto 164"/>
+          <p:cNvSpPr txBox="1"/>
+          <p:nvPr/>
+        </p:nvSpPr>
+        <p:spPr>
+          <a:xfrm>
+            <a:off x="609600" y="4430000"/>
+            <a:ext cx="10972800" cy="600000"/>
+          </a:xfrm>
+          <a:prstGeom prst="rect">
+            <a:avLst/>
+          </a:prstGeom>
+          <a:noFill/>
+        </p:spPr>
+        <p:txBody>
+          <a:bodyPr wrap="square" anchor="t" lIns="45720" rIns="45720">
+            <a:noAutofit/>
+          </a:bodyPr>
+          <a:lstStyle/>
+          <a:p>
+            <a:pPr algn="ctr"/>
+            <a:r>
+              <a:rPr lang="es-ES" sz="2200" b="1" dirty="0">
+                <a:solidFill>
+                  <a:srgbClr val="990F3D"/>
+                </a:solidFill>
+              </a:rPr>
+              <a:t>STOPPED AT G3 · it leaves the funnel as "Discarded", with its reason</a:t>
             </a:r>
           </a:p>
         </p:txBody>
@@ -3090,7 +3073,7 @@
       </p:grpSpPr>
       <p:sp>
         <p:nvSpPr>
-          <p:cNvPr id="185" name="Marca"/>
+          <p:cNvPr id="172" name="Marca"/>
           <p:cNvSpPr/>
           <p:nvPr/>
         </p:nvSpPr>
@@ -3114,7 +3097,7 @@
       </p:sp>
       <p:sp>
         <p:nvSpPr>
-          <p:cNvPr id="186" name="Texto 186"/>
+          <p:cNvPr id="173" name="Texto 173"/>
           <p:cNvSpPr txBox="1"/>
           <p:nvPr/>
         </p:nvSpPr>
@@ -3148,7 +3131,7 @@
       </p:sp>
       <p:sp>
         <p:nvSpPr>
-          <p:cNvPr id="187" name="Texto 187"/>
+          <p:cNvPr id="174" name="Texto 174"/>
           <p:cNvSpPr txBox="1"/>
           <p:nvPr/>
         </p:nvSpPr>
@@ -3175,21 +3158,21 @@
                   <a:srgbClr val="990F3D"/>
                 </a:solidFill>
               </a:rPr>
-              <a:t>Initiative 2, on the lifecycle</a:t>
-            </a:r>
-          </a:p>
-        </p:txBody>
-      </p:sp>
-      <p:sp>
-        <p:nvSpPr>
-          <p:cNvPr id="188" name="Texto 188"/>
+              <a:t>Example 2 · When an initiative reaches production</a:t>
+            </a:r>
+          </a:p>
+        </p:txBody>
+      </p:sp>
+      <p:sp>
+        <p:nvSpPr>
+          <p:cNvPr id="169" name="Texto 169"/>
           <p:cNvSpPr txBox="1"/>
           <p:nvPr/>
         </p:nvSpPr>
         <p:spPr>
           <a:xfrm>
             <a:off x="609600" y="1330000"/>
-            <a:ext cx="10972800" cy="450000"/>
+            <a:ext cx="10972800" cy="500000"/>
           </a:xfrm>
           <a:prstGeom prst="rect">
             <a:avLst/>
@@ -3204,26 +3187,169 @@
           <a:p>
             <a:pPr algn="l"/>
             <a:r>
+              <a:rPr lang="es-ES" sz="1700" b="1" dirty="0">
+                <a:solidFill>
+                  <a:srgbClr val="2F2B28"/>
+                </a:solidFill>
+              </a:rPr>
+              <a:t>First-line IT incident response assistant</a:t>
+            </a:r>
+          </a:p>
+        </p:txBody>
+      </p:sp>
+      <p:sp>
+        <p:nvSpPr>
+          <p:cNvPr id="170" name="Texto 170"/>
+          <p:cNvSpPr txBox="1"/>
+          <p:nvPr/>
+        </p:nvSpPr>
+        <p:spPr>
+          <a:xfrm>
+            <a:off x="609600" y="1900000"/>
+            <a:ext cx="10972800" cy="3550000"/>
+          </a:xfrm>
+          <a:prstGeom prst="rect">
+            <a:avLst/>
+          </a:prstGeom>
+          <a:noFill/>
+        </p:spPr>
+        <p:txBody>
+          <a:bodyPr wrap="square" anchor="t" lIns="45720" rIns="45720">
+            <a:noAutofit/>
+          </a:bodyPr>
+          <a:lstStyle/>
+          <a:p>
+            <a:pPr marL="285750" indent="-285750">
+              <a:spcAft>
+                <a:spcPts val="400"/>
+              </a:spcAft>
+              <a:buClr>
+                <a:srgbClr val="990F3D"/>
+              </a:buClr>
+              <a:buFont typeface="Arial"/>
+              <a:buChar char="•"/>
+            </a:pPr>
+            <a:r>
               <a:rPr lang="es-ES" sz="1500" dirty="0">
                 <a:solidFill>
-                  <a:srgbClr val="564D47"/>
-                </a:solidFill>
-              </a:rPr>
-              <a:t>It went through phases 0 to 6 and remains in use; phase 7 will come with G7</a:t>
-            </a:r>
-          </a:p>
-        </p:txBody>
-      </p:sp>
-      <p:sp>
-        <p:nvSpPr>
-          <p:cNvPr id="168" name="Caja 168"/>
+                  <a:srgbClr val="2F2B28"/>
+                </a:solidFill>
+              </a:rPr>
+              <a:t>Phases 0 and 1: IT sponsors it; against the non-AI alternative (more staff), the operations sphere with Optimise ambition is proposed (P07).</a:t>
+            </a:r>
+          </a:p>
+          <a:p>
+            <a:pPr marL="285750" indent="-285750">
+              <a:spcAft>
+                <a:spcPts val="400"/>
+              </a:spcAft>
+              <a:buClr>
+                <a:srgbClr val="990F3D"/>
+              </a:buClr>
+              <a:buFont typeface="Arial"/>
+              <a:buChar char="•"/>
+            </a:pPr>
+            <a:r>
+              <a:rPr lang="es-ES" sz="1500" dirty="0">
+                <a:solidFill>
+                  <a:srgbClr val="2F2B28"/>
+                </a:solidFill>
+              </a:rPr>
+              <a:t>Phase 2: hypothesis of 30% less resolution time for simple incidents; the controlled pilot yields 32%.</a:t>
+            </a:r>
+          </a:p>
+          <a:p>
+            <a:pPr marL="285750" indent="-285750">
+              <a:spcAft>
+                <a:spcPts val="400"/>
+              </a:spcAft>
+              <a:buClr>
+                <a:srgbClr val="990F3D"/>
+              </a:buClr>
+              <a:buFont typeface="Arial"/>
+              <a:buChar char="•"/>
+            </a:pPr>
+            <a:r>
+              <a:rPr lang="es-ES" sz="1500" dirty="0">
+                <a:solidFill>
+                  <a:srgbClr val="2F2B28"/>
+                </a:solidFill>
+              </a:rPr>
+              <a:t>Phase 3: no relevant bias, medium residual risk accepted by the right body (P12), supplier assessed (P14). G3, Proceed.</a:t>
+            </a:r>
+          </a:p>
+          <a:p>
+            <a:pPr marL="285750" indent="-285750">
+              <a:spcAft>
+                <a:spcPts val="400"/>
+              </a:spcAft>
+              <a:buClr>
+                <a:srgbClr val="990F3D"/>
+              </a:buClr>
+              <a:buFont typeface="Arial"/>
+              <a:buChar char="•"/>
+            </a:pPr>
+            <a:r>
+              <a:rPr lang="es-ES" sz="1500" dirty="0">
+                <a:solidFill>
+                  <a:srgbClr val="2F2B28"/>
+                </a:solidFill>
+              </a:rPr>
+              <a:t>Phases 4 and 5: mandatory human oversight above a severity level (P17), tested rollback (P19) and go-live sign-off (P23).</a:t>
+            </a:r>
+          </a:p>
+          <a:p>
+            <a:pPr marL="285750" indent="-285750">
+              <a:spcAft>
+                <a:spcPts val="400"/>
+              </a:spcAft>
+              <a:buClr>
+                <a:srgbClr val="990F3D"/>
+              </a:buClr>
+              <a:buFont typeface="Arial"/>
+              <a:buChar char="•"/>
+            </a:pPr>
+            <a:r>
+              <a:rPr lang="es-ES" sz="1500" dirty="0">
+                <a:solidFill>
+                  <a:srgbClr val="2F2B28"/>
+                </a:solidFill>
+              </a:rPr>
+              <a:t>Phase 6: fourteen months in use. Finance validates €1.1M a year (P28); released capacity was reassigned to complex incidents.</a:t>
+            </a:r>
+          </a:p>
+          <a:p>
+            <a:pPr marL="285750" indent="-285750">
+              <a:spcAft>
+                <a:spcPts val="400"/>
+              </a:spcAft>
+              <a:buClr>
+                <a:srgbClr val="990F3D"/>
+              </a:buClr>
+              <a:buFont typeface="Arial"/>
+              <a:buChar char="•"/>
+            </a:pPr>
+            <a:r>
+              <a:rPr lang="es-ES" sz="1500" dirty="0">
+                <a:solidFill>
+                  <a:srgbClr val="2F2B28"/>
+                </a:solidFill>
+              </a:rPr>
+              <a:t>In the funnel it sits under "In use"; on the dashboard it adds to annual net because its value is validated, not declared.</a:t>
+            </a:r>
+          </a:p>
+        </p:txBody>
+      </p:sp>
+      <p:sp>
+        <p:nvSpPr>
+          <p:cNvPr id="171" name="Caja 171"/>
           <p:cNvSpPr/>
           <p:nvPr/>
         </p:nvSpPr>
         <p:spPr>
           <a:xfrm>
-            <a:off x="681000" y="2350000"/>
-            <a:ext cx="1240000" cy="1500000"/>
+            <a:off x="609600" y="5600000"/>
+            <a:ext cx="10972800" cy="900000"/>
           </a:xfrm>
           <a:prstGeom prst="roundRect">
             <a:avLst>
@@ -3245,693 +3371,12 @@
           <a:p>
             <a:pPr algn="ctr"/>
             <a:r>
-              <a:rPr lang="es-ES" sz="2400" b="1" dirty="0">
+              <a:rPr lang="es-ES" sz="2100" b="1" dirty="0">
                 <a:solidFill>
                   <a:srgbClr val="FFFFFF"/>
                 </a:solidFill>
               </a:rPr>
-              <a:t>F0</a:t>
-            </a:r>
-          </a:p>
-          <a:p>
-            <a:pPr algn="ctr"/>
-            <a:r>
-              <a:rPr lang="es-ES" sz="1050" dirty="0">
-                <a:solidFill>
-                  <a:srgbClr val="FFFFFF"/>
-                </a:solidFill>
-              </a:rPr>
-              <a:t>Context and constraints</a:t>
-            </a:r>
-          </a:p>
-        </p:txBody>
-      </p:sp>
-      <p:sp>
-        <p:nvSpPr>
-          <p:cNvPr id="169" name="Texto 169"/>
-          <p:cNvSpPr txBox="1"/>
-          <p:nvPr/>
-        </p:nvSpPr>
-        <p:spPr>
-          <a:xfrm>
-            <a:off x="1591000" y="3900000"/>
-            <a:ext cx="800000" cy="300000"/>
-          </a:xfrm>
-          <a:prstGeom prst="rect">
-            <a:avLst/>
-          </a:prstGeom>
-          <a:noFill/>
-        </p:spPr>
-        <p:txBody>
-          <a:bodyPr wrap="square" anchor="t" lIns="45720" rIns="45720">
-            <a:noAutofit/>
-          </a:bodyPr>
-          <a:lstStyle/>
-          <a:p>
-            <a:pPr algn="ctr"/>
-            <a:r>
-              <a:rPr lang="es-ES" sz="1200" b="1" dirty="0">
-                <a:solidFill>
-                  <a:srgbClr val="990F3D"/>
-                </a:solidFill>
-              </a:rPr>
-              <a:t>G0</a:t>
-            </a:r>
-          </a:p>
-        </p:txBody>
-      </p:sp>
-      <p:sp>
-        <p:nvSpPr>
-          <p:cNvPr id="170" name="Caja 170"/>
-          <p:cNvSpPr/>
-          <p:nvPr/>
-        </p:nvSpPr>
-        <p:spPr>
-          <a:xfrm>
-            <a:off x="2051000" y="2350000"/>
-            <a:ext cx="1240000" cy="1500000"/>
-          </a:xfrm>
-          <a:prstGeom prst="roundRect">
-            <a:avLst>
-              <a:gd name="adj" fmla="val 6000"/>
-            </a:avLst>
-          </a:prstGeom>
-          <a:solidFill>
-            <a:srgbClr val="0D7680"/>
-          </a:solidFill>
-          <a:ln>
-            <a:noFill/>
-          </a:ln>
-        </p:spPr>
-        <p:txBody>
-          <a:bodyPr wrap="square" anchor="ctr" lIns="45720" rIns="45720">
-            <a:noAutofit/>
-          </a:bodyPr>
-          <a:lstStyle/>
-          <a:p>
-            <a:pPr algn="ctr"/>
-            <a:r>
-              <a:rPr lang="es-ES" sz="2400" b="1" dirty="0">
-                <a:solidFill>
-                  <a:srgbClr val="FFFFFF"/>
-                </a:solidFill>
-              </a:rPr>
-              <a:t>F1</a:t>
-            </a:r>
-          </a:p>
-          <a:p>
-            <a:pPr algn="ctr"/>
-            <a:r>
-              <a:rPr lang="es-ES" sz="1050" dirty="0">
-                <a:solidFill>
-                  <a:srgbClr val="FFFFFF"/>
-                </a:solidFill>
-              </a:rPr>
-              <a:t>Opportunity discovery</a:t>
-            </a:r>
-          </a:p>
-        </p:txBody>
-      </p:sp>
-      <p:sp>
-        <p:nvSpPr>
-          <p:cNvPr id="171" name="Texto 171"/>
-          <p:cNvSpPr txBox="1"/>
-          <p:nvPr/>
-        </p:nvSpPr>
-        <p:spPr>
-          <a:xfrm>
-            <a:off x="2961000" y="3900000"/>
-            <a:ext cx="800000" cy="300000"/>
-          </a:xfrm>
-          <a:prstGeom prst="rect">
-            <a:avLst/>
-          </a:prstGeom>
-          <a:noFill/>
-        </p:spPr>
-        <p:txBody>
-          <a:bodyPr wrap="square" anchor="t" lIns="45720" rIns="45720">
-            <a:noAutofit/>
-          </a:bodyPr>
-          <a:lstStyle/>
-          <a:p>
-            <a:pPr algn="ctr"/>
-            <a:r>
-              <a:rPr lang="es-ES" sz="1200" b="1" dirty="0">
-                <a:solidFill>
-                  <a:srgbClr val="990F3D"/>
-                </a:solidFill>
-              </a:rPr>
-              <a:t>G1</a:t>
-            </a:r>
-          </a:p>
-        </p:txBody>
-      </p:sp>
-      <p:sp>
-        <p:nvSpPr>
-          <p:cNvPr id="172" name="Caja 172"/>
-          <p:cNvSpPr/>
-          <p:nvPr/>
-        </p:nvSpPr>
-        <p:spPr>
-          <a:xfrm>
-            <a:off x="3421000" y="2350000"/>
-            <a:ext cx="1240000" cy="1500000"/>
-          </a:xfrm>
-          <a:prstGeom prst="roundRect">
-            <a:avLst>
-              <a:gd name="adj" fmla="val 6000"/>
-            </a:avLst>
-          </a:prstGeom>
-          <a:solidFill>
-            <a:srgbClr val="0D7680"/>
-          </a:solidFill>
-          <a:ln>
-            <a:noFill/>
-          </a:ln>
-        </p:spPr>
-        <p:txBody>
-          <a:bodyPr wrap="square" anchor="ctr" lIns="45720" rIns="45720">
-            <a:noAutofit/>
-          </a:bodyPr>
-          <a:lstStyle/>
-          <a:p>
-            <a:pPr algn="ctr"/>
-            <a:r>
-              <a:rPr lang="es-ES" sz="2400" b="1" dirty="0">
-                <a:solidFill>
-                  <a:srgbClr val="FFFFFF"/>
-                </a:solidFill>
-              </a:rPr>
-              <a:t>F2</a:t>
-            </a:r>
-          </a:p>
-          <a:p>
-            <a:pPr algn="ctr"/>
-            <a:r>
-              <a:rPr lang="es-ES" sz="1050" dirty="0">
-                <a:solidFill>
-                  <a:srgbClr val="FFFFFF"/>
-                </a:solidFill>
-              </a:rPr>
-              <a:t>Value hypothesis</a:t>
-            </a:r>
-          </a:p>
-        </p:txBody>
-      </p:sp>
-      <p:sp>
-        <p:nvSpPr>
-          <p:cNvPr id="173" name="Texto 173"/>
-          <p:cNvSpPr txBox="1"/>
-          <p:nvPr/>
-        </p:nvSpPr>
-        <p:spPr>
-          <a:xfrm>
-            <a:off x="4331000" y="3900000"/>
-            <a:ext cx="800000" cy="300000"/>
-          </a:xfrm>
-          <a:prstGeom prst="rect">
-            <a:avLst/>
-          </a:prstGeom>
-          <a:noFill/>
-        </p:spPr>
-        <p:txBody>
-          <a:bodyPr wrap="square" anchor="t" lIns="45720" rIns="45720">
-            <a:noAutofit/>
-          </a:bodyPr>
-          <a:lstStyle/>
-          <a:p>
-            <a:pPr algn="ctr"/>
-            <a:r>
-              <a:rPr lang="es-ES" sz="1200" b="1" dirty="0">
-                <a:solidFill>
-                  <a:srgbClr val="990F3D"/>
-                </a:solidFill>
-              </a:rPr>
-              <a:t>G2</a:t>
-            </a:r>
-          </a:p>
-        </p:txBody>
-      </p:sp>
-      <p:sp>
-        <p:nvSpPr>
-          <p:cNvPr id="174" name="Caja 174"/>
-          <p:cNvSpPr/>
-          <p:nvPr/>
-        </p:nvSpPr>
-        <p:spPr>
-          <a:xfrm>
-            <a:off x="4791000" y="2350000"/>
-            <a:ext cx="1240000" cy="1500000"/>
-          </a:xfrm>
-          <a:prstGeom prst="roundRect">
-            <a:avLst>
-              <a:gd name="adj" fmla="val 6000"/>
-            </a:avLst>
-          </a:prstGeom>
-          <a:solidFill>
-            <a:srgbClr val="0D7680"/>
-          </a:solidFill>
-          <a:ln>
-            <a:noFill/>
-          </a:ln>
-        </p:spPr>
-        <p:txBody>
-          <a:bodyPr wrap="square" anchor="ctr" lIns="45720" rIns="45720">
-            <a:noAutofit/>
-          </a:bodyPr>
-          <a:lstStyle/>
-          <a:p>
-            <a:pPr algn="ctr"/>
-            <a:r>
-              <a:rPr lang="es-ES" sz="2400" b="1" dirty="0">
-                <a:solidFill>
-                  <a:srgbClr val="FFFFFF"/>
-                </a:solidFill>
-              </a:rPr>
-              <a:t>F3</a:t>
-            </a:r>
-          </a:p>
-          <a:p>
-            <a:pPr algn="ctr"/>
-            <a:r>
-              <a:rPr lang="es-ES" sz="1050" dirty="0">
-                <a:solidFill>
-                  <a:srgbClr val="FFFFFF"/>
-                </a:solidFill>
-              </a:rPr>
-              <a:t>Feasibility and risk</a:t>
-            </a:r>
-          </a:p>
-        </p:txBody>
-      </p:sp>
-      <p:sp>
-        <p:nvSpPr>
-          <p:cNvPr id="175" name="Texto 175"/>
-          <p:cNvSpPr txBox="1"/>
-          <p:nvPr/>
-        </p:nvSpPr>
-        <p:spPr>
-          <a:xfrm>
-            <a:off x="5701000" y="3900000"/>
-            <a:ext cx="800000" cy="300000"/>
-          </a:xfrm>
-          <a:prstGeom prst="rect">
-            <a:avLst/>
-          </a:prstGeom>
-          <a:noFill/>
-        </p:spPr>
-        <p:txBody>
-          <a:bodyPr wrap="square" anchor="t" lIns="45720" rIns="45720">
-            <a:noAutofit/>
-          </a:bodyPr>
-          <a:lstStyle/>
-          <a:p>
-            <a:pPr algn="ctr"/>
-            <a:r>
-              <a:rPr lang="es-ES" sz="1200" b="1" dirty="0">
-                <a:solidFill>
-                  <a:srgbClr val="990F3D"/>
-                </a:solidFill>
-              </a:rPr>
-              <a:t>G3</a:t>
-            </a:r>
-          </a:p>
-        </p:txBody>
-      </p:sp>
-      <p:sp>
-        <p:nvSpPr>
-          <p:cNvPr id="176" name="Caja 176"/>
-          <p:cNvSpPr/>
-          <p:nvPr/>
-        </p:nvSpPr>
-        <p:spPr>
-          <a:xfrm>
-            <a:off x="6161000" y="2350000"/>
-            <a:ext cx="1240000" cy="1500000"/>
-          </a:xfrm>
-          <a:prstGeom prst="roundRect">
-            <a:avLst>
-              <a:gd name="adj" fmla="val 6000"/>
-            </a:avLst>
-          </a:prstGeom>
-          <a:solidFill>
-            <a:srgbClr val="0D7680"/>
-          </a:solidFill>
-          <a:ln>
-            <a:noFill/>
-          </a:ln>
-        </p:spPr>
-        <p:txBody>
-          <a:bodyPr wrap="square" anchor="ctr" lIns="45720" rIns="45720">
-            <a:noAutofit/>
-          </a:bodyPr>
-          <a:lstStyle/>
-          <a:p>
-            <a:pPr algn="ctr"/>
-            <a:r>
-              <a:rPr lang="es-ES" sz="2400" b="1" dirty="0">
-                <a:solidFill>
-                  <a:srgbClr val="FFFFFF"/>
-                </a:solidFill>
-              </a:rPr>
-              <a:t>F4</a:t>
-            </a:r>
-          </a:p>
-          <a:p>
-            <a:pPr algn="ctr"/>
-            <a:r>
-              <a:rPr lang="es-ES" sz="1050" dirty="0">
-                <a:solidFill>
-                  <a:srgbClr val="FFFFFF"/>
-                </a:solidFill>
-              </a:rPr>
-              <a:t>Solution design</a:t>
-            </a:r>
-          </a:p>
-        </p:txBody>
-      </p:sp>
-      <p:sp>
-        <p:nvSpPr>
-          <p:cNvPr id="177" name="Texto 177"/>
-          <p:cNvSpPr txBox="1"/>
-          <p:nvPr/>
-        </p:nvSpPr>
-        <p:spPr>
-          <a:xfrm>
-            <a:off x="7071000" y="3900000"/>
-            <a:ext cx="800000" cy="300000"/>
-          </a:xfrm>
-          <a:prstGeom prst="rect">
-            <a:avLst/>
-          </a:prstGeom>
-          <a:noFill/>
-        </p:spPr>
-        <p:txBody>
-          <a:bodyPr wrap="square" anchor="t" lIns="45720" rIns="45720">
-            <a:noAutofit/>
-          </a:bodyPr>
-          <a:lstStyle/>
-          <a:p>
-            <a:pPr algn="ctr"/>
-            <a:r>
-              <a:rPr lang="es-ES" sz="1200" b="1" dirty="0">
-                <a:solidFill>
-                  <a:srgbClr val="990F3D"/>
-                </a:solidFill>
-              </a:rPr>
-              <a:t>G4</a:t>
-            </a:r>
-          </a:p>
-        </p:txBody>
-      </p:sp>
-      <p:sp>
-        <p:nvSpPr>
-          <p:cNvPr id="178" name="Caja 178"/>
-          <p:cNvSpPr/>
-          <p:nvPr/>
-        </p:nvSpPr>
-        <p:spPr>
-          <a:xfrm>
-            <a:off x="7531000" y="2350000"/>
-            <a:ext cx="1240000" cy="1500000"/>
-          </a:xfrm>
-          <a:prstGeom prst="roundRect">
-            <a:avLst>
-              <a:gd name="adj" fmla="val 6000"/>
-            </a:avLst>
-          </a:prstGeom>
-          <a:solidFill>
-            <a:srgbClr val="0D7680"/>
-          </a:solidFill>
-          <a:ln>
-            <a:noFill/>
-          </a:ln>
-        </p:spPr>
-        <p:txBody>
-          <a:bodyPr wrap="square" anchor="ctr" lIns="45720" rIns="45720">
-            <a:noAutofit/>
-          </a:bodyPr>
-          <a:lstStyle/>
-          <a:p>
-            <a:pPr algn="ctr"/>
-            <a:r>
-              <a:rPr lang="es-ES" sz="2400" b="1" dirty="0">
-                <a:solidFill>
-                  <a:srgbClr val="FFFFFF"/>
-                </a:solidFill>
-              </a:rPr>
-              <a:t>F5</a:t>
-            </a:r>
-          </a:p>
-          <a:p>
-            <a:pPr algn="ctr"/>
-            <a:r>
-              <a:rPr lang="es-ES" sz="1050" dirty="0">
-                <a:solidFill>
-                  <a:srgbClr val="FFFFFF"/>
-                </a:solidFill>
-              </a:rPr>
-              <a:t>Delivery and validation</a:t>
-            </a:r>
-          </a:p>
-        </p:txBody>
-      </p:sp>
-      <p:sp>
-        <p:nvSpPr>
-          <p:cNvPr id="179" name="Texto 179"/>
-          <p:cNvSpPr txBox="1"/>
-          <p:nvPr/>
-        </p:nvSpPr>
-        <p:spPr>
-          <a:xfrm>
-            <a:off x="8441000" y="3900000"/>
-            <a:ext cx="800000" cy="300000"/>
-          </a:xfrm>
-          <a:prstGeom prst="rect">
-            <a:avLst/>
-          </a:prstGeom>
-          <a:noFill/>
-        </p:spPr>
-        <p:txBody>
-          <a:bodyPr wrap="square" anchor="t" lIns="45720" rIns="45720">
-            <a:noAutofit/>
-          </a:bodyPr>
-          <a:lstStyle/>
-          <a:p>
-            <a:pPr algn="ctr"/>
-            <a:r>
-              <a:rPr lang="es-ES" sz="1200" b="1" dirty="0">
-                <a:solidFill>
-                  <a:srgbClr val="990F3D"/>
-                </a:solidFill>
-              </a:rPr>
-              <a:t>G5</a:t>
-            </a:r>
-          </a:p>
-        </p:txBody>
-      </p:sp>
-      <p:sp>
-        <p:nvSpPr>
-          <p:cNvPr id="180" name="Caja 180"/>
-          <p:cNvSpPr/>
-          <p:nvPr/>
-        </p:nvSpPr>
-        <p:spPr>
-          <a:xfrm>
-            <a:off x="8901000" y="2350000"/>
-            <a:ext cx="1240000" cy="1500000"/>
-          </a:xfrm>
-          <a:prstGeom prst="roundRect">
-            <a:avLst>
-              <a:gd name="adj" fmla="val 6000"/>
-            </a:avLst>
-          </a:prstGeom>
-          <a:solidFill>
-            <a:srgbClr val="0D7680"/>
-          </a:solidFill>
-          <a:ln>
-            <a:noFill/>
-          </a:ln>
-        </p:spPr>
-        <p:txBody>
-          <a:bodyPr wrap="square" anchor="ctr" lIns="45720" rIns="45720">
-            <a:noAutofit/>
-          </a:bodyPr>
-          <a:lstStyle/>
-          <a:p>
-            <a:pPr algn="ctr"/>
-            <a:r>
-              <a:rPr lang="es-ES" sz="2400" b="1" dirty="0">
-                <a:solidFill>
-                  <a:srgbClr val="FFFFFF"/>
-                </a:solidFill>
-              </a:rPr>
-              <a:t>F6</a:t>
-            </a:r>
-          </a:p>
-          <a:p>
-            <a:pPr algn="ctr"/>
-            <a:r>
-              <a:rPr lang="es-ES" sz="1050" dirty="0">
-                <a:solidFill>
-                  <a:srgbClr val="FFFFFF"/>
-                </a:solidFill>
-              </a:rPr>
-              <a:t>Operation and governance</a:t>
-            </a:r>
-          </a:p>
-        </p:txBody>
-      </p:sp>
-      <p:sp>
-        <p:nvSpPr>
-          <p:cNvPr id="181" name="Texto 181"/>
-          <p:cNvSpPr txBox="1"/>
-          <p:nvPr/>
-        </p:nvSpPr>
-        <p:spPr>
-          <a:xfrm>
-            <a:off x="9811000" y="3900000"/>
-            <a:ext cx="800000" cy="300000"/>
-          </a:xfrm>
-          <a:prstGeom prst="rect">
-            <a:avLst/>
-          </a:prstGeom>
-          <a:noFill/>
-        </p:spPr>
-        <p:txBody>
-          <a:bodyPr wrap="square" anchor="t" lIns="45720" rIns="45720">
-            <a:noAutofit/>
-          </a:bodyPr>
-          <a:lstStyle/>
-          <a:p>
-            <a:pPr algn="ctr"/>
-            <a:r>
-              <a:rPr lang="es-ES" sz="1200" b="1" dirty="0">
-                <a:solidFill>
-                  <a:srgbClr val="990F3D"/>
-                </a:solidFill>
-              </a:rPr>
-              <a:t>R6</a:t>
-            </a:r>
-          </a:p>
-        </p:txBody>
-      </p:sp>
-      <p:sp>
-        <p:nvSpPr>
-          <p:cNvPr id="182" name="Caja 182"/>
-          <p:cNvSpPr/>
-          <p:nvPr/>
-        </p:nvSpPr>
-        <p:spPr>
-          <a:xfrm>
-            <a:off x="10271000" y="2350000"/>
-            <a:ext cx="1240000" cy="1500000"/>
-          </a:xfrm>
-          <a:prstGeom prst="roundRect">
-            <a:avLst>
-              <a:gd name="adj" fmla="val 6000"/>
-            </a:avLst>
-          </a:prstGeom>
-          <a:solidFill>
-            <a:srgbClr val="C9A78D"/>
-          </a:solidFill>
-          <a:ln>
-            <a:noFill/>
-          </a:ln>
-        </p:spPr>
-        <p:txBody>
-          <a:bodyPr wrap="square" anchor="ctr" lIns="45720" rIns="45720">
-            <a:noAutofit/>
-          </a:bodyPr>
-          <a:lstStyle/>
-          <a:p>
-            <a:pPr algn="ctr"/>
-            <a:r>
-              <a:rPr lang="es-ES" sz="2400" b="1" dirty="0">
-                <a:solidFill>
-                  <a:srgbClr val="564D47"/>
-                </a:solidFill>
-              </a:rPr>
-              <a:t>F7</a:t>
-            </a:r>
-          </a:p>
-          <a:p>
-            <a:pPr algn="ctr"/>
-            <a:r>
-              <a:rPr lang="es-ES" sz="1050" dirty="0">
-                <a:solidFill>
-                  <a:srgbClr val="564D47"/>
-                </a:solidFill>
-              </a:rPr>
-              <a:t>Evolution or retirement</a:t>
-            </a:r>
-          </a:p>
-        </p:txBody>
-      </p:sp>
-      <p:sp>
-        <p:nvSpPr>
-          <p:cNvPr id="183" name="Texto 183"/>
-          <p:cNvSpPr txBox="1"/>
-          <p:nvPr/>
-        </p:nvSpPr>
-        <p:spPr>
-          <a:xfrm>
-            <a:off x="11181000" y="3900000"/>
-            <a:ext cx="800000" cy="300000"/>
-          </a:xfrm>
-          <a:prstGeom prst="rect">
-            <a:avLst/>
-          </a:prstGeom>
-          <a:noFill/>
-        </p:spPr>
-        <p:txBody>
-          <a:bodyPr wrap="square" anchor="t" lIns="45720" rIns="45720">
-            <a:noAutofit/>
-          </a:bodyPr>
-          <a:lstStyle/>
-          <a:p>
-            <a:pPr algn="ctr"/>
-            <a:r>
-              <a:rPr lang="es-ES" sz="1200" b="1" dirty="0">
-                <a:solidFill>
-                  <a:srgbClr val="990F3D"/>
-                </a:solidFill>
-              </a:rPr>
-              <a:t>G7</a:t>
-            </a:r>
-          </a:p>
-        </p:txBody>
-      </p:sp>
-      <p:sp>
-        <p:nvSpPr>
-          <p:cNvPr id="184" name="Texto 184"/>
-          <p:cNvSpPr txBox="1"/>
-          <p:nvPr/>
-        </p:nvSpPr>
-        <p:spPr>
-          <a:xfrm>
-            <a:off x="609600" y="4430000"/>
-            <a:ext cx="10972800" cy="600000"/>
-          </a:xfrm>
-          <a:prstGeom prst="rect">
-            <a:avLst/>
-          </a:prstGeom>
-          <a:noFill/>
-        </p:spPr>
-        <p:txBody>
-          <a:bodyPr wrap="square" anchor="t" lIns="45720" rIns="45720">
-            <a:noAutofit/>
-          </a:bodyPr>
-          <a:lstStyle/>
-          <a:p>
-            <a:pPr algn="ctr"/>
-            <a:r>
-              <a:rPr lang="es-ES" sz="2200" b="1" dirty="0">
-                <a:solidFill>
-                  <a:srgbClr val="0D7680"/>
-                </a:solidFill>
-              </a:rPr>
-              <a:t>IN USE · each R6 confirms it keeps delivering value under control</a:t>
+              <a:t>IN PRODUCTION · €1.1M OF VALIDATED ANNUAL RETURN · QUARTERLY R6</a:t>
             </a:r>
           </a:p>
         </p:txBody>
@@ -3971,7 +3416,7 @@
       </p:grpSpPr>
       <p:sp>
         <p:nvSpPr>
-          <p:cNvPr id="190" name="Marca"/>
+          <p:cNvPr id="192" name="Marca"/>
           <p:cNvSpPr/>
           <p:nvPr/>
         </p:nvSpPr>
@@ -3995,7 +3440,7 @@
       </p:sp>
       <p:sp>
         <p:nvSpPr>
-          <p:cNvPr id="191" name="Texto 191"/>
+          <p:cNvPr id="193" name="Texto 193"/>
           <p:cNvSpPr txBox="1"/>
           <p:nvPr/>
         </p:nvSpPr>
@@ -4029,7 +3474,7 @@
       </p:sp>
       <p:sp>
         <p:nvSpPr>
-          <p:cNvPr id="192" name="Texto 192"/>
+          <p:cNvPr id="194" name="Texto 194"/>
           <p:cNvSpPr txBox="1"/>
           <p:nvPr/>
         </p:nvSpPr>
@@ -4056,130 +3501,763 @@
                   <a:srgbClr val="990F3D"/>
                 </a:solidFill>
               </a:rPr>
-              <a:t>How value is measured</a:t>
-            </a:r>
-          </a:p>
-        </p:txBody>
-      </p:sp>
-      <p:sp>
-        <p:nvSpPr>
-          <p:cNvPr id="189" name="Texto 189"/>
-          <p:cNvSpPr txBox="1"/>
-          <p:nvPr/>
-        </p:nvSpPr>
-        <p:spPr>
-          <a:xfrm>
-            <a:off x="609600" y="1750000"/>
-            <a:ext cx="10972800" cy="4400000"/>
-          </a:xfrm>
-          <a:prstGeom prst="rect">
-            <a:avLst/>
-          </a:prstGeom>
-          <a:noFill/>
-        </p:spPr>
-        <p:txBody>
-          <a:bodyPr wrap="square" anchor="t" lIns="45720" rIns="45720">
-            <a:noAutofit/>
-          </a:bodyPr>
-          <a:lstStyle/>
-          <a:p>
-            <a:pPr marL="285750" indent="-285750">
-              <a:spcAft>
-                <a:spcPts val="400"/>
-              </a:spcAft>
-              <a:buClr>
-                <a:srgbClr val="990F3D"/>
-              </a:buClr>
-              <a:buFont typeface="Arial"/>
-              <a:buChar char="•"/>
-            </a:pPr>
-            <a:r>
-              <a:rPr lang="es-ES" sz="1800" dirty="0">
-                <a:solidFill>
-                  <a:srgbClr val="2F2B28"/>
-                </a:solidFill>
-              </a:rPr>
-              <a:t>Every amount carries a formula and a status: validated (finance), declared (the team) or estimated.</a:t>
-            </a:r>
-          </a:p>
-          <a:p>
-            <a:pPr marL="285750" indent="-285750">
-              <a:spcAft>
-                <a:spcPts val="400"/>
-              </a:spcAft>
-              <a:buClr>
-                <a:srgbClr val="990F3D"/>
-              </a:buClr>
-              <a:buFont typeface="Arial"/>
-              <a:buChar char="•"/>
-            </a:pPr>
-            <a:r>
-              <a:rPr lang="es-ES" sz="1800" dirty="0">
-                <a:solidFill>
-                  <a:srgbClr val="2F2B28"/>
-                </a:solidFill>
-              </a:rPr>
-              <a:t>Released hours are not savings until they are materialised: a cost goes down or they are reassigned to a valuable activity.</a:t>
-            </a:r>
-          </a:p>
-          <a:p>
-            <a:pPr marL="285750" indent="-285750">
-              <a:spcAft>
-                <a:spcPts val="400"/>
-              </a:spcAft>
-              <a:buClr>
-                <a:srgbClr val="990F3D"/>
-              </a:buClr>
-              <a:buFont typeface="Arial"/>
-              <a:buChar char="•"/>
-            </a:pPr>
-            <a:r>
-              <a:rPr lang="es-ES" sz="1800" dirty="0">
-                <a:solidFill>
-                  <a:srgbClr val="2F2B28"/>
-                </a:solidFill>
-              </a:rPr>
-              <a:t>Cost is complete: build, consumption, operation, human oversight and retirement.</a:t>
-            </a:r>
-          </a:p>
-          <a:p>
-            <a:pPr marL="285750" indent="-285750">
-              <a:spcAft>
-                <a:spcPts val="400"/>
-              </a:spcAft>
-              <a:buClr>
-                <a:srgbClr val="990F3D"/>
-              </a:buClr>
-              <a:buFont typeface="Arial"/>
-              <a:buChar char="•"/>
-            </a:pPr>
-            <a:r>
-              <a:rPr lang="es-ES" sz="1800" dirty="0">
-                <a:solidFill>
-                  <a:srgbClr val="2F2B28"/>
-                </a:solidFill>
-              </a:rPr>
-              <a:t>The transformation index uses eight evidence signals to tell transformation apart from mere efficiency.</a:t>
-            </a:r>
-          </a:p>
-          <a:p>
-            <a:pPr marL="285750" indent="-285750">
-              <a:spcAft>
-                <a:spcPts val="400"/>
-              </a:spcAft>
-              <a:buClr>
-                <a:srgbClr val="990F3D"/>
-              </a:buClr>
-              <a:buFont typeface="Arial"/>
-              <a:buChar char="•"/>
-            </a:pPr>
-            <a:r>
-              <a:rPr lang="es-ES" sz="1800" dirty="0">
-                <a:solidFill>
-                  <a:srgbClr val="2F2B28"/>
-                </a:solidFill>
-              </a:rPr>
-              <a:t>Ten measurement rules (document 40). No figure enters the portfolio net without its status.</a:t>
+              <a:t>Initiative 2, on the lifecycle</a:t>
+            </a:r>
+          </a:p>
+        </p:txBody>
+      </p:sp>
+      <p:sp>
+        <p:nvSpPr>
+          <p:cNvPr id="195" name="Texto 195"/>
+          <p:cNvSpPr txBox="1"/>
+          <p:nvPr/>
+        </p:nvSpPr>
+        <p:spPr>
+          <a:xfrm>
+            <a:off x="609600" y="1330000"/>
+            <a:ext cx="10972800" cy="450000"/>
+          </a:xfrm>
+          <a:prstGeom prst="rect">
+            <a:avLst/>
+          </a:prstGeom>
+          <a:noFill/>
+        </p:spPr>
+        <p:txBody>
+          <a:bodyPr wrap="square" anchor="t" lIns="45720" rIns="45720">
+            <a:noAutofit/>
+          </a:bodyPr>
+          <a:lstStyle/>
+          <a:p>
+            <a:pPr algn="l"/>
+            <a:r>
+              <a:rPr lang="es-ES" sz="1500" dirty="0">
+                <a:solidFill>
+                  <a:srgbClr val="564D47"/>
+                </a:solidFill>
+              </a:rPr>
+              <a:t>It went through phases 0 to 6 and remains in use; phase 7 will come with G7</a:t>
+            </a:r>
+          </a:p>
+        </p:txBody>
+      </p:sp>
+      <p:sp>
+        <p:nvSpPr>
+          <p:cNvPr id="175" name="Caja 175"/>
+          <p:cNvSpPr/>
+          <p:nvPr/>
+        </p:nvSpPr>
+        <p:spPr>
+          <a:xfrm>
+            <a:off x="681000" y="2350000"/>
+            <a:ext cx="1240000" cy="1500000"/>
+          </a:xfrm>
+          <a:prstGeom prst="roundRect">
+            <a:avLst>
+              <a:gd name="adj" fmla="val 6000"/>
+            </a:avLst>
+          </a:prstGeom>
+          <a:solidFill>
+            <a:srgbClr val="0D7680"/>
+          </a:solidFill>
+          <a:ln>
+            <a:noFill/>
+          </a:ln>
+        </p:spPr>
+        <p:txBody>
+          <a:bodyPr wrap="square" anchor="ctr" lIns="45720" rIns="45720">
+            <a:noAutofit/>
+          </a:bodyPr>
+          <a:lstStyle/>
+          <a:p>
+            <a:pPr algn="ctr"/>
+            <a:r>
+              <a:rPr lang="es-ES" sz="2400" b="1" dirty="0">
+                <a:solidFill>
+                  <a:srgbClr val="FFFFFF"/>
+                </a:solidFill>
+              </a:rPr>
+              <a:t>F0</a:t>
+            </a:r>
+          </a:p>
+          <a:p>
+            <a:pPr algn="ctr"/>
+            <a:r>
+              <a:rPr lang="es-ES" sz="1050" dirty="0">
+                <a:solidFill>
+                  <a:srgbClr val="FFFFFF"/>
+                </a:solidFill>
+              </a:rPr>
+              <a:t>Context and constraints</a:t>
+            </a:r>
+          </a:p>
+        </p:txBody>
+      </p:sp>
+      <p:sp>
+        <p:nvSpPr>
+          <p:cNvPr id="176" name="Texto 176"/>
+          <p:cNvSpPr txBox="1"/>
+          <p:nvPr/>
+        </p:nvSpPr>
+        <p:spPr>
+          <a:xfrm>
+            <a:off x="1591000" y="3900000"/>
+            <a:ext cx="800000" cy="300000"/>
+          </a:xfrm>
+          <a:prstGeom prst="rect">
+            <a:avLst/>
+          </a:prstGeom>
+          <a:noFill/>
+        </p:spPr>
+        <p:txBody>
+          <a:bodyPr wrap="square" anchor="t" lIns="45720" rIns="45720">
+            <a:noAutofit/>
+          </a:bodyPr>
+          <a:lstStyle/>
+          <a:p>
+            <a:pPr algn="ctr"/>
+            <a:r>
+              <a:rPr lang="es-ES" sz="1200" b="1" dirty="0">
+                <a:solidFill>
+                  <a:srgbClr val="990F3D"/>
+                </a:solidFill>
+              </a:rPr>
+              <a:t>G0</a:t>
+            </a:r>
+          </a:p>
+        </p:txBody>
+      </p:sp>
+      <p:sp>
+        <p:nvSpPr>
+          <p:cNvPr id="177" name="Caja 177"/>
+          <p:cNvSpPr/>
+          <p:nvPr/>
+        </p:nvSpPr>
+        <p:spPr>
+          <a:xfrm>
+            <a:off x="2051000" y="2350000"/>
+            <a:ext cx="1240000" cy="1500000"/>
+          </a:xfrm>
+          <a:prstGeom prst="roundRect">
+            <a:avLst>
+              <a:gd name="adj" fmla="val 6000"/>
+            </a:avLst>
+          </a:prstGeom>
+          <a:solidFill>
+            <a:srgbClr val="0D7680"/>
+          </a:solidFill>
+          <a:ln>
+            <a:noFill/>
+          </a:ln>
+        </p:spPr>
+        <p:txBody>
+          <a:bodyPr wrap="square" anchor="ctr" lIns="45720" rIns="45720">
+            <a:noAutofit/>
+          </a:bodyPr>
+          <a:lstStyle/>
+          <a:p>
+            <a:pPr algn="ctr"/>
+            <a:r>
+              <a:rPr lang="es-ES" sz="2400" b="1" dirty="0">
+                <a:solidFill>
+                  <a:srgbClr val="FFFFFF"/>
+                </a:solidFill>
+              </a:rPr>
+              <a:t>F1</a:t>
+            </a:r>
+          </a:p>
+          <a:p>
+            <a:pPr algn="ctr"/>
+            <a:r>
+              <a:rPr lang="es-ES" sz="1050" dirty="0">
+                <a:solidFill>
+                  <a:srgbClr val="FFFFFF"/>
+                </a:solidFill>
+              </a:rPr>
+              <a:t>Opportunity discovery</a:t>
+            </a:r>
+          </a:p>
+        </p:txBody>
+      </p:sp>
+      <p:sp>
+        <p:nvSpPr>
+          <p:cNvPr id="178" name="Texto 178"/>
+          <p:cNvSpPr txBox="1"/>
+          <p:nvPr/>
+        </p:nvSpPr>
+        <p:spPr>
+          <a:xfrm>
+            <a:off x="2961000" y="3900000"/>
+            <a:ext cx="800000" cy="300000"/>
+          </a:xfrm>
+          <a:prstGeom prst="rect">
+            <a:avLst/>
+          </a:prstGeom>
+          <a:noFill/>
+        </p:spPr>
+        <p:txBody>
+          <a:bodyPr wrap="square" anchor="t" lIns="45720" rIns="45720">
+            <a:noAutofit/>
+          </a:bodyPr>
+          <a:lstStyle/>
+          <a:p>
+            <a:pPr algn="ctr"/>
+            <a:r>
+              <a:rPr lang="es-ES" sz="1200" b="1" dirty="0">
+                <a:solidFill>
+                  <a:srgbClr val="990F3D"/>
+                </a:solidFill>
+              </a:rPr>
+              <a:t>G1</a:t>
+            </a:r>
+          </a:p>
+        </p:txBody>
+      </p:sp>
+      <p:sp>
+        <p:nvSpPr>
+          <p:cNvPr id="179" name="Caja 179"/>
+          <p:cNvSpPr/>
+          <p:nvPr/>
+        </p:nvSpPr>
+        <p:spPr>
+          <a:xfrm>
+            <a:off x="3421000" y="2350000"/>
+            <a:ext cx="1240000" cy="1500000"/>
+          </a:xfrm>
+          <a:prstGeom prst="roundRect">
+            <a:avLst>
+              <a:gd name="adj" fmla="val 6000"/>
+            </a:avLst>
+          </a:prstGeom>
+          <a:solidFill>
+            <a:srgbClr val="0D7680"/>
+          </a:solidFill>
+          <a:ln>
+            <a:noFill/>
+          </a:ln>
+        </p:spPr>
+        <p:txBody>
+          <a:bodyPr wrap="square" anchor="ctr" lIns="45720" rIns="45720">
+            <a:noAutofit/>
+          </a:bodyPr>
+          <a:lstStyle/>
+          <a:p>
+            <a:pPr algn="ctr"/>
+            <a:r>
+              <a:rPr lang="es-ES" sz="2400" b="1" dirty="0">
+                <a:solidFill>
+                  <a:srgbClr val="FFFFFF"/>
+                </a:solidFill>
+              </a:rPr>
+              <a:t>F2</a:t>
+            </a:r>
+          </a:p>
+          <a:p>
+            <a:pPr algn="ctr"/>
+            <a:r>
+              <a:rPr lang="es-ES" sz="1050" dirty="0">
+                <a:solidFill>
+                  <a:srgbClr val="FFFFFF"/>
+                </a:solidFill>
+              </a:rPr>
+              <a:t>Value hypothesis</a:t>
+            </a:r>
+          </a:p>
+        </p:txBody>
+      </p:sp>
+      <p:sp>
+        <p:nvSpPr>
+          <p:cNvPr id="180" name="Texto 180"/>
+          <p:cNvSpPr txBox="1"/>
+          <p:nvPr/>
+        </p:nvSpPr>
+        <p:spPr>
+          <a:xfrm>
+            <a:off x="4331000" y="3900000"/>
+            <a:ext cx="800000" cy="300000"/>
+          </a:xfrm>
+          <a:prstGeom prst="rect">
+            <a:avLst/>
+          </a:prstGeom>
+          <a:noFill/>
+        </p:spPr>
+        <p:txBody>
+          <a:bodyPr wrap="square" anchor="t" lIns="45720" rIns="45720">
+            <a:noAutofit/>
+          </a:bodyPr>
+          <a:lstStyle/>
+          <a:p>
+            <a:pPr algn="ctr"/>
+            <a:r>
+              <a:rPr lang="es-ES" sz="1200" b="1" dirty="0">
+                <a:solidFill>
+                  <a:srgbClr val="990F3D"/>
+                </a:solidFill>
+              </a:rPr>
+              <a:t>G2</a:t>
+            </a:r>
+          </a:p>
+        </p:txBody>
+      </p:sp>
+      <p:sp>
+        <p:nvSpPr>
+          <p:cNvPr id="181" name="Caja 181"/>
+          <p:cNvSpPr/>
+          <p:nvPr/>
+        </p:nvSpPr>
+        <p:spPr>
+          <a:xfrm>
+            <a:off x="4791000" y="2350000"/>
+            <a:ext cx="1240000" cy="1500000"/>
+          </a:xfrm>
+          <a:prstGeom prst="roundRect">
+            <a:avLst>
+              <a:gd name="adj" fmla="val 6000"/>
+            </a:avLst>
+          </a:prstGeom>
+          <a:solidFill>
+            <a:srgbClr val="0D7680"/>
+          </a:solidFill>
+          <a:ln>
+            <a:noFill/>
+          </a:ln>
+        </p:spPr>
+        <p:txBody>
+          <a:bodyPr wrap="square" anchor="ctr" lIns="45720" rIns="45720">
+            <a:noAutofit/>
+          </a:bodyPr>
+          <a:lstStyle/>
+          <a:p>
+            <a:pPr algn="ctr"/>
+            <a:r>
+              <a:rPr lang="es-ES" sz="2400" b="1" dirty="0">
+                <a:solidFill>
+                  <a:srgbClr val="FFFFFF"/>
+                </a:solidFill>
+              </a:rPr>
+              <a:t>F3</a:t>
+            </a:r>
+          </a:p>
+          <a:p>
+            <a:pPr algn="ctr"/>
+            <a:r>
+              <a:rPr lang="es-ES" sz="1050" dirty="0">
+                <a:solidFill>
+                  <a:srgbClr val="FFFFFF"/>
+                </a:solidFill>
+              </a:rPr>
+              <a:t>Feasibility and risk</a:t>
+            </a:r>
+          </a:p>
+        </p:txBody>
+      </p:sp>
+      <p:sp>
+        <p:nvSpPr>
+          <p:cNvPr id="182" name="Texto 182"/>
+          <p:cNvSpPr txBox="1"/>
+          <p:nvPr/>
+        </p:nvSpPr>
+        <p:spPr>
+          <a:xfrm>
+            <a:off x="5701000" y="3900000"/>
+            <a:ext cx="800000" cy="300000"/>
+          </a:xfrm>
+          <a:prstGeom prst="rect">
+            <a:avLst/>
+          </a:prstGeom>
+          <a:noFill/>
+        </p:spPr>
+        <p:txBody>
+          <a:bodyPr wrap="square" anchor="t" lIns="45720" rIns="45720">
+            <a:noAutofit/>
+          </a:bodyPr>
+          <a:lstStyle/>
+          <a:p>
+            <a:pPr algn="ctr"/>
+            <a:r>
+              <a:rPr lang="es-ES" sz="1200" b="1" dirty="0">
+                <a:solidFill>
+                  <a:srgbClr val="990F3D"/>
+                </a:solidFill>
+              </a:rPr>
+              <a:t>G3</a:t>
+            </a:r>
+          </a:p>
+        </p:txBody>
+      </p:sp>
+      <p:sp>
+        <p:nvSpPr>
+          <p:cNvPr id="183" name="Caja 183"/>
+          <p:cNvSpPr/>
+          <p:nvPr/>
+        </p:nvSpPr>
+        <p:spPr>
+          <a:xfrm>
+            <a:off x="6161000" y="2350000"/>
+            <a:ext cx="1240000" cy="1500000"/>
+          </a:xfrm>
+          <a:prstGeom prst="roundRect">
+            <a:avLst>
+              <a:gd name="adj" fmla="val 6000"/>
+            </a:avLst>
+          </a:prstGeom>
+          <a:solidFill>
+            <a:srgbClr val="0D7680"/>
+          </a:solidFill>
+          <a:ln>
+            <a:noFill/>
+          </a:ln>
+        </p:spPr>
+        <p:txBody>
+          <a:bodyPr wrap="square" anchor="ctr" lIns="45720" rIns="45720">
+            <a:noAutofit/>
+          </a:bodyPr>
+          <a:lstStyle/>
+          <a:p>
+            <a:pPr algn="ctr"/>
+            <a:r>
+              <a:rPr lang="es-ES" sz="2400" b="1" dirty="0">
+                <a:solidFill>
+                  <a:srgbClr val="FFFFFF"/>
+                </a:solidFill>
+              </a:rPr>
+              <a:t>F4</a:t>
+            </a:r>
+          </a:p>
+          <a:p>
+            <a:pPr algn="ctr"/>
+            <a:r>
+              <a:rPr lang="es-ES" sz="1050" dirty="0">
+                <a:solidFill>
+                  <a:srgbClr val="FFFFFF"/>
+                </a:solidFill>
+              </a:rPr>
+              <a:t>Solution design</a:t>
+            </a:r>
+          </a:p>
+        </p:txBody>
+      </p:sp>
+      <p:sp>
+        <p:nvSpPr>
+          <p:cNvPr id="184" name="Texto 184"/>
+          <p:cNvSpPr txBox="1"/>
+          <p:nvPr/>
+        </p:nvSpPr>
+        <p:spPr>
+          <a:xfrm>
+            <a:off x="7071000" y="3900000"/>
+            <a:ext cx="800000" cy="300000"/>
+          </a:xfrm>
+          <a:prstGeom prst="rect">
+            <a:avLst/>
+          </a:prstGeom>
+          <a:noFill/>
+        </p:spPr>
+        <p:txBody>
+          <a:bodyPr wrap="square" anchor="t" lIns="45720" rIns="45720">
+            <a:noAutofit/>
+          </a:bodyPr>
+          <a:lstStyle/>
+          <a:p>
+            <a:pPr algn="ctr"/>
+            <a:r>
+              <a:rPr lang="es-ES" sz="1200" b="1" dirty="0">
+                <a:solidFill>
+                  <a:srgbClr val="990F3D"/>
+                </a:solidFill>
+              </a:rPr>
+              <a:t>G4</a:t>
+            </a:r>
+          </a:p>
+        </p:txBody>
+      </p:sp>
+      <p:sp>
+        <p:nvSpPr>
+          <p:cNvPr id="185" name="Caja 185"/>
+          <p:cNvSpPr/>
+          <p:nvPr/>
+        </p:nvSpPr>
+        <p:spPr>
+          <a:xfrm>
+            <a:off x="7531000" y="2350000"/>
+            <a:ext cx="1240000" cy="1500000"/>
+          </a:xfrm>
+          <a:prstGeom prst="roundRect">
+            <a:avLst>
+              <a:gd name="adj" fmla="val 6000"/>
+            </a:avLst>
+          </a:prstGeom>
+          <a:solidFill>
+            <a:srgbClr val="0D7680"/>
+          </a:solidFill>
+          <a:ln>
+            <a:noFill/>
+          </a:ln>
+        </p:spPr>
+        <p:txBody>
+          <a:bodyPr wrap="square" anchor="ctr" lIns="45720" rIns="45720">
+            <a:noAutofit/>
+          </a:bodyPr>
+          <a:lstStyle/>
+          <a:p>
+            <a:pPr algn="ctr"/>
+            <a:r>
+              <a:rPr lang="es-ES" sz="2400" b="1" dirty="0">
+                <a:solidFill>
+                  <a:srgbClr val="FFFFFF"/>
+                </a:solidFill>
+              </a:rPr>
+              <a:t>F5</a:t>
+            </a:r>
+          </a:p>
+          <a:p>
+            <a:pPr algn="ctr"/>
+            <a:r>
+              <a:rPr lang="es-ES" sz="1050" dirty="0">
+                <a:solidFill>
+                  <a:srgbClr val="FFFFFF"/>
+                </a:solidFill>
+              </a:rPr>
+              <a:t>Delivery and validation</a:t>
+            </a:r>
+          </a:p>
+        </p:txBody>
+      </p:sp>
+      <p:sp>
+        <p:nvSpPr>
+          <p:cNvPr id="186" name="Texto 186"/>
+          <p:cNvSpPr txBox="1"/>
+          <p:nvPr/>
+        </p:nvSpPr>
+        <p:spPr>
+          <a:xfrm>
+            <a:off x="8441000" y="3900000"/>
+            <a:ext cx="800000" cy="300000"/>
+          </a:xfrm>
+          <a:prstGeom prst="rect">
+            <a:avLst/>
+          </a:prstGeom>
+          <a:noFill/>
+        </p:spPr>
+        <p:txBody>
+          <a:bodyPr wrap="square" anchor="t" lIns="45720" rIns="45720">
+            <a:noAutofit/>
+          </a:bodyPr>
+          <a:lstStyle/>
+          <a:p>
+            <a:pPr algn="ctr"/>
+            <a:r>
+              <a:rPr lang="es-ES" sz="1200" b="1" dirty="0">
+                <a:solidFill>
+                  <a:srgbClr val="990F3D"/>
+                </a:solidFill>
+              </a:rPr>
+              <a:t>G5</a:t>
+            </a:r>
+          </a:p>
+        </p:txBody>
+      </p:sp>
+      <p:sp>
+        <p:nvSpPr>
+          <p:cNvPr id="187" name="Caja 187"/>
+          <p:cNvSpPr/>
+          <p:nvPr/>
+        </p:nvSpPr>
+        <p:spPr>
+          <a:xfrm>
+            <a:off x="8901000" y="2350000"/>
+            <a:ext cx="1240000" cy="1500000"/>
+          </a:xfrm>
+          <a:prstGeom prst="roundRect">
+            <a:avLst>
+              <a:gd name="adj" fmla="val 6000"/>
+            </a:avLst>
+          </a:prstGeom>
+          <a:solidFill>
+            <a:srgbClr val="0D7680"/>
+          </a:solidFill>
+          <a:ln>
+            <a:noFill/>
+          </a:ln>
+        </p:spPr>
+        <p:txBody>
+          <a:bodyPr wrap="square" anchor="ctr" lIns="45720" rIns="45720">
+            <a:noAutofit/>
+          </a:bodyPr>
+          <a:lstStyle/>
+          <a:p>
+            <a:pPr algn="ctr"/>
+            <a:r>
+              <a:rPr lang="es-ES" sz="2400" b="1" dirty="0">
+                <a:solidFill>
+                  <a:srgbClr val="FFFFFF"/>
+                </a:solidFill>
+              </a:rPr>
+              <a:t>F6</a:t>
+            </a:r>
+          </a:p>
+          <a:p>
+            <a:pPr algn="ctr"/>
+            <a:r>
+              <a:rPr lang="es-ES" sz="1050" dirty="0">
+                <a:solidFill>
+                  <a:srgbClr val="FFFFFF"/>
+                </a:solidFill>
+              </a:rPr>
+              <a:t>Operation and governance</a:t>
+            </a:r>
+          </a:p>
+        </p:txBody>
+      </p:sp>
+      <p:sp>
+        <p:nvSpPr>
+          <p:cNvPr id="188" name="Texto 188"/>
+          <p:cNvSpPr txBox="1"/>
+          <p:nvPr/>
+        </p:nvSpPr>
+        <p:spPr>
+          <a:xfrm>
+            <a:off x="9811000" y="3900000"/>
+            <a:ext cx="800000" cy="300000"/>
+          </a:xfrm>
+          <a:prstGeom prst="rect">
+            <a:avLst/>
+          </a:prstGeom>
+          <a:noFill/>
+        </p:spPr>
+        <p:txBody>
+          <a:bodyPr wrap="square" anchor="t" lIns="45720" rIns="45720">
+            <a:noAutofit/>
+          </a:bodyPr>
+          <a:lstStyle/>
+          <a:p>
+            <a:pPr algn="ctr"/>
+            <a:r>
+              <a:rPr lang="es-ES" sz="1200" b="1" dirty="0">
+                <a:solidFill>
+                  <a:srgbClr val="990F3D"/>
+                </a:solidFill>
+              </a:rPr>
+              <a:t>R6</a:t>
+            </a:r>
+          </a:p>
+        </p:txBody>
+      </p:sp>
+      <p:sp>
+        <p:nvSpPr>
+          <p:cNvPr id="189" name="Caja 189"/>
+          <p:cNvSpPr/>
+          <p:nvPr/>
+        </p:nvSpPr>
+        <p:spPr>
+          <a:xfrm>
+            <a:off x="10271000" y="2350000"/>
+            <a:ext cx="1240000" cy="1500000"/>
+          </a:xfrm>
+          <a:prstGeom prst="roundRect">
+            <a:avLst>
+              <a:gd name="adj" fmla="val 6000"/>
+            </a:avLst>
+          </a:prstGeom>
+          <a:solidFill>
+            <a:srgbClr val="C9A78D"/>
+          </a:solidFill>
+          <a:ln>
+            <a:noFill/>
+          </a:ln>
+        </p:spPr>
+        <p:txBody>
+          <a:bodyPr wrap="square" anchor="ctr" lIns="45720" rIns="45720">
+            <a:noAutofit/>
+          </a:bodyPr>
+          <a:lstStyle/>
+          <a:p>
+            <a:pPr algn="ctr"/>
+            <a:r>
+              <a:rPr lang="es-ES" sz="2400" b="1" dirty="0">
+                <a:solidFill>
+                  <a:srgbClr val="564D47"/>
+                </a:solidFill>
+              </a:rPr>
+              <a:t>F7</a:t>
+            </a:r>
+          </a:p>
+          <a:p>
+            <a:pPr algn="ctr"/>
+            <a:r>
+              <a:rPr lang="es-ES" sz="1050" dirty="0">
+                <a:solidFill>
+                  <a:srgbClr val="564D47"/>
+                </a:solidFill>
+              </a:rPr>
+              <a:t>Evolution or retirement</a:t>
+            </a:r>
+          </a:p>
+        </p:txBody>
+      </p:sp>
+      <p:sp>
+        <p:nvSpPr>
+          <p:cNvPr id="190" name="Texto 190"/>
+          <p:cNvSpPr txBox="1"/>
+          <p:nvPr/>
+        </p:nvSpPr>
+        <p:spPr>
+          <a:xfrm>
+            <a:off x="11181000" y="3900000"/>
+            <a:ext cx="800000" cy="300000"/>
+          </a:xfrm>
+          <a:prstGeom prst="rect">
+            <a:avLst/>
+          </a:prstGeom>
+          <a:noFill/>
+        </p:spPr>
+        <p:txBody>
+          <a:bodyPr wrap="square" anchor="t" lIns="45720" rIns="45720">
+            <a:noAutofit/>
+          </a:bodyPr>
+          <a:lstStyle/>
+          <a:p>
+            <a:pPr algn="ctr"/>
+            <a:r>
+              <a:rPr lang="es-ES" sz="1200" b="1" dirty="0">
+                <a:solidFill>
+                  <a:srgbClr val="990F3D"/>
+                </a:solidFill>
+              </a:rPr>
+              <a:t>G7</a:t>
+            </a:r>
+          </a:p>
+        </p:txBody>
+      </p:sp>
+      <p:sp>
+        <p:nvSpPr>
+          <p:cNvPr id="191" name="Texto 191"/>
+          <p:cNvSpPr txBox="1"/>
+          <p:nvPr/>
+        </p:nvSpPr>
+        <p:spPr>
+          <a:xfrm>
+            <a:off x="609600" y="4430000"/>
+            <a:ext cx="10972800" cy="600000"/>
+          </a:xfrm>
+          <a:prstGeom prst="rect">
+            <a:avLst/>
+          </a:prstGeom>
+          <a:noFill/>
+        </p:spPr>
+        <p:txBody>
+          <a:bodyPr wrap="square" anchor="t" lIns="45720" rIns="45720">
+            <a:noAutofit/>
+          </a:bodyPr>
+          <a:lstStyle/>
+          <a:p>
+            <a:pPr algn="ctr"/>
+            <a:r>
+              <a:rPr lang="es-ES" sz="2200" b="1" dirty="0">
+                <a:solidFill>
+                  <a:srgbClr val="0D7680"/>
+                </a:solidFill>
+              </a:rPr>
+              <a:t>IN USE · each R6 confirms it keeps delivering value under control</a:t>
             </a:r>
           </a:p>
         </p:txBody>
@@ -4198,7 +4276,7 @@
     <p:bg>
       <p:bgPr>
         <a:solidFill>
-          <a:srgbClr val="1A1817"/>
+          <a:srgbClr val="FBE2CD"/>
         </a:solidFill>
         <a:effectLst/>
       </p:bgPr>
@@ -4219,13 +4297,13 @@
       </p:grpSpPr>
       <p:sp>
         <p:nvSpPr>
-          <p:cNvPr id="193" name="Marca"/>
+          <p:cNvPr id="197" name="Marca"/>
           <p:cNvSpPr/>
           <p:nvPr/>
         </p:nvSpPr>
         <p:spPr>
           <a:xfrm>
-            <a:off x="609600" y="2400000"/>
+            <a:off x="609600" y="365760"/>
             <a:ext cx="182880" cy="182880"/>
           </a:xfrm>
           <a:prstGeom prst="rect">
@@ -4243,48 +4321,48 @@
       </p:sp>
       <p:sp>
         <p:nvSpPr>
-          <p:cNvPr id="194" name="Texto 194"/>
-          <p:cNvSpPr txBox="1"/>
-          <p:nvPr/>
-        </p:nvSpPr>
-        <p:spPr>
-          <a:xfrm>
-            <a:off x="838200" y="2320000"/>
-            <a:ext cx="9000000" cy="400000"/>
-          </a:xfrm>
-          <a:prstGeom prst="rect">
-            <a:avLst/>
-          </a:prstGeom>
-          <a:noFill/>
-        </p:spPr>
-        <p:txBody>
-          <a:bodyPr wrap="square" anchor="t" lIns="45720" rIns="45720">
+          <p:cNvPr id="198" name="Texto 198"/>
+          <p:cNvSpPr txBox="1"/>
+          <p:nvPr/>
+        </p:nvSpPr>
+        <p:spPr>
+          <a:xfrm>
+            <a:off x="838200" y="300000"/>
+            <a:ext cx="10500000" cy="320000"/>
+          </a:xfrm>
+          <a:prstGeom prst="rect">
+            <a:avLst/>
+          </a:prstGeom>
+          <a:noFill/>
+        </p:spPr>
+        <p:txBody>
+          <a:bodyPr wrap="square" anchor="ctr" lIns="45720" rIns="45720">
             <a:noAutofit/>
           </a:bodyPr>
           <a:lstStyle/>
           <a:p>
             <a:pPr algn="l"/>
             <a:r>
-              <a:rPr lang="es-ES" sz="1600" b="1" dirty="0">
-                <a:solidFill>
-                  <a:srgbClr val="F3CFB2"/>
-                </a:solidFill>
-              </a:rPr>
-              <a:t>FOR THE CONSULTANT</a:t>
-            </a:r>
-          </a:p>
-        </p:txBody>
-      </p:sp>
-      <p:sp>
-        <p:nvSpPr>
-          <p:cNvPr id="195" name="Texto 195"/>
-          <p:cNvSpPr txBox="1"/>
-          <p:nvPr/>
-        </p:nvSpPr>
-        <p:spPr>
-          <a:xfrm>
-            <a:off x="609600" y="2850000"/>
-            <a:ext cx="10972800" cy="1400000"/>
+              <a:rPr lang="es-ES" sz="1400" b="1" dirty="0">
+                <a:solidFill>
+                  <a:srgbClr val="1A1817"/>
+                </a:solidFill>
+              </a:rPr>
+              <a:t>SEVEN-G · COURSE · CONSULTANT · SUPPORTING CLIENTS</a:t>
+            </a:r>
+          </a:p>
+        </p:txBody>
+      </p:sp>
+      <p:sp>
+        <p:nvSpPr>
+          <p:cNvPr id="199" name="Texto 199"/>
+          <p:cNvSpPr txBox="1"/>
+          <p:nvPr/>
+        </p:nvSpPr>
+        <p:spPr>
+          <a:xfrm>
+            <a:off x="609600" y="700000"/>
+            <a:ext cx="10972800" cy="650000"/>
           </a:xfrm>
           <a:prstGeom prst="rect">
             <a:avLst/>
@@ -4299,12 +4377,12 @@
           <a:p>
             <a:pPr algn="l"/>
             <a:r>
-              <a:rPr lang="es-ES" sz="4000" b="1" dirty="0">
-                <a:solidFill>
-                  <a:srgbClr val="FBE2CD"/>
-                </a:solidFill>
-              </a:rPr>
-              <a:t>Applying SEVEN-G at clients, under your own name</a:t>
+              <a:rPr lang="es-ES" sz="2700" b="1" dirty="0">
+                <a:solidFill>
+                  <a:srgbClr val="990F3D"/>
+                </a:solidFill>
+              </a:rPr>
+              <a:t>How value is measured</a:t>
             </a:r>
           </a:p>
         </p:txBody>
@@ -4317,28 +4395,117 @@
         </p:nvSpPr>
         <p:spPr>
           <a:xfrm>
-            <a:off x="609600" y="4400000"/>
-            <a:ext cx="10500000" cy="900000"/>
-          </a:xfrm>
-          <a:prstGeom prst="rect">
-            <a:avLst/>
-          </a:prstGeom>
-          <a:noFill/>
-        </p:spPr>
-        <p:txBody>
-          <a:bodyPr wrap="square" anchor="t" lIns="45720" rIns="45720">
-            <a:noAutofit/>
-          </a:bodyPr>
-          <a:lstStyle/>
-          <a:p>
-            <a:pPr algn="l"/>
-            <a:r>
-              <a:rPr lang="es-ES" sz="1700" dirty="0">
-                <a:solidFill>
-                  <a:srgbClr val="F3CFB2"/>
-                </a:solidFill>
-              </a:rPr>
-              <a:t>The licence allows it, including in paid services and without hiring the author. In return it asks for fidelity, independence and honesty.</a:t>
+            <a:off x="609600" y="1750000"/>
+            <a:ext cx="10972800" cy="4400000"/>
+          </a:xfrm>
+          <a:prstGeom prst="rect">
+            <a:avLst/>
+          </a:prstGeom>
+          <a:noFill/>
+        </p:spPr>
+        <p:txBody>
+          <a:bodyPr wrap="square" anchor="t" lIns="45720" rIns="45720">
+            <a:noAutofit/>
+          </a:bodyPr>
+          <a:lstStyle/>
+          <a:p>
+            <a:pPr marL="285750" indent="-285750">
+              <a:spcAft>
+                <a:spcPts val="400"/>
+              </a:spcAft>
+              <a:buClr>
+                <a:srgbClr val="990F3D"/>
+              </a:buClr>
+              <a:buFont typeface="Arial"/>
+              <a:buChar char="•"/>
+            </a:pPr>
+            <a:r>
+              <a:rPr lang="es-ES" sz="1800" dirty="0">
+                <a:solidFill>
+                  <a:srgbClr val="2F2B28"/>
+                </a:solidFill>
+              </a:rPr>
+              <a:t>Every amount carries a formula and a status: validated (finance), declared (the team) or estimated.</a:t>
+            </a:r>
+          </a:p>
+          <a:p>
+            <a:pPr marL="285750" indent="-285750">
+              <a:spcAft>
+                <a:spcPts val="400"/>
+              </a:spcAft>
+              <a:buClr>
+                <a:srgbClr val="990F3D"/>
+              </a:buClr>
+              <a:buFont typeface="Arial"/>
+              <a:buChar char="•"/>
+            </a:pPr>
+            <a:r>
+              <a:rPr lang="es-ES" sz="1800" dirty="0">
+                <a:solidFill>
+                  <a:srgbClr val="2F2B28"/>
+                </a:solidFill>
+              </a:rPr>
+              <a:t>Released hours are not savings until they are materialised: a cost goes down or they are reassigned to a valuable activity.</a:t>
+            </a:r>
+          </a:p>
+          <a:p>
+            <a:pPr marL="285750" indent="-285750">
+              <a:spcAft>
+                <a:spcPts val="400"/>
+              </a:spcAft>
+              <a:buClr>
+                <a:srgbClr val="990F3D"/>
+              </a:buClr>
+              <a:buFont typeface="Arial"/>
+              <a:buChar char="•"/>
+            </a:pPr>
+            <a:r>
+              <a:rPr lang="es-ES" sz="1800" dirty="0">
+                <a:solidFill>
+                  <a:srgbClr val="2F2B28"/>
+                </a:solidFill>
+              </a:rPr>
+              <a:t>Cost is complete: build, consumption, operation, human oversight and retirement.</a:t>
+            </a:r>
+          </a:p>
+          <a:p>
+            <a:pPr marL="285750" indent="-285750">
+              <a:spcAft>
+                <a:spcPts val="400"/>
+              </a:spcAft>
+              <a:buClr>
+                <a:srgbClr val="990F3D"/>
+              </a:buClr>
+              <a:buFont typeface="Arial"/>
+              <a:buChar char="•"/>
+            </a:pPr>
+            <a:r>
+              <a:rPr lang="es-ES" sz="1800" dirty="0">
+                <a:solidFill>
+                  <a:srgbClr val="2F2B28"/>
+                </a:solidFill>
+              </a:rPr>
+              <a:t>The transformation index uses eight evidence signals to tell transformation apart from mere efficiency.</a:t>
+            </a:r>
+          </a:p>
+          <a:p>
+            <a:pPr marL="285750" indent="-285750">
+              <a:spcAft>
+                <a:spcPts val="400"/>
+              </a:spcAft>
+              <a:buClr>
+                <a:srgbClr val="990F3D"/>
+              </a:buClr>
+              <a:buFont typeface="Arial"/>
+              <a:buChar char="•"/>
+            </a:pPr>
+            <a:r>
+              <a:rPr lang="es-ES" sz="1800" dirty="0">
+                <a:solidFill>
+                  <a:srgbClr val="2F2B28"/>
+                </a:solidFill>
+              </a:rPr>
+              <a:t>Ten measurement rules (document 40). No figure enters the portfolio net without its status.</a:t>
             </a:r>
           </a:p>
         </p:txBody>
@@ -4639,7 +4806,7 @@
     <p:bg>
       <p:bgPr>
         <a:solidFill>
-          <a:srgbClr val="FBE2CD"/>
+          <a:srgbClr val="1A1817"/>
         </a:solidFill>
         <a:effectLst/>
       </p:bgPr>
@@ -4660,13 +4827,13 @@
       </p:grpSpPr>
       <p:sp>
         <p:nvSpPr>
-          <p:cNvPr id="199" name="Marca"/>
+          <p:cNvPr id="200" name="Marca"/>
           <p:cNvSpPr/>
           <p:nvPr/>
         </p:nvSpPr>
         <p:spPr>
           <a:xfrm>
-            <a:off x="609600" y="365760"/>
+            <a:off x="609600" y="2400000"/>
             <a:ext cx="182880" cy="182880"/>
           </a:xfrm>
           <a:prstGeom prst="rect">
@@ -4684,48 +4851,48 @@
       </p:sp>
       <p:sp>
         <p:nvSpPr>
-          <p:cNvPr id="200" name="Texto 200"/>
-          <p:cNvSpPr txBox="1"/>
-          <p:nvPr/>
-        </p:nvSpPr>
-        <p:spPr>
-          <a:xfrm>
-            <a:off x="838200" y="300000"/>
-            <a:ext cx="10500000" cy="320000"/>
-          </a:xfrm>
-          <a:prstGeom prst="rect">
-            <a:avLst/>
-          </a:prstGeom>
-          <a:noFill/>
-        </p:spPr>
-        <p:txBody>
-          <a:bodyPr wrap="square" anchor="ctr" lIns="45720" rIns="45720">
+          <p:cNvPr id="201" name="Texto 201"/>
+          <p:cNvSpPr txBox="1"/>
+          <p:nvPr/>
+        </p:nvSpPr>
+        <p:spPr>
+          <a:xfrm>
+            <a:off x="838200" y="2320000"/>
+            <a:ext cx="9000000" cy="400000"/>
+          </a:xfrm>
+          <a:prstGeom prst="rect">
+            <a:avLst/>
+          </a:prstGeom>
+          <a:noFill/>
+        </p:spPr>
+        <p:txBody>
+          <a:bodyPr wrap="square" anchor="t" lIns="45720" rIns="45720">
             <a:noAutofit/>
           </a:bodyPr>
           <a:lstStyle/>
           <a:p>
             <a:pPr algn="l"/>
             <a:r>
-              <a:rPr lang="es-ES" sz="1400" b="1" dirty="0">
-                <a:solidFill>
-                  <a:srgbClr val="1A1817"/>
-                </a:solidFill>
-              </a:rPr>
-              <a:t>SEVEN-G · COURSE · CONSULTANT · SUPPORTING CLIENTS</a:t>
-            </a:r>
-          </a:p>
-        </p:txBody>
-      </p:sp>
-      <p:sp>
-        <p:nvSpPr>
-          <p:cNvPr id="201" name="Texto 201"/>
-          <p:cNvSpPr txBox="1"/>
-          <p:nvPr/>
-        </p:nvSpPr>
-        <p:spPr>
-          <a:xfrm>
-            <a:off x="609600" y="700000"/>
-            <a:ext cx="10972800" cy="650000"/>
+              <a:rPr lang="es-ES" sz="1600" b="1" dirty="0">
+                <a:solidFill>
+                  <a:srgbClr val="F3CFB2"/>
+                </a:solidFill>
+              </a:rPr>
+              <a:t>FOR THE CONSULTANT</a:t>
+            </a:r>
+          </a:p>
+        </p:txBody>
+      </p:sp>
+      <p:sp>
+        <p:nvSpPr>
+          <p:cNvPr id="202" name="Texto 202"/>
+          <p:cNvSpPr txBox="1"/>
+          <p:nvPr/>
+        </p:nvSpPr>
+        <p:spPr>
+          <a:xfrm>
+            <a:off x="609600" y="2850000"/>
+            <a:ext cx="10972800" cy="1400000"/>
           </a:xfrm>
           <a:prstGeom prst="rect">
             <a:avLst/>
@@ -4740,149 +4907,26 @@
           <a:p>
             <a:pPr algn="l"/>
             <a:r>
-              <a:rPr lang="es-ES" sz="2700" b="1" dirty="0">
-                <a:solidFill>
-                  <a:srgbClr val="990F3D"/>
-                </a:solidFill>
-              </a:rPr>
-              <a:t>What the licence allows and what you take on</a:t>
-            </a:r>
-          </a:p>
-        </p:txBody>
-      </p:sp>
-      <p:sp>
-        <p:nvSpPr>
-          <p:cNvPr id="197" name="Texto 197"/>
-          <p:cNvSpPr txBox="1"/>
-          <p:nvPr/>
-        </p:nvSpPr>
-        <p:spPr>
-          <a:xfrm>
-            <a:off x="609600" y="1750000"/>
-            <a:ext cx="10972800" cy="4400000"/>
-          </a:xfrm>
-          <a:prstGeom prst="rect">
-            <a:avLst/>
-          </a:prstGeom>
-          <a:noFill/>
-        </p:spPr>
-        <p:txBody>
-          <a:bodyPr wrap="square" anchor="t" lIns="45720" rIns="45720">
-            <a:noAutofit/>
-          </a:bodyPr>
-          <a:lstStyle/>
-          <a:p>
-            <a:pPr marL="285750" indent="-285750">
-              <a:spcAft>
-                <a:spcPts val="400"/>
-              </a:spcAft>
-              <a:buClr>
-                <a:srgbClr val="990F3D"/>
-              </a:buClr>
-              <a:buFont typeface="Arial"/>
-              <a:buChar char="•"/>
-            </a:pPr>
-            <a:r>
-              <a:rPr lang="es-ES" sz="1800" dirty="0">
-                <a:solidFill>
-                  <a:srgbClr val="2F2B28"/>
-                </a:solidFill>
-              </a:rPr>
-              <a:t>You may use, adapt and apply the framework in paid services without asking permission: credit the author, indicate changes and do not suggest endorsement.</a:t>
-            </a:r>
-          </a:p>
-          <a:p>
-            <a:pPr marL="285750" indent="-285750">
-              <a:spcAft>
-                <a:spcPts val="400"/>
-              </a:spcAft>
-              <a:buClr>
-                <a:srgbClr val="990F3D"/>
-              </a:buClr>
-              <a:buFont typeface="Arial"/>
-              <a:buChar char="•"/>
-            </a:pPr>
-            <a:r>
-              <a:rPr lang="es-ES" sz="1800" dirty="0">
-                <a:solidFill>
-                  <a:srgbClr val="2F2B28"/>
-                </a:solidFill>
-              </a:rPr>
-              <a:t>You answer to your client for your service: SEVEN-G is a reference framework, not a guarantee of results.</a:t>
-            </a:r>
-          </a:p>
-          <a:p>
-            <a:pPr marL="285750" indent="-285750">
-              <a:spcAft>
-                <a:spcPts val="400"/>
-              </a:spcAft>
-              <a:buClr>
-                <a:srgbClr val="990F3D"/>
-              </a:buClr>
-              <a:buFont typeface="Arial"/>
-              <a:buChar char="•"/>
-            </a:pPr>
-            <a:r>
-              <a:rPr lang="es-ES" sz="1800" dirty="0">
-                <a:solidFill>
-                  <a:srgbClr val="2F2B28"/>
-                </a:solidFill>
-              </a:rPr>
-              <a:t>You state which version you apply and what you have adapted, in every deliverable.</a:t>
-            </a:r>
-          </a:p>
-          <a:p>
-            <a:pPr marL="285750" indent="-285750">
-              <a:spcAft>
-                <a:spcPts val="400"/>
-              </a:spcAft>
-              <a:buClr>
-                <a:srgbClr val="990F3D"/>
-              </a:buClr>
-              <a:buFont typeface="Arial"/>
-              <a:buChar char="•"/>
-            </a:pPr>
-            <a:r>
-              <a:rPr lang="es-ES" sz="1800" dirty="0">
-                <a:solidFill>
-                  <a:srgbClr val="2F2B28"/>
-                </a:solidFill>
-              </a:rPr>
-              <a:t>Client information is not used with other clients or in examples, not even anonymised, without written authorisation.</a:t>
-            </a:r>
-          </a:p>
-          <a:p>
-            <a:pPr marL="285750" indent="-285750">
-              <a:spcAft>
-                <a:spcPts val="400"/>
-              </a:spcAft>
-              <a:buClr>
-                <a:srgbClr val="990F3D"/>
-              </a:buClr>
-              <a:buFont typeface="Arial"/>
-              <a:buChar char="•"/>
-            </a:pPr>
-            <a:r>
-              <a:rPr lang="es-ES" sz="1800" dirty="0">
-                <a:solidFill>
-                  <a:srgbClr val="2F2B28"/>
-                </a:solidFill>
-              </a:rPr>
-              <a:t>Regulatory classification and legal matters require qualified legal judgement; carry the legal notice into your deliverables.</a:t>
-            </a:r>
-          </a:p>
-        </p:txBody>
-      </p:sp>
-      <p:sp>
-        <p:nvSpPr>
-          <p:cNvPr id="198" name="Texto 198"/>
-          <p:cNvSpPr txBox="1"/>
-          <p:nvPr/>
-        </p:nvSpPr>
-        <p:spPr>
-          <a:xfrm>
-            <a:off x="609600" y="6250000"/>
-            <a:ext cx="10972800" cy="450000"/>
+              <a:rPr lang="es-ES" sz="4000" b="1" dirty="0">
+                <a:solidFill>
+                  <a:srgbClr val="FBE2CD"/>
+                </a:solidFill>
+              </a:rPr>
+              <a:t>Applying SEVEN-G at clients, under your own name</a:t>
+            </a:r>
+          </a:p>
+        </p:txBody>
+      </p:sp>
+      <p:sp>
+        <p:nvSpPr>
+          <p:cNvPr id="203" name="Texto 203"/>
+          <p:cNvSpPr txBox="1"/>
+          <p:nvPr/>
+        </p:nvSpPr>
+        <p:spPr>
+          <a:xfrm>
+            <a:off x="609600" y="4400000"/>
+            <a:ext cx="10500000" cy="900000"/>
           </a:xfrm>
           <a:prstGeom prst="rect">
             <a:avLst/>
@@ -4897,12 +4941,12 @@
           <a:p>
             <a:pPr algn="l"/>
             <a:r>
-              <a:rPr lang="es-ES" sz="1400" b="1" dirty="0">
-                <a:solidFill>
-                  <a:srgbClr val="0F5499"/>
-                </a:solidFill>
-              </a:rPr>
-              <a:t>Document 91, section 2, and document 93.</a:t>
+              <a:rPr lang="es-ES" sz="1700" dirty="0">
+                <a:solidFill>
+                  <a:srgbClr val="F3CFB2"/>
+                </a:solidFill>
+              </a:rPr>
+              <a:t>The licence allows it, including in paid services and without hiring the author. In return it asks for fidelity, independence and honesty.</a:t>
             </a:r>
           </a:p>
         </p:txBody>
@@ -4942,7 +4986,7 @@
       </p:grpSpPr>
       <p:sp>
         <p:nvSpPr>
-          <p:cNvPr id="204" name="Marca"/>
+          <p:cNvPr id="206" name="Marca"/>
           <p:cNvSpPr/>
           <p:nvPr/>
         </p:nvSpPr>
@@ -4966,7 +5010,7 @@
       </p:sp>
       <p:sp>
         <p:nvSpPr>
-          <p:cNvPr id="205" name="Texto 205"/>
+          <p:cNvPr id="207" name="Texto 207"/>
           <p:cNvSpPr txBox="1"/>
           <p:nvPr/>
         </p:nvSpPr>
@@ -5000,7 +5044,7 @@
       </p:sp>
       <p:sp>
         <p:nvSpPr>
-          <p:cNvPr id="206" name="Texto 206"/>
+          <p:cNvPr id="208" name="Texto 208"/>
           <p:cNvSpPr txBox="1"/>
           <p:nvPr/>
         </p:nvSpPr>
@@ -5027,14 +5071,14 @@
                   <a:srgbClr val="990F3D"/>
                 </a:solidFill>
               </a:rPr>
-              <a:t>Six rules you cannot drop without saying so</a:t>
-            </a:r>
-          </a:p>
-        </p:txBody>
-      </p:sp>
-      <p:sp>
-        <p:nvSpPr>
-          <p:cNvPr id="202" name="Texto 202"/>
+              <a:t>What the licence allows and what you take on</a:t>
+            </a:r>
+          </a:p>
+        </p:txBody>
+      </p:sp>
+      <p:sp>
+        <p:nvSpPr>
+          <p:cNvPr id="204" name="Texto 204"/>
           <p:cNvSpPr txBox="1"/>
           <p:nvPr/>
         </p:nvSpPr>
@@ -5065,12 +5109,12 @@
               <a:buChar char="•"/>
             </a:pPr>
             <a:r>
-              <a:rPr lang="es-ES" sz="1700" dirty="0">
-                <a:solidFill>
-                  <a:srgbClr val="2F2B28"/>
-                </a:solidFill>
-              </a:rPr>
-              <a:t>Segregation of duties: whoever builds does not control, and nobody approves themselves.</a:t>
+              <a:rPr lang="es-ES" sz="1800" dirty="0">
+                <a:solidFill>
+                  <a:srgbClr val="2F2B28"/>
+                </a:solidFill>
+              </a:rPr>
+              <a:t>You may use, adapt and apply the framework in paid services without asking permission: credit the author, indicate changes and do not suggest endorsement.</a:t>
             </a:r>
           </a:p>
           <a:p>
@@ -5085,12 +5129,12 @@
               <a:buChar char="•"/>
             </a:pPr>
             <a:r>
-              <a:rPr lang="es-ES" sz="1700" dirty="0">
-                <a:solidFill>
-                  <a:srgbClr val="2F2B28"/>
-                </a:solidFill>
-              </a:rPr>
-              <a:t>Dual validation at the gates and a real ability to stop.</a:t>
+              <a:rPr lang="es-ES" sz="1800" dirty="0">
+                <a:solidFill>
+                  <a:srgbClr val="2F2B28"/>
+                </a:solidFill>
+              </a:rPr>
+              <a:t>You answer to your client for your service: SEVEN-G is a reference framework, not a guarantee of results.</a:t>
             </a:r>
           </a:p>
           <a:p>
@@ -5105,12 +5149,12 @@
               <a:buChar char="•"/>
             </a:pPr>
             <a:r>
-              <a:rPr lang="es-ES" sz="1700" dirty="0">
-                <a:solidFill>
-                  <a:srgbClr val="2F2B28"/>
-                </a:solidFill>
-              </a:rPr>
-              <a:t>The ten measurement rules: a status for every amount, and released capacity does not count until materialised.</a:t>
+              <a:rPr lang="es-ES" sz="1800" dirty="0">
+                <a:solidFill>
+                  <a:srgbClr val="2F2B28"/>
+                </a:solidFill>
+              </a:rPr>
+              <a:t>You state which version you apply and what you have adapted, in every deliverable.</a:t>
             </a:r>
           </a:p>
           <a:p>
@@ -5125,12 +5169,12 @@
               <a:buChar char="•"/>
             </a:pPr>
             <a:r>
-              <a:rPr lang="es-ES" sz="1700" dirty="0">
-                <a:solidFill>
-                  <a:srgbClr val="2F2B28"/>
-                </a:solidFill>
-              </a:rPr>
-              <a:t>Ambition classified with the five questions.</a:t>
+              <a:rPr lang="es-ES" sz="1800" dirty="0">
+                <a:solidFill>
+                  <a:srgbClr val="2F2B28"/>
+                </a:solidFill>
+              </a:rPr>
+              <a:t>Client information is not used with other clients or in examples, not even anonymised, without written authorisation.</a:t>
             </a:r>
           </a:p>
           <a:p>
@@ -5145,39 +5189,19 @@
               <a:buChar char="•"/>
             </a:pPr>
             <a:r>
-              <a:rPr lang="es-ES" sz="1700" dirty="0">
-                <a:solidFill>
-                  <a:srgbClr val="2F2B28"/>
-                </a:solidFill>
-              </a:rPr>
-              <a:t>Maturity based on observable evidence, not self-assessment.</a:t>
-            </a:r>
-          </a:p>
-          <a:p>
-            <a:pPr marL="285750" indent="-285750">
-              <a:spcAft>
-                <a:spcPts val="400"/>
-              </a:spcAft>
-              <a:buClr>
-                <a:srgbClr val="990F3D"/>
-              </a:buClr>
-              <a:buFont typeface="Arial"/>
-              <a:buChar char="•"/>
-            </a:pPr>
-            <a:r>
-              <a:rPr lang="es-ES" sz="1700" dirty="0">
-                <a:solidFill>
-                  <a:srgbClr val="2F2B28"/>
-                </a:solidFill>
-              </a:rPr>
-              <a:t>A recommendations log with persistent identifiers and independent assessment.</a:t>
-            </a:r>
-          </a:p>
-        </p:txBody>
-      </p:sp>
-      <p:sp>
-        <p:nvSpPr>
-          <p:cNvPr id="203" name="Texto 203"/>
+              <a:rPr lang="es-ES" sz="1800" dirty="0">
+                <a:solidFill>
+                  <a:srgbClr val="2F2B28"/>
+                </a:solidFill>
+              </a:rPr>
+              <a:t>Regulatory classification and legal matters require qualified legal judgement; carry the legal notice into your deliverables.</a:t>
+            </a:r>
+          </a:p>
+        </p:txBody>
+      </p:sp>
+      <p:sp>
+        <p:nvSpPr>
+          <p:cNvPr id="205" name="Texto 205"/>
           <p:cNvSpPr txBox="1"/>
           <p:nvPr/>
         </p:nvSpPr>
@@ -5204,7 +5228,7 @@
                   <a:srgbClr val="0F5499"/>
                 </a:solidFill>
               </a:rPr>
-              <a:t>If you drop any, your service may be inspired by SEVEN-G, but must not be presented as an application of SEVEN-G.</a:t>
+              <a:t>Document 91, section 2, and document 93.</a:t>
             </a:r>
           </a:p>
         </p:txBody>
@@ -5244,7 +5268,7 @@
       </p:grpSpPr>
       <p:sp>
         <p:nvSpPr>
-          <p:cNvPr id="223" name="Marca"/>
+          <p:cNvPr id="211" name="Marca"/>
           <p:cNvSpPr/>
           <p:nvPr/>
         </p:nvSpPr>
@@ -5268,7 +5292,7 @@
       </p:sp>
       <p:sp>
         <p:nvSpPr>
-          <p:cNvPr id="224" name="Texto 224"/>
+          <p:cNvPr id="212" name="Texto 212"/>
           <p:cNvSpPr txBox="1"/>
           <p:nvPr/>
         </p:nvSpPr>
@@ -5302,7 +5326,7 @@
       </p:sp>
       <p:sp>
         <p:nvSpPr>
-          <p:cNvPr id="225" name="Texto 225"/>
+          <p:cNvPr id="213" name="Texto 213"/>
           <p:cNvSpPr txBox="1"/>
           <p:nvPr/>
         </p:nvSpPr>
@@ -5329,20 +5353,163 @@
                   <a:srgbClr val="990F3D"/>
                 </a:solidFill>
               </a:rPr>
-              <a:t>Five engagement models</a:t>
-            </a:r>
-          </a:p>
-        </p:txBody>
-      </p:sp>
-      <p:sp>
-        <p:nvSpPr>
-          <p:cNvPr id="226" name="Texto 226"/>
-          <p:cNvSpPr txBox="1"/>
-          <p:nvPr/>
-        </p:nvSpPr>
-        <p:spPr>
-          <a:xfrm>
-            <a:off x="609600" y="1330000"/>
+              <a:t>Six rules you cannot drop without saying so</a:t>
+            </a:r>
+          </a:p>
+        </p:txBody>
+      </p:sp>
+      <p:sp>
+        <p:nvSpPr>
+          <p:cNvPr id="209" name="Texto 209"/>
+          <p:cNvSpPr txBox="1"/>
+          <p:nvPr/>
+        </p:nvSpPr>
+        <p:spPr>
+          <a:xfrm>
+            <a:off x="609600" y="1750000"/>
+            <a:ext cx="10972800" cy="4400000"/>
+          </a:xfrm>
+          <a:prstGeom prst="rect">
+            <a:avLst/>
+          </a:prstGeom>
+          <a:noFill/>
+        </p:spPr>
+        <p:txBody>
+          <a:bodyPr wrap="square" anchor="t" lIns="45720" rIns="45720">
+            <a:noAutofit/>
+          </a:bodyPr>
+          <a:lstStyle/>
+          <a:p>
+            <a:pPr marL="285750" indent="-285750">
+              <a:spcAft>
+                <a:spcPts val="400"/>
+              </a:spcAft>
+              <a:buClr>
+                <a:srgbClr val="990F3D"/>
+              </a:buClr>
+              <a:buFont typeface="Arial"/>
+              <a:buChar char="•"/>
+            </a:pPr>
+            <a:r>
+              <a:rPr lang="es-ES" sz="1700" dirty="0">
+                <a:solidFill>
+                  <a:srgbClr val="2F2B28"/>
+                </a:solidFill>
+              </a:rPr>
+              <a:t>Segregation of duties: whoever builds does not control, and nobody approves themselves.</a:t>
+            </a:r>
+          </a:p>
+          <a:p>
+            <a:pPr marL="285750" indent="-285750">
+              <a:spcAft>
+                <a:spcPts val="400"/>
+              </a:spcAft>
+              <a:buClr>
+                <a:srgbClr val="990F3D"/>
+              </a:buClr>
+              <a:buFont typeface="Arial"/>
+              <a:buChar char="•"/>
+            </a:pPr>
+            <a:r>
+              <a:rPr lang="es-ES" sz="1700" dirty="0">
+                <a:solidFill>
+                  <a:srgbClr val="2F2B28"/>
+                </a:solidFill>
+              </a:rPr>
+              <a:t>Dual validation at the gates and a real ability to stop.</a:t>
+            </a:r>
+          </a:p>
+          <a:p>
+            <a:pPr marL="285750" indent="-285750">
+              <a:spcAft>
+                <a:spcPts val="400"/>
+              </a:spcAft>
+              <a:buClr>
+                <a:srgbClr val="990F3D"/>
+              </a:buClr>
+              <a:buFont typeface="Arial"/>
+              <a:buChar char="•"/>
+            </a:pPr>
+            <a:r>
+              <a:rPr lang="es-ES" sz="1700" dirty="0">
+                <a:solidFill>
+                  <a:srgbClr val="2F2B28"/>
+                </a:solidFill>
+              </a:rPr>
+              <a:t>The ten measurement rules: a status for every amount, and released capacity does not count until materialised.</a:t>
+            </a:r>
+          </a:p>
+          <a:p>
+            <a:pPr marL="285750" indent="-285750">
+              <a:spcAft>
+                <a:spcPts val="400"/>
+              </a:spcAft>
+              <a:buClr>
+                <a:srgbClr val="990F3D"/>
+              </a:buClr>
+              <a:buFont typeface="Arial"/>
+              <a:buChar char="•"/>
+            </a:pPr>
+            <a:r>
+              <a:rPr lang="es-ES" sz="1700" dirty="0">
+                <a:solidFill>
+                  <a:srgbClr val="2F2B28"/>
+                </a:solidFill>
+              </a:rPr>
+              <a:t>Ambition classified with the five questions.</a:t>
+            </a:r>
+          </a:p>
+          <a:p>
+            <a:pPr marL="285750" indent="-285750">
+              <a:spcAft>
+                <a:spcPts val="400"/>
+              </a:spcAft>
+              <a:buClr>
+                <a:srgbClr val="990F3D"/>
+              </a:buClr>
+              <a:buFont typeface="Arial"/>
+              <a:buChar char="•"/>
+            </a:pPr>
+            <a:r>
+              <a:rPr lang="es-ES" sz="1700" dirty="0">
+                <a:solidFill>
+                  <a:srgbClr val="2F2B28"/>
+                </a:solidFill>
+              </a:rPr>
+              <a:t>Maturity based on observable evidence, not self-assessment.</a:t>
+            </a:r>
+          </a:p>
+          <a:p>
+            <a:pPr marL="285750" indent="-285750">
+              <a:spcAft>
+                <a:spcPts val="400"/>
+              </a:spcAft>
+              <a:buClr>
+                <a:srgbClr val="990F3D"/>
+              </a:buClr>
+              <a:buFont typeface="Arial"/>
+              <a:buChar char="•"/>
+            </a:pPr>
+            <a:r>
+              <a:rPr lang="es-ES" sz="1700" dirty="0">
+                <a:solidFill>
+                  <a:srgbClr val="2F2B28"/>
+                </a:solidFill>
+              </a:rPr>
+              <a:t>A recommendations log with persistent identifiers and independent assessment.</a:t>
+            </a:r>
+          </a:p>
+        </p:txBody>
+      </p:sp>
+      <p:sp>
+        <p:nvSpPr>
+          <p:cNvPr id="210" name="Texto 210"/>
+          <p:cNvSpPr txBox="1"/>
+          <p:nvPr/>
+        </p:nvSpPr>
+        <p:spPr>
+          <a:xfrm>
+            <a:off x="609600" y="6250000"/>
             <a:ext cx="10972800" cy="450000"/>
           </a:xfrm>
           <a:prstGeom prst="rect">
@@ -5358,626 +5525,12 @@
           <a:p>
             <a:pPr algn="l"/>
             <a:r>
-              <a:rPr lang="es-ES" sz="1500" dirty="0">
-                <a:solidFill>
-                  <a:srgbClr val="564D47"/>
-                </a:solidFill>
-              </a:rPr>
-              <a:t>What each one delivers; durations are indicative</a:t>
-            </a:r>
-          </a:p>
-        </p:txBody>
-      </p:sp>
-      <p:sp>
-        <p:nvSpPr>
-          <p:cNvPr id="207" name="Caja 207"/>
-          <p:cNvSpPr/>
-          <p:nvPr/>
-        </p:nvSpPr>
-        <p:spPr>
-          <a:xfrm>
-            <a:off x="609600" y="2050000"/>
-            <a:ext cx="2098560" cy="800000"/>
-          </a:xfrm>
-          <a:prstGeom prst="roundRect">
-            <a:avLst>
-              <a:gd name="adj" fmla="val 6000"/>
-            </a:avLst>
-          </a:prstGeom>
-          <a:solidFill>
-            <a:srgbClr val="0F5499"/>
-          </a:solidFill>
-          <a:ln>
-            <a:noFill/>
-          </a:ln>
-        </p:spPr>
-        <p:txBody>
-          <a:bodyPr wrap="square" anchor="ctr" lIns="45720" rIns="45720">
-            <a:noAutofit/>
-          </a:bodyPr>
-          <a:lstStyle/>
-          <a:p>
-            <a:pPr algn="ctr"/>
-            <a:r>
-              <a:rPr lang="es-ES" sz="1700" b="1" dirty="0">
-                <a:solidFill>
-                  <a:srgbClr val="FFFFFF"/>
-                </a:solidFill>
-              </a:rPr>
-              <a:t>M1 · Diagnosis</a:t>
-            </a:r>
-          </a:p>
-        </p:txBody>
-      </p:sp>
-      <p:sp>
-        <p:nvSpPr>
-          <p:cNvPr id="208" name="Caja 208"/>
-          <p:cNvSpPr/>
-          <p:nvPr/>
-        </p:nvSpPr>
-        <p:spPr>
-          <a:xfrm>
-            <a:off x="609600" y="2790000"/>
-            <a:ext cx="2098560" cy="2500000"/>
-          </a:xfrm>
-          <a:prstGeom prst="roundRect">
-            <a:avLst>
-              <a:gd name="adj" fmla="val 6000"/>
-            </a:avLst>
-          </a:prstGeom>
-          <a:solidFill>
-            <a:srgbClr val="F3CFB2"/>
-          </a:solidFill>
-          <a:ln>
-            <a:noFill/>
-          </a:ln>
-        </p:spPr>
-        <p:txBody>
-          <a:bodyPr wrap="square" anchor="ctr" lIns="45720" rIns="45720">
-            <a:noAutofit/>
-          </a:bodyPr>
-          <a:lstStyle/>
-          <a:p>
-            <a:pPr algn="ctr"/>
-            <a:r>
-              <a:rPr lang="es-ES" sz="1000" b="1" dirty="0">
-                <a:solidFill>
-                  <a:srgbClr val="2F2B28"/>
-                </a:solidFill>
-              </a:rPr>
-              <a:t/>
-            </a:r>
-          </a:p>
-        </p:txBody>
-      </p:sp>
-      <p:sp>
-        <p:nvSpPr>
-          <p:cNvPr id="209" name="Texto 209"/>
-          <p:cNvSpPr txBox="1"/>
-          <p:nvPr/>
-        </p:nvSpPr>
-        <p:spPr>
-          <a:xfrm>
-            <a:off x="649600" y="2890000"/>
-            <a:ext cx="2018560" cy="2340000"/>
-          </a:xfrm>
-          <a:prstGeom prst="rect">
-            <a:avLst/>
-          </a:prstGeom>
-          <a:noFill/>
-        </p:spPr>
-        <p:txBody>
-          <a:bodyPr wrap="square" anchor="t" lIns="45720" rIns="45720">
-            <a:noAutofit/>
-          </a:bodyPr>
-          <a:lstStyle/>
-          <a:p>
-            <a:pPr algn="l"/>
-            <a:r>
-              <a:rPr lang="es-ES" sz="1300" dirty="0">
-                <a:solidFill>
-                  <a:srgbClr val="2F2B28"/>
-                </a:solidFill>
-              </a:rPr>
-              <a:t>4 to 6 weeks. Inventory, evidence-based maturity (T15), transformation index (T14), current value and cost. C1 report (P33).</a:t>
-            </a:r>
-          </a:p>
-        </p:txBody>
-      </p:sp>
-      <p:sp>
-        <p:nvSpPr>
-          <p:cNvPr id="210" name="Caja 210"/>
-          <p:cNvSpPr/>
-          <p:nvPr/>
-        </p:nvSpPr>
-        <p:spPr>
-          <a:xfrm>
-            <a:off x="2828160" y="2050000"/>
-            <a:ext cx="2098560" cy="800000"/>
-          </a:xfrm>
-          <a:prstGeom prst="roundRect">
-            <a:avLst>
-              <a:gd name="adj" fmla="val 6000"/>
-            </a:avLst>
-          </a:prstGeom>
-          <a:solidFill>
-            <a:srgbClr val="593380"/>
-          </a:solidFill>
-          <a:ln>
-            <a:noFill/>
-          </a:ln>
-        </p:spPr>
-        <p:txBody>
-          <a:bodyPr wrap="square" anchor="ctr" lIns="45720" rIns="45720">
-            <a:noAutofit/>
-          </a:bodyPr>
-          <a:lstStyle/>
-          <a:p>
-            <a:pPr algn="ctr"/>
-            <a:r>
-              <a:rPr lang="es-ES" sz="1700" b="1" dirty="0">
-                <a:solidFill>
-                  <a:srgbClr val="FFFFFF"/>
-                </a:solidFill>
-              </a:rPr>
-              <a:t>M2 · Implementation</a:t>
-            </a:r>
-          </a:p>
-        </p:txBody>
-      </p:sp>
-      <p:sp>
-        <p:nvSpPr>
-          <p:cNvPr id="211" name="Caja 211"/>
-          <p:cNvSpPr/>
-          <p:nvPr/>
-        </p:nvSpPr>
-        <p:spPr>
-          <a:xfrm>
-            <a:off x="2828160" y="2790000"/>
-            <a:ext cx="2098560" cy="2500000"/>
-          </a:xfrm>
-          <a:prstGeom prst="roundRect">
-            <a:avLst>
-              <a:gd name="adj" fmla="val 6000"/>
-            </a:avLst>
-          </a:prstGeom>
-          <a:solidFill>
-            <a:srgbClr val="F3CFB2"/>
-          </a:solidFill>
-          <a:ln>
-            <a:noFill/>
-          </a:ln>
-        </p:spPr>
-        <p:txBody>
-          <a:bodyPr wrap="square" anchor="ctr" lIns="45720" rIns="45720">
-            <a:noAutofit/>
-          </a:bodyPr>
-          <a:lstStyle/>
-          <a:p>
-            <a:pPr algn="ctr"/>
-            <a:r>
-              <a:rPr lang="es-ES" sz="1000" b="1" dirty="0">
-                <a:solidFill>
-                  <a:srgbClr val="2F2B28"/>
-                </a:solidFill>
-              </a:rPr>
-              <a:t/>
-            </a:r>
-          </a:p>
-        </p:txBody>
-      </p:sp>
-      <p:sp>
-        <p:nvSpPr>
-          <p:cNvPr id="212" name="Texto 212"/>
-          <p:cNvSpPr txBox="1"/>
-          <p:nvPr/>
-        </p:nvSpPr>
-        <p:spPr>
-          <a:xfrm>
-            <a:off x="2868160" y="2890000"/>
-            <a:ext cx="2018560" cy="2340000"/>
-          </a:xfrm>
-          <a:prstGeom prst="rect">
-            <a:avLst/>
-          </a:prstGeom>
-          <a:noFill/>
-        </p:spPr>
-        <p:txBody>
-          <a:bodyPr wrap="square" anchor="t" lIns="45720" rIns="45720">
-            <a:noAutofit/>
-          </a:bodyPr>
-          <a:lstStyle/>
-          <a:p>
-            <a:pPr algn="l"/>
-            <a:r>
-              <a:rPr lang="es-ES" sz="1300" dirty="0">
-                <a:solidFill>
-                  <a:srgbClr val="2F2B28"/>
-                </a:solidFill>
-              </a:rPr>
-              <a:t>90 days. Thesis and risk appetite, governance, portfolio, T01 register and dashboard with real data, and the first board pack.</a:t>
-            </a:r>
-          </a:p>
-        </p:txBody>
-      </p:sp>
-      <p:sp>
-        <p:nvSpPr>
-          <p:cNvPr id="213" name="Caja 213"/>
-          <p:cNvSpPr/>
-          <p:nvPr/>
-        </p:nvSpPr>
-        <p:spPr>
-          <a:xfrm>
-            <a:off x="5046720" y="2050000"/>
-            <a:ext cx="2098560" cy="800000"/>
-          </a:xfrm>
-          <a:prstGeom prst="roundRect">
-            <a:avLst>
-              <a:gd name="adj" fmla="val 6000"/>
-            </a:avLst>
-          </a:prstGeom>
-          <a:solidFill>
-            <a:srgbClr val="990F3D"/>
-          </a:solidFill>
-          <a:ln>
-            <a:noFill/>
-          </a:ln>
-        </p:spPr>
-        <p:txBody>
-          <a:bodyPr wrap="square" anchor="ctr" lIns="45720" rIns="45720">
-            <a:noAutofit/>
-          </a:bodyPr>
-          <a:lstStyle/>
-          <a:p>
-            <a:pPr algn="ctr"/>
-            <a:r>
-              <a:rPr lang="es-ES" sz="1700" b="1" dirty="0">
-                <a:solidFill>
-                  <a:srgbClr val="FFFFFF"/>
-                </a:solidFill>
-              </a:rPr>
-              <a:t>M3 · Audit</a:t>
-            </a:r>
-          </a:p>
-        </p:txBody>
-      </p:sp>
-      <p:sp>
-        <p:nvSpPr>
-          <p:cNvPr id="214" name="Caja 214"/>
-          <p:cNvSpPr/>
-          <p:nvPr/>
-        </p:nvSpPr>
-        <p:spPr>
-          <a:xfrm>
-            <a:off x="5046720" y="2790000"/>
-            <a:ext cx="2098560" cy="2500000"/>
-          </a:xfrm>
-          <a:prstGeom prst="roundRect">
-            <a:avLst>
-              <a:gd name="adj" fmla="val 6000"/>
-            </a:avLst>
-          </a:prstGeom>
-          <a:solidFill>
-            <a:srgbClr val="F3CFB2"/>
-          </a:solidFill>
-          <a:ln>
-            <a:noFill/>
-          </a:ln>
-        </p:spPr>
-        <p:txBody>
-          <a:bodyPr wrap="square" anchor="ctr" lIns="45720" rIns="45720">
-            <a:noAutofit/>
-          </a:bodyPr>
-          <a:lstStyle/>
-          <a:p>
-            <a:pPr algn="ctr"/>
-            <a:r>
-              <a:rPr lang="es-ES" sz="1000" b="1" dirty="0">
-                <a:solidFill>
-                  <a:srgbClr val="2F2B28"/>
-                </a:solidFill>
-              </a:rPr>
-              <a:t/>
-            </a:r>
-          </a:p>
-        </p:txBody>
-      </p:sp>
-      <p:sp>
-        <p:nvSpPr>
-          <p:cNvPr id="215" name="Texto 215"/>
-          <p:cNvSpPr txBox="1"/>
-          <p:nvPr/>
-        </p:nvSpPr>
-        <p:spPr>
-          <a:xfrm>
-            <a:off x="5086720" y="2890000"/>
-            <a:ext cx="2018560" cy="2340000"/>
-          </a:xfrm>
-          <a:prstGeom prst="rect">
-            <a:avLst/>
-          </a:prstGeom>
-          <a:noFill/>
-        </p:spPr>
-        <p:txBody>
-          <a:bodyPr wrap="square" anchor="t" lIns="45720" rIns="45720">
-            <a:noAutofit/>
-          </a:bodyPr>
-          <a:lstStyle/>
-          <a:p>
-            <a:pPr algn="l"/>
-            <a:r>
-              <a:rPr lang="es-ES" sz="1300" dirty="0">
-                <a:solidFill>
-                  <a:srgbClr val="2F2B28"/>
-                </a:solidFill>
-              </a:rPr>
-              <a:t>Independent opinion: Compliant, Compliant with observations or Non-compliant. Plan, working papers and report (P58, P59, P60).</a:t>
-            </a:r>
-          </a:p>
-        </p:txBody>
-      </p:sp>
-      <p:sp>
-        <p:nvSpPr>
-          <p:cNvPr id="216" name="Caja 216"/>
-          <p:cNvSpPr/>
-          <p:nvPr/>
-        </p:nvSpPr>
-        <p:spPr>
-          <a:xfrm>
-            <a:off x="7265280" y="2050000"/>
-            <a:ext cx="2098560" cy="800000"/>
-          </a:xfrm>
-          <a:prstGeom prst="roundRect">
-            <a:avLst>
-              <a:gd name="adj" fmla="val 6000"/>
-            </a:avLst>
-          </a:prstGeom>
-          <a:solidFill>
-            <a:srgbClr val="A5822A"/>
-          </a:solidFill>
-          <a:ln>
-            <a:noFill/>
-          </a:ln>
-        </p:spPr>
-        <p:txBody>
-          <a:bodyPr wrap="square" anchor="ctr" lIns="45720" rIns="45720">
-            <a:noAutofit/>
-          </a:bodyPr>
-          <a:lstStyle/>
-          <a:p>
-            <a:pPr algn="ctr"/>
-            <a:r>
-              <a:rPr lang="es-ES" sz="1700" b="1" dirty="0">
-                <a:solidFill>
-                  <a:srgbClr val="FFFFFF"/>
-                </a:solidFill>
-              </a:rPr>
-              <a:t>M4 · Board advisory</a:t>
-            </a:r>
-          </a:p>
-        </p:txBody>
-      </p:sp>
-      <p:sp>
-        <p:nvSpPr>
-          <p:cNvPr id="217" name="Caja 217"/>
-          <p:cNvSpPr/>
-          <p:nvPr/>
-        </p:nvSpPr>
-        <p:spPr>
-          <a:xfrm>
-            <a:off x="7265280" y="2790000"/>
-            <a:ext cx="2098560" cy="2500000"/>
-          </a:xfrm>
-          <a:prstGeom prst="roundRect">
-            <a:avLst>
-              <a:gd name="adj" fmla="val 6000"/>
-            </a:avLst>
-          </a:prstGeom>
-          <a:solidFill>
-            <a:srgbClr val="F3CFB2"/>
-          </a:solidFill>
-          <a:ln>
-            <a:noFill/>
-          </a:ln>
-        </p:spPr>
-        <p:txBody>
-          <a:bodyPr wrap="square" anchor="ctr" lIns="45720" rIns="45720">
-            <a:noAutofit/>
-          </a:bodyPr>
-          <a:lstStyle/>
-          <a:p>
-            <a:pPr algn="ctr"/>
-            <a:r>
-              <a:rPr lang="es-ES" sz="1000" b="1" dirty="0">
-                <a:solidFill>
-                  <a:srgbClr val="2F2B28"/>
-                </a:solidFill>
-              </a:rPr>
-              <a:t/>
-            </a:r>
-          </a:p>
-        </p:txBody>
-      </p:sp>
-      <p:sp>
-        <p:nvSpPr>
-          <p:cNvPr id="218" name="Texto 218"/>
-          <p:cNvSpPr txBox="1"/>
-          <p:nvPr/>
-        </p:nvSpPr>
-        <p:spPr>
-          <a:xfrm>
-            <a:off x="7305280" y="2890000"/>
-            <a:ext cx="2018560" cy="2340000"/>
-          </a:xfrm>
-          <a:prstGeom prst="rect">
-            <a:avLst/>
-          </a:prstGeom>
-          <a:noFill/>
-        </p:spPr>
-        <p:txBody>
-          <a:bodyPr wrap="square" anchor="t" lIns="45720" rIns="45720">
-            <a:noAutofit/>
-          </a:bodyPr>
-          <a:lstStyle/>
-          <a:p>
-            <a:pPr algn="l"/>
-            <a:r>
-              <a:rPr lang="es-ES" sz="1300" dirty="0">
-                <a:solidFill>
-                  <a:srgbClr val="2F2B28"/>
-                </a:solidFill>
-              </a:rPr>
-              <a:t>Annual mandate. Preparing sessions, reviewing the quarterly pack, logged recommendations and independent assessments.</a:t>
-            </a:r>
-          </a:p>
-        </p:txBody>
-      </p:sp>
-      <p:sp>
-        <p:nvSpPr>
-          <p:cNvPr id="219" name="Caja 219"/>
-          <p:cNvSpPr/>
-          <p:nvPr/>
-        </p:nvSpPr>
-        <p:spPr>
-          <a:xfrm>
-            <a:off x="9483840" y="2050000"/>
-            <a:ext cx="2098560" cy="800000"/>
-          </a:xfrm>
-          <a:prstGeom prst="roundRect">
-            <a:avLst>
-              <a:gd name="adj" fmla="val 6000"/>
-            </a:avLst>
-          </a:prstGeom>
-          <a:solidFill>
-            <a:srgbClr val="0D7680"/>
-          </a:solidFill>
-          <a:ln>
-            <a:noFill/>
-          </a:ln>
-        </p:spPr>
-        <p:txBody>
-          <a:bodyPr wrap="square" anchor="ctr" lIns="45720" rIns="45720">
-            <a:noAutofit/>
-          </a:bodyPr>
-          <a:lstStyle/>
-          <a:p>
-            <a:pPr algn="ctr"/>
-            <a:r>
-              <a:rPr lang="es-ES" sz="1700" b="1" dirty="0">
-                <a:solidFill>
-                  <a:srgbClr val="FFFFFF"/>
-                </a:solidFill>
-              </a:rPr>
-              <a:t>M5 · Ongoing support</a:t>
-            </a:r>
-          </a:p>
-        </p:txBody>
-      </p:sp>
-      <p:sp>
-        <p:nvSpPr>
-          <p:cNvPr id="220" name="Caja 220"/>
-          <p:cNvSpPr/>
-          <p:nvPr/>
-        </p:nvSpPr>
-        <p:spPr>
-          <a:xfrm>
-            <a:off x="9483840" y="2790000"/>
-            <a:ext cx="2098560" cy="2500000"/>
-          </a:xfrm>
-          <a:prstGeom prst="roundRect">
-            <a:avLst>
-              <a:gd name="adj" fmla="val 6000"/>
-            </a:avLst>
-          </a:prstGeom>
-          <a:solidFill>
-            <a:srgbClr val="F3CFB2"/>
-          </a:solidFill>
-          <a:ln>
-            <a:noFill/>
-          </a:ln>
-        </p:spPr>
-        <p:txBody>
-          <a:bodyPr wrap="square" anchor="ctr" lIns="45720" rIns="45720">
-            <a:noAutofit/>
-          </a:bodyPr>
-          <a:lstStyle/>
-          <a:p>
-            <a:pPr algn="ctr"/>
-            <a:r>
-              <a:rPr lang="es-ES" sz="1000" b="1" dirty="0">
-                <a:solidFill>
-                  <a:srgbClr val="2F2B28"/>
-                </a:solidFill>
-              </a:rPr>
-              <a:t/>
-            </a:r>
-          </a:p>
-        </p:txBody>
-      </p:sp>
-      <p:sp>
-        <p:nvSpPr>
-          <p:cNvPr id="221" name="Texto 221"/>
-          <p:cNvSpPr txBox="1"/>
-          <p:nvPr/>
-        </p:nvSpPr>
-        <p:spPr>
-          <a:xfrm>
-            <a:off x="9523840" y="2890000"/>
-            <a:ext cx="2018560" cy="2340000"/>
-          </a:xfrm>
-          <a:prstGeom prst="rect">
-            <a:avLst/>
-          </a:prstGeom>
-          <a:noFill/>
-        </p:spPr>
-        <p:txBody>
-          <a:bodyPr wrap="square" anchor="t" lIns="45720" rIns="45720">
-            <a:noAutofit/>
-          </a:bodyPr>
-          <a:lstStyle/>
-          <a:p>
-            <a:pPr algn="l"/>
-            <a:r>
-              <a:rPr lang="es-ES" sz="1300" dirty="0">
-                <a:solidFill>
-                  <a:srgbClr val="2F2B28"/>
-                </a:solidFill>
-              </a:rPr>
-              <a:t>Support to the AI office: register, funnel metrics and packs, always with a transfer plan and an exit date (P71).</a:t>
-            </a:r>
-          </a:p>
-        </p:txBody>
-      </p:sp>
-      <p:sp>
-        <p:nvSpPr>
-          <p:cNvPr id="222" name="Texto 222"/>
-          <p:cNvSpPr txBox="1"/>
-          <p:nvPr/>
-        </p:nvSpPr>
-        <p:spPr>
-          <a:xfrm>
-            <a:off x="609600" y="6150000"/>
-            <a:ext cx="10972800" cy="500000"/>
-          </a:xfrm>
-          <a:prstGeom prst="rect">
-            <a:avLst/>
-          </a:prstGeom>
-          <a:noFill/>
-        </p:spPr>
-        <p:txBody>
-          <a:bodyPr wrap="square" anchor="t" lIns="45720" rIns="45720">
-            <a:noAutofit/>
-          </a:bodyPr>
-          <a:lstStyle/>
-          <a:p>
-            <a:pPr algn="l"/>
-            <a:r>
               <a:rPr lang="es-ES" sz="1400" b="1" dirty="0">
                 <a:solidFill>
                   <a:srgbClr val="0F5499"/>
                 </a:solidFill>
               </a:rPr>
-              <a:t>In all of them the company decides; you prepare, propose, verify or advise.</a:t>
+              <a:t>If you drop any, your service may be inspired by SEVEN-G, but must not be presented as an application of SEVEN-G.</a:t>
             </a:r>
           </a:p>
         </p:txBody>
@@ -6017,7 +5570,7 @@
       </p:grpSpPr>
       <p:sp>
         <p:nvSpPr>
-          <p:cNvPr id="229" name="Marca"/>
+          <p:cNvPr id="230" name="Marca"/>
           <p:cNvSpPr/>
           <p:nvPr/>
         </p:nvSpPr>
@@ -6041,7 +5594,7 @@
       </p:sp>
       <p:sp>
         <p:nvSpPr>
-          <p:cNvPr id="230" name="Texto 230"/>
+          <p:cNvPr id="231" name="Texto 231"/>
           <p:cNvSpPr txBox="1"/>
           <p:nvPr/>
         </p:nvSpPr>
@@ -6075,7 +5628,7 @@
       </p:sp>
       <p:sp>
         <p:nvSpPr>
-          <p:cNvPr id="231" name="Texto 231"/>
+          <p:cNvPr id="232" name="Texto 232"/>
           <p:cNvSpPr txBox="1"/>
           <p:nvPr/>
         </p:nvSpPr>
@@ -6102,130 +5655,587 @@
                   <a:srgbClr val="990F3D"/>
                 </a:solidFill>
               </a:rPr>
-              <a:t>Independence: whoever implements does not audit</a:t>
-            </a:r>
-          </a:p>
-        </p:txBody>
-      </p:sp>
-      <p:sp>
-        <p:nvSpPr>
-          <p:cNvPr id="227" name="Texto 227"/>
-          <p:cNvSpPr txBox="1"/>
-          <p:nvPr/>
-        </p:nvSpPr>
-        <p:spPr>
-          <a:xfrm>
-            <a:off x="609600" y="1750000"/>
-            <a:ext cx="10972800" cy="4400000"/>
-          </a:xfrm>
-          <a:prstGeom prst="rect">
-            <a:avLst/>
-          </a:prstGeom>
-          <a:noFill/>
-        </p:spPr>
-        <p:txBody>
-          <a:bodyPr wrap="square" anchor="t" lIns="45720" rIns="45720">
-            <a:noAutofit/>
-          </a:bodyPr>
-          <a:lstStyle/>
-          <a:p>
-            <a:pPr marL="285750" indent="-285750">
-              <a:spcAft>
-                <a:spcPts val="400"/>
-              </a:spcAft>
-              <a:buClr>
-                <a:srgbClr val="990F3D"/>
-              </a:buClr>
-              <a:buFont typeface="Arial"/>
-              <a:buChar char="•"/>
-            </a:pPr>
-            <a:r>
-              <a:rPr lang="es-ES" sz="1800" dirty="0">
-                <a:solidFill>
-                  <a:srgbClr val="2F2B28"/>
-                </a:solidFill>
-              </a:rPr>
-              <a:t>You cannot independently verify, audit or assess what you, your firm or a related entity designed, implemented or operated.</a:t>
-            </a:r>
-          </a:p>
-          <a:p>
-            <a:pPr marL="285750" indent="-285750">
-              <a:spcAft>
-                <a:spcPts val="400"/>
-              </a:spcAft>
-              <a:buClr>
-                <a:srgbClr val="990F3D"/>
-              </a:buClr>
-              <a:buFont typeface="Arial"/>
-              <a:buChar char="•"/>
-            </a:pPr>
-            <a:r>
-              <a:rPr lang="es-ES" sz="1800" dirty="0">
-                <a:solidFill>
-                  <a:srgbClr val="2F2B28"/>
-                </a:solidFill>
-              </a:rPr>
-              <a:t>Implementation (M2) and audit (M3) are incompatible for the same scope; neither is advising the board (M4) on what you operate (M5).</a:t>
-            </a:r>
-          </a:p>
-          <a:p>
-            <a:pPr marL="285750" indent="-285750">
-              <a:spcAft>
-                <a:spcPts val="400"/>
-              </a:spcAft>
-              <a:buClr>
-                <a:srgbClr val="990F3D"/>
-              </a:buClr>
-              <a:buFont typeface="Arial"/>
-              <a:buChar char="•"/>
-            </a:pPr>
-            <a:r>
-              <a:rPr lang="es-ES" sz="1800" dirty="0">
-                <a:solidFill>
-                  <a:srgbClr val="2F2B28"/>
-                </a:solidFill>
-              </a:rPr>
-              <a:t>After an incompatible service, let at least one full annual cycle pass before auditing that scope.</a:t>
-            </a:r>
-          </a:p>
-          <a:p>
-            <a:pPr marL="285750" indent="-285750">
-              <a:spcAft>
-                <a:spcPts val="400"/>
-              </a:spcAft>
-              <a:buClr>
-                <a:srgbClr val="990F3D"/>
-              </a:buClr>
-              <a:buFont typeface="Arial"/>
-              <a:buChar char="•"/>
-            </a:pPr>
-            <a:r>
-              <a:rPr lang="es-ES" sz="1800" dirty="0">
-                <a:solidFill>
-                  <a:srgbClr val="2F2B28"/>
-                </a:solidFill>
-              </a:rPr>
-              <a:t>Declare in writing your relationships with technology vendors, your own tools and your fee scheme (P41).</a:t>
-            </a:r>
-          </a:p>
-          <a:p>
-            <a:pPr marL="285750" indent="-285750">
-              <a:spcAft>
-                <a:spcPts val="400"/>
-              </a:spcAft>
-              <a:buClr>
-                <a:srgbClr val="990F3D"/>
-              </a:buClr>
-              <a:buFont typeface="Arial"/>
-              <a:buChar char="•"/>
-            </a:pPr>
-            <a:r>
-              <a:rPr lang="es-ES" sz="1800" dirty="0">
-                <a:solidFill>
-                  <a:srgbClr val="2F2B28"/>
-                </a:solidFill>
-              </a:rPr>
-              <a:t>Value-linked fees: only on value validated by finance or by an audit that is not yours.</a:t>
+              <a:t>Five engagement models</a:t>
+            </a:r>
+          </a:p>
+        </p:txBody>
+      </p:sp>
+      <p:sp>
+        <p:nvSpPr>
+          <p:cNvPr id="233" name="Texto 233"/>
+          <p:cNvSpPr txBox="1"/>
+          <p:nvPr/>
+        </p:nvSpPr>
+        <p:spPr>
+          <a:xfrm>
+            <a:off x="609600" y="1330000"/>
+            <a:ext cx="10972800" cy="450000"/>
+          </a:xfrm>
+          <a:prstGeom prst="rect">
+            <a:avLst/>
+          </a:prstGeom>
+          <a:noFill/>
+        </p:spPr>
+        <p:txBody>
+          <a:bodyPr wrap="square" anchor="t" lIns="45720" rIns="45720">
+            <a:noAutofit/>
+          </a:bodyPr>
+          <a:lstStyle/>
+          <a:p>
+            <a:pPr algn="l"/>
+            <a:r>
+              <a:rPr lang="es-ES" sz="1500" dirty="0">
+                <a:solidFill>
+                  <a:srgbClr val="564D47"/>
+                </a:solidFill>
+              </a:rPr>
+              <a:t>What each one delivers; durations are indicative</a:t>
+            </a:r>
+          </a:p>
+        </p:txBody>
+      </p:sp>
+      <p:sp>
+        <p:nvSpPr>
+          <p:cNvPr id="214" name="Caja 214"/>
+          <p:cNvSpPr/>
+          <p:nvPr/>
+        </p:nvSpPr>
+        <p:spPr>
+          <a:xfrm>
+            <a:off x="609600" y="2050000"/>
+            <a:ext cx="2098560" cy="800000"/>
+          </a:xfrm>
+          <a:prstGeom prst="roundRect">
+            <a:avLst>
+              <a:gd name="adj" fmla="val 6000"/>
+            </a:avLst>
+          </a:prstGeom>
+          <a:solidFill>
+            <a:srgbClr val="0F5499"/>
+          </a:solidFill>
+          <a:ln>
+            <a:noFill/>
+          </a:ln>
+        </p:spPr>
+        <p:txBody>
+          <a:bodyPr wrap="square" anchor="ctr" lIns="45720" rIns="45720">
+            <a:noAutofit/>
+          </a:bodyPr>
+          <a:lstStyle/>
+          <a:p>
+            <a:pPr algn="ctr"/>
+            <a:r>
+              <a:rPr lang="es-ES" sz="1700" b="1" dirty="0">
+                <a:solidFill>
+                  <a:srgbClr val="FFFFFF"/>
+                </a:solidFill>
+              </a:rPr>
+              <a:t>M1 · Diagnosis</a:t>
+            </a:r>
+          </a:p>
+        </p:txBody>
+      </p:sp>
+      <p:sp>
+        <p:nvSpPr>
+          <p:cNvPr id="215" name="Caja 215"/>
+          <p:cNvSpPr/>
+          <p:nvPr/>
+        </p:nvSpPr>
+        <p:spPr>
+          <a:xfrm>
+            <a:off x="609600" y="2790000"/>
+            <a:ext cx="2098560" cy="2500000"/>
+          </a:xfrm>
+          <a:prstGeom prst="roundRect">
+            <a:avLst>
+              <a:gd name="adj" fmla="val 6000"/>
+            </a:avLst>
+          </a:prstGeom>
+          <a:solidFill>
+            <a:srgbClr val="F3CFB2"/>
+          </a:solidFill>
+          <a:ln>
+            <a:noFill/>
+          </a:ln>
+        </p:spPr>
+        <p:txBody>
+          <a:bodyPr wrap="square" anchor="ctr" lIns="45720" rIns="45720">
+            <a:noAutofit/>
+          </a:bodyPr>
+          <a:lstStyle/>
+          <a:p>
+            <a:pPr algn="ctr"/>
+            <a:r>
+              <a:rPr lang="es-ES" sz="1000" b="1" dirty="0">
+                <a:solidFill>
+                  <a:srgbClr val="2F2B28"/>
+                </a:solidFill>
+              </a:rPr>
+              <a:t/>
+            </a:r>
+          </a:p>
+        </p:txBody>
+      </p:sp>
+      <p:sp>
+        <p:nvSpPr>
+          <p:cNvPr id="216" name="Texto 216"/>
+          <p:cNvSpPr txBox="1"/>
+          <p:nvPr/>
+        </p:nvSpPr>
+        <p:spPr>
+          <a:xfrm>
+            <a:off x="649600" y="2890000"/>
+            <a:ext cx="2018560" cy="2340000"/>
+          </a:xfrm>
+          <a:prstGeom prst="rect">
+            <a:avLst/>
+          </a:prstGeom>
+          <a:noFill/>
+        </p:spPr>
+        <p:txBody>
+          <a:bodyPr wrap="square" anchor="t" lIns="45720" rIns="45720">
+            <a:noAutofit/>
+          </a:bodyPr>
+          <a:lstStyle/>
+          <a:p>
+            <a:pPr algn="l"/>
+            <a:r>
+              <a:rPr lang="es-ES" sz="1300" dirty="0">
+                <a:solidFill>
+                  <a:srgbClr val="2F2B28"/>
+                </a:solidFill>
+              </a:rPr>
+              <a:t>4 to 6 weeks. Inventory, evidence-based maturity (T15), transformation index (T14), current value and cost. C1 report (P33).</a:t>
+            </a:r>
+          </a:p>
+        </p:txBody>
+      </p:sp>
+      <p:sp>
+        <p:nvSpPr>
+          <p:cNvPr id="217" name="Caja 217"/>
+          <p:cNvSpPr/>
+          <p:nvPr/>
+        </p:nvSpPr>
+        <p:spPr>
+          <a:xfrm>
+            <a:off x="2828160" y="2050000"/>
+            <a:ext cx="2098560" cy="800000"/>
+          </a:xfrm>
+          <a:prstGeom prst="roundRect">
+            <a:avLst>
+              <a:gd name="adj" fmla="val 6000"/>
+            </a:avLst>
+          </a:prstGeom>
+          <a:solidFill>
+            <a:srgbClr val="593380"/>
+          </a:solidFill>
+          <a:ln>
+            <a:noFill/>
+          </a:ln>
+        </p:spPr>
+        <p:txBody>
+          <a:bodyPr wrap="square" anchor="ctr" lIns="45720" rIns="45720">
+            <a:noAutofit/>
+          </a:bodyPr>
+          <a:lstStyle/>
+          <a:p>
+            <a:pPr algn="ctr"/>
+            <a:r>
+              <a:rPr lang="es-ES" sz="1700" b="1" dirty="0">
+                <a:solidFill>
+                  <a:srgbClr val="FFFFFF"/>
+                </a:solidFill>
+              </a:rPr>
+              <a:t>M2 · Implementation</a:t>
+            </a:r>
+          </a:p>
+        </p:txBody>
+      </p:sp>
+      <p:sp>
+        <p:nvSpPr>
+          <p:cNvPr id="218" name="Caja 218"/>
+          <p:cNvSpPr/>
+          <p:nvPr/>
+        </p:nvSpPr>
+        <p:spPr>
+          <a:xfrm>
+            <a:off x="2828160" y="2790000"/>
+            <a:ext cx="2098560" cy="2500000"/>
+          </a:xfrm>
+          <a:prstGeom prst="roundRect">
+            <a:avLst>
+              <a:gd name="adj" fmla="val 6000"/>
+            </a:avLst>
+          </a:prstGeom>
+          <a:solidFill>
+            <a:srgbClr val="F3CFB2"/>
+          </a:solidFill>
+          <a:ln>
+            <a:noFill/>
+          </a:ln>
+        </p:spPr>
+        <p:txBody>
+          <a:bodyPr wrap="square" anchor="ctr" lIns="45720" rIns="45720">
+            <a:noAutofit/>
+          </a:bodyPr>
+          <a:lstStyle/>
+          <a:p>
+            <a:pPr algn="ctr"/>
+            <a:r>
+              <a:rPr lang="es-ES" sz="1000" b="1" dirty="0">
+                <a:solidFill>
+                  <a:srgbClr val="2F2B28"/>
+                </a:solidFill>
+              </a:rPr>
+              <a:t/>
+            </a:r>
+          </a:p>
+        </p:txBody>
+      </p:sp>
+      <p:sp>
+        <p:nvSpPr>
+          <p:cNvPr id="219" name="Texto 219"/>
+          <p:cNvSpPr txBox="1"/>
+          <p:nvPr/>
+        </p:nvSpPr>
+        <p:spPr>
+          <a:xfrm>
+            <a:off x="2868160" y="2890000"/>
+            <a:ext cx="2018560" cy="2340000"/>
+          </a:xfrm>
+          <a:prstGeom prst="rect">
+            <a:avLst/>
+          </a:prstGeom>
+          <a:noFill/>
+        </p:spPr>
+        <p:txBody>
+          <a:bodyPr wrap="square" anchor="t" lIns="45720" rIns="45720">
+            <a:noAutofit/>
+          </a:bodyPr>
+          <a:lstStyle/>
+          <a:p>
+            <a:pPr algn="l"/>
+            <a:r>
+              <a:rPr lang="es-ES" sz="1300" dirty="0">
+                <a:solidFill>
+                  <a:srgbClr val="2F2B28"/>
+                </a:solidFill>
+              </a:rPr>
+              <a:t>90 days. Thesis and risk appetite, governance, portfolio, T01 register and dashboard with real data, and the first board pack.</a:t>
+            </a:r>
+          </a:p>
+        </p:txBody>
+      </p:sp>
+      <p:sp>
+        <p:nvSpPr>
+          <p:cNvPr id="220" name="Caja 220"/>
+          <p:cNvSpPr/>
+          <p:nvPr/>
+        </p:nvSpPr>
+        <p:spPr>
+          <a:xfrm>
+            <a:off x="5046720" y="2050000"/>
+            <a:ext cx="2098560" cy="800000"/>
+          </a:xfrm>
+          <a:prstGeom prst="roundRect">
+            <a:avLst>
+              <a:gd name="adj" fmla="val 6000"/>
+            </a:avLst>
+          </a:prstGeom>
+          <a:solidFill>
+            <a:srgbClr val="990F3D"/>
+          </a:solidFill>
+          <a:ln>
+            <a:noFill/>
+          </a:ln>
+        </p:spPr>
+        <p:txBody>
+          <a:bodyPr wrap="square" anchor="ctr" lIns="45720" rIns="45720">
+            <a:noAutofit/>
+          </a:bodyPr>
+          <a:lstStyle/>
+          <a:p>
+            <a:pPr algn="ctr"/>
+            <a:r>
+              <a:rPr lang="es-ES" sz="1700" b="1" dirty="0">
+                <a:solidFill>
+                  <a:srgbClr val="FFFFFF"/>
+                </a:solidFill>
+              </a:rPr>
+              <a:t>M3 · Audit</a:t>
+            </a:r>
+          </a:p>
+        </p:txBody>
+      </p:sp>
+      <p:sp>
+        <p:nvSpPr>
+          <p:cNvPr id="221" name="Caja 221"/>
+          <p:cNvSpPr/>
+          <p:nvPr/>
+        </p:nvSpPr>
+        <p:spPr>
+          <a:xfrm>
+            <a:off x="5046720" y="2790000"/>
+            <a:ext cx="2098560" cy="2500000"/>
+          </a:xfrm>
+          <a:prstGeom prst="roundRect">
+            <a:avLst>
+              <a:gd name="adj" fmla="val 6000"/>
+            </a:avLst>
+          </a:prstGeom>
+          <a:solidFill>
+            <a:srgbClr val="F3CFB2"/>
+          </a:solidFill>
+          <a:ln>
+            <a:noFill/>
+          </a:ln>
+        </p:spPr>
+        <p:txBody>
+          <a:bodyPr wrap="square" anchor="ctr" lIns="45720" rIns="45720">
+            <a:noAutofit/>
+          </a:bodyPr>
+          <a:lstStyle/>
+          <a:p>
+            <a:pPr algn="ctr"/>
+            <a:r>
+              <a:rPr lang="es-ES" sz="1000" b="1" dirty="0">
+                <a:solidFill>
+                  <a:srgbClr val="2F2B28"/>
+                </a:solidFill>
+              </a:rPr>
+              <a:t/>
+            </a:r>
+          </a:p>
+        </p:txBody>
+      </p:sp>
+      <p:sp>
+        <p:nvSpPr>
+          <p:cNvPr id="222" name="Texto 222"/>
+          <p:cNvSpPr txBox="1"/>
+          <p:nvPr/>
+        </p:nvSpPr>
+        <p:spPr>
+          <a:xfrm>
+            <a:off x="5086720" y="2890000"/>
+            <a:ext cx="2018560" cy="2340000"/>
+          </a:xfrm>
+          <a:prstGeom prst="rect">
+            <a:avLst/>
+          </a:prstGeom>
+          <a:noFill/>
+        </p:spPr>
+        <p:txBody>
+          <a:bodyPr wrap="square" anchor="t" lIns="45720" rIns="45720">
+            <a:noAutofit/>
+          </a:bodyPr>
+          <a:lstStyle/>
+          <a:p>
+            <a:pPr algn="l"/>
+            <a:r>
+              <a:rPr lang="es-ES" sz="1300" dirty="0">
+                <a:solidFill>
+                  <a:srgbClr val="2F2B28"/>
+                </a:solidFill>
+              </a:rPr>
+              <a:t>Independent opinion: Compliant, Compliant with observations or Non-compliant. Plan, working papers and report (P58, P59, P60).</a:t>
+            </a:r>
+          </a:p>
+        </p:txBody>
+      </p:sp>
+      <p:sp>
+        <p:nvSpPr>
+          <p:cNvPr id="223" name="Caja 223"/>
+          <p:cNvSpPr/>
+          <p:nvPr/>
+        </p:nvSpPr>
+        <p:spPr>
+          <a:xfrm>
+            <a:off x="7265280" y="2050000"/>
+            <a:ext cx="2098560" cy="800000"/>
+          </a:xfrm>
+          <a:prstGeom prst="roundRect">
+            <a:avLst>
+              <a:gd name="adj" fmla="val 6000"/>
+            </a:avLst>
+          </a:prstGeom>
+          <a:solidFill>
+            <a:srgbClr val="A5822A"/>
+          </a:solidFill>
+          <a:ln>
+            <a:noFill/>
+          </a:ln>
+        </p:spPr>
+        <p:txBody>
+          <a:bodyPr wrap="square" anchor="ctr" lIns="45720" rIns="45720">
+            <a:noAutofit/>
+          </a:bodyPr>
+          <a:lstStyle/>
+          <a:p>
+            <a:pPr algn="ctr"/>
+            <a:r>
+              <a:rPr lang="es-ES" sz="1700" b="1" dirty="0">
+                <a:solidFill>
+                  <a:srgbClr val="FFFFFF"/>
+                </a:solidFill>
+              </a:rPr>
+              <a:t>M4 · Board advisory</a:t>
+            </a:r>
+          </a:p>
+        </p:txBody>
+      </p:sp>
+      <p:sp>
+        <p:nvSpPr>
+          <p:cNvPr id="224" name="Caja 224"/>
+          <p:cNvSpPr/>
+          <p:nvPr/>
+        </p:nvSpPr>
+        <p:spPr>
+          <a:xfrm>
+            <a:off x="7265280" y="2790000"/>
+            <a:ext cx="2098560" cy="2500000"/>
+          </a:xfrm>
+          <a:prstGeom prst="roundRect">
+            <a:avLst>
+              <a:gd name="adj" fmla="val 6000"/>
+            </a:avLst>
+          </a:prstGeom>
+          <a:solidFill>
+            <a:srgbClr val="F3CFB2"/>
+          </a:solidFill>
+          <a:ln>
+            <a:noFill/>
+          </a:ln>
+        </p:spPr>
+        <p:txBody>
+          <a:bodyPr wrap="square" anchor="ctr" lIns="45720" rIns="45720">
+            <a:noAutofit/>
+          </a:bodyPr>
+          <a:lstStyle/>
+          <a:p>
+            <a:pPr algn="ctr"/>
+            <a:r>
+              <a:rPr lang="es-ES" sz="1000" b="1" dirty="0">
+                <a:solidFill>
+                  <a:srgbClr val="2F2B28"/>
+                </a:solidFill>
+              </a:rPr>
+              <a:t/>
+            </a:r>
+          </a:p>
+        </p:txBody>
+      </p:sp>
+      <p:sp>
+        <p:nvSpPr>
+          <p:cNvPr id="225" name="Texto 225"/>
+          <p:cNvSpPr txBox="1"/>
+          <p:nvPr/>
+        </p:nvSpPr>
+        <p:spPr>
+          <a:xfrm>
+            <a:off x="7305280" y="2890000"/>
+            <a:ext cx="2018560" cy="2340000"/>
+          </a:xfrm>
+          <a:prstGeom prst="rect">
+            <a:avLst/>
+          </a:prstGeom>
+          <a:noFill/>
+        </p:spPr>
+        <p:txBody>
+          <a:bodyPr wrap="square" anchor="t" lIns="45720" rIns="45720">
+            <a:noAutofit/>
+          </a:bodyPr>
+          <a:lstStyle/>
+          <a:p>
+            <a:pPr algn="l"/>
+            <a:r>
+              <a:rPr lang="es-ES" sz="1300" dirty="0">
+                <a:solidFill>
+                  <a:srgbClr val="2F2B28"/>
+                </a:solidFill>
+              </a:rPr>
+              <a:t>Annual mandate. Preparing sessions, reviewing the quarterly pack, logged recommendations and independent assessments.</a:t>
+            </a:r>
+          </a:p>
+        </p:txBody>
+      </p:sp>
+      <p:sp>
+        <p:nvSpPr>
+          <p:cNvPr id="226" name="Caja 226"/>
+          <p:cNvSpPr/>
+          <p:nvPr/>
+        </p:nvSpPr>
+        <p:spPr>
+          <a:xfrm>
+            <a:off x="9483840" y="2050000"/>
+            <a:ext cx="2098560" cy="800000"/>
+          </a:xfrm>
+          <a:prstGeom prst="roundRect">
+            <a:avLst>
+              <a:gd name="adj" fmla="val 6000"/>
+            </a:avLst>
+          </a:prstGeom>
+          <a:solidFill>
+            <a:srgbClr val="0D7680"/>
+          </a:solidFill>
+          <a:ln>
+            <a:noFill/>
+          </a:ln>
+        </p:spPr>
+        <p:txBody>
+          <a:bodyPr wrap="square" anchor="ctr" lIns="45720" rIns="45720">
+            <a:noAutofit/>
+          </a:bodyPr>
+          <a:lstStyle/>
+          <a:p>
+            <a:pPr algn="ctr"/>
+            <a:r>
+              <a:rPr lang="es-ES" sz="1700" b="1" dirty="0">
+                <a:solidFill>
+                  <a:srgbClr val="FFFFFF"/>
+                </a:solidFill>
+              </a:rPr>
+              <a:t>M5 · Ongoing support</a:t>
+            </a:r>
+          </a:p>
+        </p:txBody>
+      </p:sp>
+      <p:sp>
+        <p:nvSpPr>
+          <p:cNvPr id="227" name="Caja 227"/>
+          <p:cNvSpPr/>
+          <p:nvPr/>
+        </p:nvSpPr>
+        <p:spPr>
+          <a:xfrm>
+            <a:off x="9483840" y="2790000"/>
+            <a:ext cx="2098560" cy="2500000"/>
+          </a:xfrm>
+          <a:prstGeom prst="roundRect">
+            <a:avLst>
+              <a:gd name="adj" fmla="val 6000"/>
+            </a:avLst>
+          </a:prstGeom>
+          <a:solidFill>
+            <a:srgbClr val="F3CFB2"/>
+          </a:solidFill>
+          <a:ln>
+            <a:noFill/>
+          </a:ln>
+        </p:spPr>
+        <p:txBody>
+          <a:bodyPr wrap="square" anchor="ctr" lIns="45720" rIns="45720">
+            <a:noAutofit/>
+          </a:bodyPr>
+          <a:lstStyle/>
+          <a:p>
+            <a:pPr algn="ctr"/>
+            <a:r>
+              <a:rPr lang="es-ES" sz="1000" b="1" dirty="0">
+                <a:solidFill>
+                  <a:srgbClr val="2F2B28"/>
+                </a:solidFill>
+              </a:rPr>
+              <a:t/>
             </a:r>
           </a:p>
         </p:txBody>
@@ -6238,8 +6248,8 @@
         </p:nvSpPr>
         <p:spPr>
           <a:xfrm>
-            <a:off x="609600" y="6250000"/>
-            <a:ext cx="10972800" cy="450000"/>
+            <a:off x="9523840" y="2890000"/>
+            <a:ext cx="2018560" cy="2340000"/>
           </a:xfrm>
           <a:prstGeom prst="rect">
             <a:avLst/>
@@ -6254,12 +6264,46 @@
           <a:p>
             <a:pPr algn="l"/>
             <a:r>
+              <a:rPr lang="es-ES" sz="1300" dirty="0">
+                <a:solidFill>
+                  <a:srgbClr val="2F2B28"/>
+                </a:solidFill>
+              </a:rPr>
+              <a:t>Support to the AI office: register, funnel metrics and packs, always with a transfer plan and an exit date (P71).</a:t>
+            </a:r>
+          </a:p>
+        </p:txBody>
+      </p:sp>
+      <p:sp>
+        <p:nvSpPr>
+          <p:cNvPr id="229" name="Texto 229"/>
+          <p:cNvSpPr txBox="1"/>
+          <p:nvPr/>
+        </p:nvSpPr>
+        <p:spPr>
+          <a:xfrm>
+            <a:off x="609600" y="6150000"/>
+            <a:ext cx="10972800" cy="500000"/>
+          </a:xfrm>
+          <a:prstGeom prst="rect">
+            <a:avLst/>
+          </a:prstGeom>
+          <a:noFill/>
+        </p:spPr>
+        <p:txBody>
+          <a:bodyPr wrap="square" anchor="t" lIns="45720" rIns="45720">
+            <a:noAutofit/>
+          </a:bodyPr>
+          <a:lstStyle/>
+          <a:p>
+            <a:pPr algn="l"/>
+            <a:r>
               <a:rPr lang="es-ES" sz="1400" b="1" dirty="0">
                 <a:solidFill>
                   <a:srgbClr val="0F5499"/>
                 </a:solidFill>
               </a:rPr>
-              <a:t>Document 91, section 5.</a:t>
+              <a:t>In all of them the company decides; you prepare, propose, verify or advise.</a:t>
             </a:r>
           </a:p>
         </p:txBody>
@@ -6299,7 +6343,7 @@
       </p:grpSpPr>
       <p:sp>
         <p:nvSpPr>
-          <p:cNvPr id="242" name="Marca"/>
+          <p:cNvPr id="236" name="Marca"/>
           <p:cNvSpPr/>
           <p:nvPr/>
         </p:nvSpPr>
@@ -6323,7 +6367,7 @@
       </p:sp>
       <p:sp>
         <p:nvSpPr>
-          <p:cNvPr id="243" name="Texto 243"/>
+          <p:cNvPr id="237" name="Texto 237"/>
           <p:cNvSpPr txBox="1"/>
           <p:nvPr/>
         </p:nvSpPr>
@@ -6357,7 +6401,7 @@
       </p:sp>
       <p:sp>
         <p:nvSpPr>
-          <p:cNvPr id="244" name="Texto 244"/>
+          <p:cNvPr id="238" name="Texto 238"/>
           <p:cNvSpPr txBox="1"/>
           <p:nvPr/>
         </p:nvSpPr>
@@ -6384,20 +6428,143 @@
                   <a:srgbClr val="990F3D"/>
                 </a:solidFill>
               </a:rPr>
-              <a:t>What you can and cannot say</a:t>
-            </a:r>
-          </a:p>
-        </p:txBody>
-      </p:sp>
-      <p:sp>
-        <p:nvSpPr>
-          <p:cNvPr id="245" name="Texto 245"/>
-          <p:cNvSpPr txBox="1"/>
-          <p:nvPr/>
-        </p:nvSpPr>
-        <p:spPr>
-          <a:xfrm>
-            <a:off x="609600" y="1330000"/>
+              <a:t>Independence: whoever implements does not audit</a:t>
+            </a:r>
+          </a:p>
+        </p:txBody>
+      </p:sp>
+      <p:sp>
+        <p:nvSpPr>
+          <p:cNvPr id="234" name="Texto 234"/>
+          <p:cNvSpPr txBox="1"/>
+          <p:nvPr/>
+        </p:nvSpPr>
+        <p:spPr>
+          <a:xfrm>
+            <a:off x="609600" y="1750000"/>
+            <a:ext cx="10972800" cy="4400000"/>
+          </a:xfrm>
+          <a:prstGeom prst="rect">
+            <a:avLst/>
+          </a:prstGeom>
+          <a:noFill/>
+        </p:spPr>
+        <p:txBody>
+          <a:bodyPr wrap="square" anchor="t" lIns="45720" rIns="45720">
+            <a:noAutofit/>
+          </a:bodyPr>
+          <a:lstStyle/>
+          <a:p>
+            <a:pPr marL="285750" indent="-285750">
+              <a:spcAft>
+                <a:spcPts val="400"/>
+              </a:spcAft>
+              <a:buClr>
+                <a:srgbClr val="990F3D"/>
+              </a:buClr>
+              <a:buFont typeface="Arial"/>
+              <a:buChar char="•"/>
+            </a:pPr>
+            <a:r>
+              <a:rPr lang="es-ES" sz="1800" dirty="0">
+                <a:solidFill>
+                  <a:srgbClr val="2F2B28"/>
+                </a:solidFill>
+              </a:rPr>
+              <a:t>You cannot independently verify, audit or assess what you, your firm or a related entity designed, implemented or operated.</a:t>
+            </a:r>
+          </a:p>
+          <a:p>
+            <a:pPr marL="285750" indent="-285750">
+              <a:spcAft>
+                <a:spcPts val="400"/>
+              </a:spcAft>
+              <a:buClr>
+                <a:srgbClr val="990F3D"/>
+              </a:buClr>
+              <a:buFont typeface="Arial"/>
+              <a:buChar char="•"/>
+            </a:pPr>
+            <a:r>
+              <a:rPr lang="es-ES" sz="1800" dirty="0">
+                <a:solidFill>
+                  <a:srgbClr val="2F2B28"/>
+                </a:solidFill>
+              </a:rPr>
+              <a:t>Implementation (M2) and audit (M3) are incompatible for the same scope; neither is advising the board (M4) on what you operate (M5).</a:t>
+            </a:r>
+          </a:p>
+          <a:p>
+            <a:pPr marL="285750" indent="-285750">
+              <a:spcAft>
+                <a:spcPts val="400"/>
+              </a:spcAft>
+              <a:buClr>
+                <a:srgbClr val="990F3D"/>
+              </a:buClr>
+              <a:buFont typeface="Arial"/>
+              <a:buChar char="•"/>
+            </a:pPr>
+            <a:r>
+              <a:rPr lang="es-ES" sz="1800" dirty="0">
+                <a:solidFill>
+                  <a:srgbClr val="2F2B28"/>
+                </a:solidFill>
+              </a:rPr>
+              <a:t>After an incompatible service, let at least one full annual cycle pass before auditing that scope.</a:t>
+            </a:r>
+          </a:p>
+          <a:p>
+            <a:pPr marL="285750" indent="-285750">
+              <a:spcAft>
+                <a:spcPts val="400"/>
+              </a:spcAft>
+              <a:buClr>
+                <a:srgbClr val="990F3D"/>
+              </a:buClr>
+              <a:buFont typeface="Arial"/>
+              <a:buChar char="•"/>
+            </a:pPr>
+            <a:r>
+              <a:rPr lang="es-ES" sz="1800" dirty="0">
+                <a:solidFill>
+                  <a:srgbClr val="2F2B28"/>
+                </a:solidFill>
+              </a:rPr>
+              <a:t>Declare in writing your relationships with technology vendors, your own tools and your fee scheme (P41).</a:t>
+            </a:r>
+          </a:p>
+          <a:p>
+            <a:pPr marL="285750" indent="-285750">
+              <a:spcAft>
+                <a:spcPts val="400"/>
+              </a:spcAft>
+              <a:buClr>
+                <a:srgbClr val="990F3D"/>
+              </a:buClr>
+              <a:buFont typeface="Arial"/>
+              <a:buChar char="•"/>
+            </a:pPr>
+            <a:r>
+              <a:rPr lang="es-ES" sz="1800" dirty="0">
+                <a:solidFill>
+                  <a:srgbClr val="2F2B28"/>
+                </a:solidFill>
+              </a:rPr>
+              <a:t>Value-linked fees: only on value validated by finance or by an audit that is not yours.</a:t>
+            </a:r>
+          </a:p>
+        </p:txBody>
+      </p:sp>
+      <p:sp>
+        <p:nvSpPr>
+          <p:cNvPr id="235" name="Texto 235"/>
+          <p:cNvSpPr txBox="1"/>
+          <p:nvPr/>
+        </p:nvSpPr>
+        <p:spPr>
+          <a:xfrm>
+            <a:off x="609600" y="6250000"/>
             <a:ext cx="10972800" cy="450000"/>
           </a:xfrm>
           <a:prstGeom prst="rect">
@@ -6413,394 +6580,12 @@
           <a:p>
             <a:pPr algn="l"/>
             <a:r>
-              <a:rPr lang="es-ES" sz="1500" dirty="0">
-                <a:solidFill>
-                  <a:srgbClr val="564D47"/>
-                </a:solidFill>
-              </a:rPr>
-              <a:t>SEVEN-G is a registered trademark of Fernando García Varela; the content licence does not grant the trademark</a:t>
-            </a:r>
-          </a:p>
-        </p:txBody>
-      </p:sp>
-      <p:sp>
-        <p:nvSpPr>
-          <p:cNvPr id="232" name="Caja 232"/>
-          <p:cNvSpPr/>
-          <p:nvPr/>
-        </p:nvSpPr>
-        <p:spPr>
-          <a:xfrm>
-            <a:off x="609600" y="2050000"/>
-            <a:ext cx="3577600" cy="800000"/>
-          </a:xfrm>
-          <a:prstGeom prst="roundRect">
-            <a:avLst>
-              <a:gd name="adj" fmla="val 6000"/>
-            </a:avLst>
-          </a:prstGeom>
-          <a:solidFill>
-            <a:srgbClr val="0D7680"/>
-          </a:solidFill>
-          <a:ln>
-            <a:noFill/>
-          </a:ln>
-        </p:spPr>
-        <p:txBody>
-          <a:bodyPr wrap="square" anchor="ctr" lIns="45720" rIns="45720">
-            <a:noAutofit/>
-          </a:bodyPr>
-          <a:lstStyle/>
-          <a:p>
-            <a:pPr algn="ctr"/>
-            <a:r>
-              <a:rPr lang="es-ES" sz="1700" b="1" dirty="0">
-                <a:solidFill>
-                  <a:srgbClr val="FFFFFF"/>
-                </a:solidFill>
-              </a:rPr>
-              <a:t>Yes</a:t>
-            </a:r>
-          </a:p>
-        </p:txBody>
-      </p:sp>
-      <p:sp>
-        <p:nvSpPr>
-          <p:cNvPr id="233" name="Caja 233"/>
-          <p:cNvSpPr/>
-          <p:nvPr/>
-        </p:nvSpPr>
-        <p:spPr>
-          <a:xfrm>
-            <a:off x="609600" y="2790000"/>
-            <a:ext cx="3577600" cy="2500000"/>
-          </a:xfrm>
-          <a:prstGeom prst="roundRect">
-            <a:avLst>
-              <a:gd name="adj" fmla="val 6000"/>
-            </a:avLst>
-          </a:prstGeom>
-          <a:solidFill>
-            <a:srgbClr val="F3CFB2"/>
-          </a:solidFill>
-          <a:ln>
-            <a:noFill/>
-          </a:ln>
-        </p:spPr>
-        <p:txBody>
-          <a:bodyPr wrap="square" anchor="ctr" lIns="45720" rIns="45720">
-            <a:noAutofit/>
-          </a:bodyPr>
-          <a:lstStyle/>
-          <a:p>
-            <a:pPr algn="ctr"/>
-            <a:r>
-              <a:rPr lang="es-ES" sz="1000" b="1" dirty="0">
-                <a:solidFill>
-                  <a:srgbClr val="2F2B28"/>
-                </a:solidFill>
-              </a:rPr>
-              <a:t/>
-            </a:r>
-          </a:p>
-        </p:txBody>
-      </p:sp>
-      <p:sp>
-        <p:nvSpPr>
-          <p:cNvPr id="234" name="Texto 234"/>
-          <p:cNvSpPr txBox="1"/>
-          <p:nvPr/>
-        </p:nvSpPr>
-        <p:spPr>
-          <a:xfrm>
-            <a:off x="649600" y="2890000"/>
-            <a:ext cx="3497600" cy="2340000"/>
-          </a:xfrm>
-          <a:prstGeom prst="rect">
-            <a:avLst/>
-          </a:prstGeom>
-          <a:noFill/>
-        </p:spPr>
-        <p:txBody>
-          <a:bodyPr wrap="square" anchor="t" lIns="45720" rIns="45720">
-            <a:noAutofit/>
-          </a:bodyPr>
-          <a:lstStyle/>
-          <a:p>
-            <a:pPr algn="l"/>
-            <a:r>
-              <a:rPr lang="es-ES" sz="1300" dirty="0">
-                <a:solidFill>
-                  <a:srgbClr val="2F2B28"/>
-                </a:solidFill>
-              </a:rPr>
-              <a:t>"Service based on SEVEN-G (version …), a framework by Fernando García Varela, CC BY 4.0."   "Methodology adapted from SEVEN-G; changes: …"   "Uses the sphere map and measurement rules of SEVEN-G."</a:t>
-            </a:r>
-          </a:p>
-        </p:txBody>
-      </p:sp>
-      <p:sp>
-        <p:nvSpPr>
-          <p:cNvPr id="235" name="Caja 235"/>
-          <p:cNvSpPr/>
-          <p:nvPr/>
-        </p:nvSpPr>
-        <p:spPr>
-          <a:xfrm>
-            <a:off x="4307200" y="2050000"/>
-            <a:ext cx="3577600" cy="800000"/>
-          </a:xfrm>
-          <a:prstGeom prst="roundRect">
-            <a:avLst>
-              <a:gd name="adj" fmla="val 6000"/>
-            </a:avLst>
-          </a:prstGeom>
-          <a:solidFill>
-            <a:srgbClr val="990F3D"/>
-          </a:solidFill>
-          <a:ln>
-            <a:noFill/>
-          </a:ln>
-        </p:spPr>
-        <p:txBody>
-          <a:bodyPr wrap="square" anchor="ctr" lIns="45720" rIns="45720">
-            <a:noAutofit/>
-          </a:bodyPr>
-          <a:lstStyle/>
-          <a:p>
-            <a:pPr algn="ctr"/>
-            <a:r>
-              <a:rPr lang="es-ES" sz="1700" b="1" dirty="0">
-                <a:solidFill>
-                  <a:srgbClr val="FFFFFF"/>
-                </a:solidFill>
-              </a:rPr>
-              <a:t>No</a:t>
-            </a:r>
-          </a:p>
-        </p:txBody>
-      </p:sp>
-      <p:sp>
-        <p:nvSpPr>
-          <p:cNvPr id="236" name="Caja 236"/>
-          <p:cNvSpPr/>
-          <p:nvPr/>
-        </p:nvSpPr>
-        <p:spPr>
-          <a:xfrm>
-            <a:off x="4307200" y="2790000"/>
-            <a:ext cx="3577600" cy="2500000"/>
-          </a:xfrm>
-          <a:prstGeom prst="roundRect">
-            <a:avLst>
-              <a:gd name="adj" fmla="val 6000"/>
-            </a:avLst>
-          </a:prstGeom>
-          <a:solidFill>
-            <a:srgbClr val="F3CFB2"/>
-          </a:solidFill>
-          <a:ln>
-            <a:noFill/>
-          </a:ln>
-        </p:spPr>
-        <p:txBody>
-          <a:bodyPr wrap="square" anchor="ctr" lIns="45720" rIns="45720">
-            <a:noAutofit/>
-          </a:bodyPr>
-          <a:lstStyle/>
-          <a:p>
-            <a:pPr algn="ctr"/>
-            <a:r>
-              <a:rPr lang="es-ES" sz="1000" b="1" dirty="0">
-                <a:solidFill>
-                  <a:srgbClr val="2F2B28"/>
-                </a:solidFill>
-              </a:rPr>
-              <a:t/>
-            </a:r>
-          </a:p>
-        </p:txBody>
-      </p:sp>
-      <p:sp>
-        <p:nvSpPr>
-          <p:cNvPr id="237" name="Texto 237"/>
-          <p:cNvSpPr txBox="1"/>
-          <p:nvPr/>
-        </p:nvSpPr>
-        <p:spPr>
-          <a:xfrm>
-            <a:off x="4347200" y="2890000"/>
-            <a:ext cx="3497600" cy="2340000"/>
-          </a:xfrm>
-          <a:prstGeom prst="rect">
-            <a:avLst/>
-          </a:prstGeom>
-          <a:noFill/>
-        </p:spPr>
-        <p:txBody>
-          <a:bodyPr wrap="square" anchor="t" lIns="45720" rIns="45720">
-            <a:noAutofit/>
-          </a:bodyPr>
-          <a:lstStyle/>
-          <a:p>
-            <a:pPr algn="l"/>
-            <a:r>
-              <a:rPr lang="es-ES" sz="1300" dirty="0">
-                <a:solidFill>
-                  <a:srgbClr val="2F2B28"/>
-                </a:solidFill>
-              </a:rPr>
-              <a:t>"SEVEN-G certified", "accredited consultancy", "official partner", "endorsed by the author": there is no certification or partner programme. Nor "compliance guaranteed by SEVEN-G".</a:t>
-            </a:r>
-          </a:p>
-        </p:txBody>
-      </p:sp>
-      <p:sp>
-        <p:nvSpPr>
-          <p:cNvPr id="238" name="Caja 238"/>
-          <p:cNvSpPr/>
-          <p:nvPr/>
-        </p:nvSpPr>
-        <p:spPr>
-          <a:xfrm>
-            <a:off x="8004800" y="2050000"/>
-            <a:ext cx="3577600" cy="800000"/>
-          </a:xfrm>
-          <a:prstGeom prst="roundRect">
-            <a:avLst>
-              <a:gd name="adj" fmla="val 6000"/>
-            </a:avLst>
-          </a:prstGeom>
-          <a:solidFill>
-            <a:srgbClr val="A5822A"/>
-          </a:solidFill>
-          <a:ln>
-            <a:noFill/>
-          </a:ln>
-        </p:spPr>
-        <p:txBody>
-          <a:bodyPr wrap="square" anchor="ctr" lIns="45720" rIns="45720">
-            <a:noAutofit/>
-          </a:bodyPr>
-          <a:lstStyle/>
-          <a:p>
-            <a:pPr algn="ctr"/>
-            <a:r>
-              <a:rPr lang="es-ES" sz="1700" b="1" dirty="0">
-                <a:solidFill>
-                  <a:srgbClr val="FFFFFF"/>
-                </a:solidFill>
-              </a:rPr>
-              <a:t>Do not promise</a:t>
-            </a:r>
-          </a:p>
-        </p:txBody>
-      </p:sp>
-      <p:sp>
-        <p:nvSpPr>
-          <p:cNvPr id="239" name="Caja 239"/>
-          <p:cNvSpPr/>
-          <p:nvPr/>
-        </p:nvSpPr>
-        <p:spPr>
-          <a:xfrm>
-            <a:off x="8004800" y="2790000"/>
-            <a:ext cx="3577600" cy="2500000"/>
-          </a:xfrm>
-          <a:prstGeom prst="roundRect">
-            <a:avLst>
-              <a:gd name="adj" fmla="val 6000"/>
-            </a:avLst>
-          </a:prstGeom>
-          <a:solidFill>
-            <a:srgbClr val="F3CFB2"/>
-          </a:solidFill>
-          <a:ln>
-            <a:noFill/>
-          </a:ln>
-        </p:spPr>
-        <p:txBody>
-          <a:bodyPr wrap="square" anchor="ctr" lIns="45720" rIns="45720">
-            <a:noAutofit/>
-          </a:bodyPr>
-          <a:lstStyle/>
-          <a:p>
-            <a:pPr algn="ctr"/>
-            <a:r>
-              <a:rPr lang="es-ES" sz="1000" b="1" dirty="0">
-                <a:solidFill>
-                  <a:srgbClr val="2F2B28"/>
-                </a:solidFill>
-              </a:rPr>
-              <a:t/>
-            </a:r>
-          </a:p>
-        </p:txBody>
-      </p:sp>
-      <p:sp>
-        <p:nvSpPr>
-          <p:cNvPr id="240" name="Texto 240"/>
-          <p:cNvSpPr txBox="1"/>
-          <p:nvPr/>
-        </p:nvSpPr>
-        <p:spPr>
-          <a:xfrm>
-            <a:off x="8044800" y="2890000"/>
-            <a:ext cx="3497600" cy="2340000"/>
-          </a:xfrm>
-          <a:prstGeom prst="rect">
-            <a:avLst/>
-          </a:prstGeom>
-          <a:noFill/>
-        </p:spPr>
-        <p:txBody>
-          <a:bodyPr wrap="square" anchor="t" lIns="45720" rIns="45720">
-            <a:noAutofit/>
-          </a:bodyPr>
-          <a:lstStyle/>
-          <a:p>
-            <a:pPr algn="l"/>
-            <a:r>
-              <a:rPr lang="es-ES" sz="1300" dirty="0">
-                <a:solidFill>
-                  <a:srgbClr val="2F2B28"/>
-                </a:solidFill>
-              </a:rPr>
-              <a:t>X% savings before the diagnosis, a maturity level by a date, "your company will transform", "no risk", or implementation deadlines without a diagnosis.</a:t>
-            </a:r>
-          </a:p>
-        </p:txBody>
-      </p:sp>
-      <p:sp>
-        <p:nvSpPr>
-          <p:cNvPr id="241" name="Texto 241"/>
-          <p:cNvSpPr txBox="1"/>
-          <p:nvPr/>
-        </p:nvSpPr>
-        <p:spPr>
-          <a:xfrm>
-            <a:off x="609600" y="6150000"/>
-            <a:ext cx="10972800" cy="500000"/>
-          </a:xfrm>
-          <a:prstGeom prst="rect">
-            <a:avLst/>
-          </a:prstGeom>
-          <a:noFill/>
-        </p:spPr>
-        <p:txBody>
-          <a:bodyPr wrap="square" anchor="t" lIns="45720" rIns="45720">
-            <a:noAutofit/>
-          </a:bodyPr>
-          <a:lstStyle/>
-          <a:p>
-            <a:pPr algn="l"/>
-            <a:r>
               <a:rPr lang="es-ES" sz="1400" b="1" dirty="0">
                 <a:solidFill>
                   <a:srgbClr val="0F5499"/>
                 </a:solidFill>
               </a:rPr>
-              <a:t>Document 91, sections 6 and 8.</a:t>
+              <a:t>Document 91, section 5.</a:t>
             </a:r>
           </a:p>
         </p:txBody>
@@ -6840,7 +6625,7 @@
       </p:grpSpPr>
       <p:sp>
         <p:nvSpPr>
-          <p:cNvPr id="247" name="Marca"/>
+          <p:cNvPr id="249" name="Marca"/>
           <p:cNvSpPr/>
           <p:nvPr/>
         </p:nvSpPr>
@@ -6864,7 +6649,7 @@
       </p:sp>
       <p:sp>
         <p:nvSpPr>
-          <p:cNvPr id="248" name="Texto 248"/>
+          <p:cNvPr id="250" name="Texto 250"/>
           <p:cNvSpPr txBox="1"/>
           <p:nvPr/>
         </p:nvSpPr>
@@ -6898,7 +6683,7 @@
       </p:sp>
       <p:sp>
         <p:nvSpPr>
-          <p:cNvPr id="249" name="Texto 249"/>
+          <p:cNvPr id="251" name="Texto 251"/>
           <p:cNvSpPr txBox="1"/>
           <p:nvPr/>
         </p:nvSpPr>
@@ -6925,130 +6710,423 @@
                   <a:srgbClr val="990F3D"/>
                 </a:solidFill>
               </a:rPr>
-              <a:t>Your templates and leaving the engagement</a:t>
-            </a:r>
-          </a:p>
-        </p:txBody>
-      </p:sp>
-      <p:sp>
-        <p:nvSpPr>
-          <p:cNvPr id="246" name="Texto 246"/>
-          <p:cNvSpPr txBox="1"/>
-          <p:nvPr/>
-        </p:nvSpPr>
-        <p:spPr>
-          <a:xfrm>
-            <a:off x="609600" y="1750000"/>
-            <a:ext cx="10972800" cy="4400000"/>
-          </a:xfrm>
-          <a:prstGeom prst="rect">
-            <a:avLst/>
-          </a:prstGeom>
-          <a:noFill/>
-        </p:spPr>
-        <p:txBody>
-          <a:bodyPr wrap="square" anchor="t" lIns="45720" rIns="45720">
-            <a:noAutofit/>
-          </a:bodyPr>
-          <a:lstStyle/>
-          <a:p>
-            <a:pPr marL="285750" indent="-285750">
-              <a:spcAft>
-                <a:spcPts val="400"/>
-              </a:spcAft>
-              <a:buClr>
-                <a:srgbClr val="990F3D"/>
-              </a:buClr>
-              <a:buFont typeface="Arial"/>
-              <a:buChar char="•"/>
-            </a:pPr>
-            <a:r>
-              <a:rPr lang="es-ES" sz="1800" dirty="0">
-                <a:solidFill>
-                  <a:srgbClr val="2F2B28"/>
-                </a:solidFill>
-              </a:rPr>
-              <a:t>P70 Proposal and engagement letter: scope, model (M1–M5), out of scope, roles on both sides and independence.</a:t>
-            </a:r>
-          </a:p>
-          <a:p>
-            <a:pPr marL="285750" indent="-285750">
-              <a:spcAft>
-                <a:spcPts val="400"/>
-              </a:spcAft>
-              <a:buClr>
-                <a:srgbClr val="990F3D"/>
-              </a:buClr>
-              <a:buFont typeface="Arial"/>
-              <a:buChar char="•"/>
-            </a:pPr>
-            <a:r>
-              <a:rPr lang="es-ES" sz="1800" dirty="0">
-                <a:solidFill>
-                  <a:srgbClr val="2F2B28"/>
-                </a:solidFill>
-              </a:rPr>
-              <a:t>P41 Declaration of independence and conflicts of interest, at the start of every M3 or M4 service.</a:t>
-            </a:r>
-          </a:p>
-          <a:p>
-            <a:pPr marL="285750" indent="-285750">
-              <a:spcAft>
-                <a:spcPts val="400"/>
-              </a:spcAft>
-              <a:buClr>
-                <a:srgbClr val="990F3D"/>
-              </a:buClr>
-              <a:buFont typeface="Arial"/>
-              <a:buChar char="•"/>
-            </a:pPr>
-            <a:r>
-              <a:rPr lang="es-ES" sz="1800" dirty="0">
-                <a:solidFill>
-                  <a:srgbClr val="2F2B28"/>
-                </a:solidFill>
-              </a:rPr>
-              <a:t>Quality: every deliverable states version and adaptations, links its evidence and is reviewed by a second professional.</a:t>
-            </a:r>
-          </a:p>
-          <a:p>
-            <a:pPr marL="285750" indent="-285750">
-              <a:spcAft>
-                <a:spcPts val="400"/>
-              </a:spcAft>
-              <a:buClr>
-                <a:srgbClr val="990F3D"/>
-              </a:buClr>
-              <a:buFont typeface="Arial"/>
-              <a:buChar char="•"/>
-            </a:pPr>
-            <a:r>
-              <a:rPr lang="es-ES" sz="1800" dirty="0">
-                <a:solidFill>
-                  <a:srgbClr val="2F2B28"/>
-                </a:solidFill>
-              </a:rPr>
-              <a:t>P71 Transfer plan and exit note: registers in open format, evidence located, pending items with an owner and open risks.</a:t>
-            </a:r>
-          </a:p>
-          <a:p>
-            <a:pPr marL="285750" indent="-285750">
-              <a:spcAft>
-                <a:spcPts val="400"/>
-              </a:spcAft>
-              <a:buClr>
-                <a:srgbClr val="990F3D"/>
-              </a:buClr>
-              <a:buFont typeface="Arial"/>
-              <a:buChar char="•"/>
-            </a:pPr>
-            <a:r>
-              <a:rPr lang="es-ES" sz="1800" dirty="0">
-                <a:solidFill>
-                  <a:srgbClr val="2F2B28"/>
-                </a:solidFill>
-              </a:rPr>
-              <a:t>The test of good work: the company does not need you to read or maintain anything you delivered.</a:t>
+              <a:t>What you can and cannot say</a:t>
+            </a:r>
+          </a:p>
+        </p:txBody>
+      </p:sp>
+      <p:sp>
+        <p:nvSpPr>
+          <p:cNvPr id="252" name="Texto 252"/>
+          <p:cNvSpPr txBox="1"/>
+          <p:nvPr/>
+        </p:nvSpPr>
+        <p:spPr>
+          <a:xfrm>
+            <a:off x="609600" y="1330000"/>
+            <a:ext cx="10972800" cy="450000"/>
+          </a:xfrm>
+          <a:prstGeom prst="rect">
+            <a:avLst/>
+          </a:prstGeom>
+          <a:noFill/>
+        </p:spPr>
+        <p:txBody>
+          <a:bodyPr wrap="square" anchor="t" lIns="45720" rIns="45720">
+            <a:noAutofit/>
+          </a:bodyPr>
+          <a:lstStyle/>
+          <a:p>
+            <a:pPr algn="l"/>
+            <a:r>
+              <a:rPr lang="es-ES" sz="1500" dirty="0">
+                <a:solidFill>
+                  <a:srgbClr val="564D47"/>
+                </a:solidFill>
+              </a:rPr>
+              <a:t>SEVEN-G is a registered trademark of Fernando García Varela; the content licence does not grant the trademark</a:t>
+            </a:r>
+          </a:p>
+        </p:txBody>
+      </p:sp>
+      <p:sp>
+        <p:nvSpPr>
+          <p:cNvPr id="239" name="Caja 239"/>
+          <p:cNvSpPr/>
+          <p:nvPr/>
+        </p:nvSpPr>
+        <p:spPr>
+          <a:xfrm>
+            <a:off x="609600" y="2050000"/>
+            <a:ext cx="3577600" cy="800000"/>
+          </a:xfrm>
+          <a:prstGeom prst="roundRect">
+            <a:avLst>
+              <a:gd name="adj" fmla="val 6000"/>
+            </a:avLst>
+          </a:prstGeom>
+          <a:solidFill>
+            <a:srgbClr val="0D7680"/>
+          </a:solidFill>
+          <a:ln>
+            <a:noFill/>
+          </a:ln>
+        </p:spPr>
+        <p:txBody>
+          <a:bodyPr wrap="square" anchor="ctr" lIns="45720" rIns="45720">
+            <a:noAutofit/>
+          </a:bodyPr>
+          <a:lstStyle/>
+          <a:p>
+            <a:pPr algn="ctr"/>
+            <a:r>
+              <a:rPr lang="es-ES" sz="1700" b="1" dirty="0">
+                <a:solidFill>
+                  <a:srgbClr val="FFFFFF"/>
+                </a:solidFill>
+              </a:rPr>
+              <a:t>Yes</a:t>
+            </a:r>
+          </a:p>
+        </p:txBody>
+      </p:sp>
+      <p:sp>
+        <p:nvSpPr>
+          <p:cNvPr id="240" name="Caja 240"/>
+          <p:cNvSpPr/>
+          <p:nvPr/>
+        </p:nvSpPr>
+        <p:spPr>
+          <a:xfrm>
+            <a:off x="609600" y="2790000"/>
+            <a:ext cx="3577600" cy="2500000"/>
+          </a:xfrm>
+          <a:prstGeom prst="roundRect">
+            <a:avLst>
+              <a:gd name="adj" fmla="val 6000"/>
+            </a:avLst>
+          </a:prstGeom>
+          <a:solidFill>
+            <a:srgbClr val="F3CFB2"/>
+          </a:solidFill>
+          <a:ln>
+            <a:noFill/>
+          </a:ln>
+        </p:spPr>
+        <p:txBody>
+          <a:bodyPr wrap="square" anchor="ctr" lIns="45720" rIns="45720">
+            <a:noAutofit/>
+          </a:bodyPr>
+          <a:lstStyle/>
+          <a:p>
+            <a:pPr algn="ctr"/>
+            <a:r>
+              <a:rPr lang="es-ES" sz="1000" b="1" dirty="0">
+                <a:solidFill>
+                  <a:srgbClr val="2F2B28"/>
+                </a:solidFill>
+              </a:rPr>
+              <a:t/>
+            </a:r>
+          </a:p>
+        </p:txBody>
+      </p:sp>
+      <p:sp>
+        <p:nvSpPr>
+          <p:cNvPr id="241" name="Texto 241"/>
+          <p:cNvSpPr txBox="1"/>
+          <p:nvPr/>
+        </p:nvSpPr>
+        <p:spPr>
+          <a:xfrm>
+            <a:off x="649600" y="2890000"/>
+            <a:ext cx="3497600" cy="2340000"/>
+          </a:xfrm>
+          <a:prstGeom prst="rect">
+            <a:avLst/>
+          </a:prstGeom>
+          <a:noFill/>
+        </p:spPr>
+        <p:txBody>
+          <a:bodyPr wrap="square" anchor="t" lIns="45720" rIns="45720">
+            <a:noAutofit/>
+          </a:bodyPr>
+          <a:lstStyle/>
+          <a:p>
+            <a:pPr algn="l"/>
+            <a:r>
+              <a:rPr lang="es-ES" sz="1300" dirty="0">
+                <a:solidFill>
+                  <a:srgbClr val="2F2B28"/>
+                </a:solidFill>
+              </a:rPr>
+              <a:t>"Service based on SEVEN-G (version …), a framework by Fernando García Varela, CC BY 4.0."   "Methodology adapted from SEVEN-G; changes: …"   "Uses the sphere map and measurement rules of SEVEN-G."</a:t>
+            </a:r>
+          </a:p>
+        </p:txBody>
+      </p:sp>
+      <p:sp>
+        <p:nvSpPr>
+          <p:cNvPr id="242" name="Caja 242"/>
+          <p:cNvSpPr/>
+          <p:nvPr/>
+        </p:nvSpPr>
+        <p:spPr>
+          <a:xfrm>
+            <a:off x="4307200" y="2050000"/>
+            <a:ext cx="3577600" cy="800000"/>
+          </a:xfrm>
+          <a:prstGeom prst="roundRect">
+            <a:avLst>
+              <a:gd name="adj" fmla="val 6000"/>
+            </a:avLst>
+          </a:prstGeom>
+          <a:solidFill>
+            <a:srgbClr val="990F3D"/>
+          </a:solidFill>
+          <a:ln>
+            <a:noFill/>
+          </a:ln>
+        </p:spPr>
+        <p:txBody>
+          <a:bodyPr wrap="square" anchor="ctr" lIns="45720" rIns="45720">
+            <a:noAutofit/>
+          </a:bodyPr>
+          <a:lstStyle/>
+          <a:p>
+            <a:pPr algn="ctr"/>
+            <a:r>
+              <a:rPr lang="es-ES" sz="1700" b="1" dirty="0">
+                <a:solidFill>
+                  <a:srgbClr val="FFFFFF"/>
+                </a:solidFill>
+              </a:rPr>
+              <a:t>No</a:t>
+            </a:r>
+          </a:p>
+        </p:txBody>
+      </p:sp>
+      <p:sp>
+        <p:nvSpPr>
+          <p:cNvPr id="243" name="Caja 243"/>
+          <p:cNvSpPr/>
+          <p:nvPr/>
+        </p:nvSpPr>
+        <p:spPr>
+          <a:xfrm>
+            <a:off x="4307200" y="2790000"/>
+            <a:ext cx="3577600" cy="2500000"/>
+          </a:xfrm>
+          <a:prstGeom prst="roundRect">
+            <a:avLst>
+              <a:gd name="adj" fmla="val 6000"/>
+            </a:avLst>
+          </a:prstGeom>
+          <a:solidFill>
+            <a:srgbClr val="F3CFB2"/>
+          </a:solidFill>
+          <a:ln>
+            <a:noFill/>
+          </a:ln>
+        </p:spPr>
+        <p:txBody>
+          <a:bodyPr wrap="square" anchor="ctr" lIns="45720" rIns="45720">
+            <a:noAutofit/>
+          </a:bodyPr>
+          <a:lstStyle/>
+          <a:p>
+            <a:pPr algn="ctr"/>
+            <a:r>
+              <a:rPr lang="es-ES" sz="1000" b="1" dirty="0">
+                <a:solidFill>
+                  <a:srgbClr val="2F2B28"/>
+                </a:solidFill>
+              </a:rPr>
+              <a:t/>
+            </a:r>
+          </a:p>
+        </p:txBody>
+      </p:sp>
+      <p:sp>
+        <p:nvSpPr>
+          <p:cNvPr id="244" name="Texto 244"/>
+          <p:cNvSpPr txBox="1"/>
+          <p:nvPr/>
+        </p:nvSpPr>
+        <p:spPr>
+          <a:xfrm>
+            <a:off x="4347200" y="2890000"/>
+            <a:ext cx="3497600" cy="2340000"/>
+          </a:xfrm>
+          <a:prstGeom prst="rect">
+            <a:avLst/>
+          </a:prstGeom>
+          <a:noFill/>
+        </p:spPr>
+        <p:txBody>
+          <a:bodyPr wrap="square" anchor="t" lIns="45720" rIns="45720">
+            <a:noAutofit/>
+          </a:bodyPr>
+          <a:lstStyle/>
+          <a:p>
+            <a:pPr algn="l"/>
+            <a:r>
+              <a:rPr lang="es-ES" sz="1300" dirty="0">
+                <a:solidFill>
+                  <a:srgbClr val="2F2B28"/>
+                </a:solidFill>
+              </a:rPr>
+              <a:t>"SEVEN-G certified", "accredited consultancy", "official partner", "endorsed by the author": there is no certification or partner programme. Nor "compliance guaranteed by SEVEN-G".</a:t>
+            </a:r>
+          </a:p>
+        </p:txBody>
+      </p:sp>
+      <p:sp>
+        <p:nvSpPr>
+          <p:cNvPr id="245" name="Caja 245"/>
+          <p:cNvSpPr/>
+          <p:nvPr/>
+        </p:nvSpPr>
+        <p:spPr>
+          <a:xfrm>
+            <a:off x="8004800" y="2050000"/>
+            <a:ext cx="3577600" cy="800000"/>
+          </a:xfrm>
+          <a:prstGeom prst="roundRect">
+            <a:avLst>
+              <a:gd name="adj" fmla="val 6000"/>
+            </a:avLst>
+          </a:prstGeom>
+          <a:solidFill>
+            <a:srgbClr val="A5822A"/>
+          </a:solidFill>
+          <a:ln>
+            <a:noFill/>
+          </a:ln>
+        </p:spPr>
+        <p:txBody>
+          <a:bodyPr wrap="square" anchor="ctr" lIns="45720" rIns="45720">
+            <a:noAutofit/>
+          </a:bodyPr>
+          <a:lstStyle/>
+          <a:p>
+            <a:pPr algn="ctr"/>
+            <a:r>
+              <a:rPr lang="es-ES" sz="1700" b="1" dirty="0">
+                <a:solidFill>
+                  <a:srgbClr val="FFFFFF"/>
+                </a:solidFill>
+              </a:rPr>
+              <a:t>Do not promise</a:t>
+            </a:r>
+          </a:p>
+        </p:txBody>
+      </p:sp>
+      <p:sp>
+        <p:nvSpPr>
+          <p:cNvPr id="246" name="Caja 246"/>
+          <p:cNvSpPr/>
+          <p:nvPr/>
+        </p:nvSpPr>
+        <p:spPr>
+          <a:xfrm>
+            <a:off x="8004800" y="2790000"/>
+            <a:ext cx="3577600" cy="2500000"/>
+          </a:xfrm>
+          <a:prstGeom prst="roundRect">
+            <a:avLst>
+              <a:gd name="adj" fmla="val 6000"/>
+            </a:avLst>
+          </a:prstGeom>
+          <a:solidFill>
+            <a:srgbClr val="F3CFB2"/>
+          </a:solidFill>
+          <a:ln>
+            <a:noFill/>
+          </a:ln>
+        </p:spPr>
+        <p:txBody>
+          <a:bodyPr wrap="square" anchor="ctr" lIns="45720" rIns="45720">
+            <a:noAutofit/>
+          </a:bodyPr>
+          <a:lstStyle/>
+          <a:p>
+            <a:pPr algn="ctr"/>
+            <a:r>
+              <a:rPr lang="es-ES" sz="1000" b="1" dirty="0">
+                <a:solidFill>
+                  <a:srgbClr val="2F2B28"/>
+                </a:solidFill>
+              </a:rPr>
+              <a:t/>
+            </a:r>
+          </a:p>
+        </p:txBody>
+      </p:sp>
+      <p:sp>
+        <p:nvSpPr>
+          <p:cNvPr id="247" name="Texto 247"/>
+          <p:cNvSpPr txBox="1"/>
+          <p:nvPr/>
+        </p:nvSpPr>
+        <p:spPr>
+          <a:xfrm>
+            <a:off x="8044800" y="2890000"/>
+            <a:ext cx="3497600" cy="2340000"/>
+          </a:xfrm>
+          <a:prstGeom prst="rect">
+            <a:avLst/>
+          </a:prstGeom>
+          <a:noFill/>
+        </p:spPr>
+        <p:txBody>
+          <a:bodyPr wrap="square" anchor="t" lIns="45720" rIns="45720">
+            <a:noAutofit/>
+          </a:bodyPr>
+          <a:lstStyle/>
+          <a:p>
+            <a:pPr algn="l"/>
+            <a:r>
+              <a:rPr lang="es-ES" sz="1300" dirty="0">
+                <a:solidFill>
+                  <a:srgbClr val="2F2B28"/>
+                </a:solidFill>
+              </a:rPr>
+              <a:t>X% savings before the diagnosis, a maturity level by a date, "your company will transform", "no risk", or implementation deadlines without a diagnosis.</a:t>
+            </a:r>
+          </a:p>
+        </p:txBody>
+      </p:sp>
+      <p:sp>
+        <p:nvSpPr>
+          <p:cNvPr id="248" name="Texto 248"/>
+          <p:cNvSpPr txBox="1"/>
+          <p:nvPr/>
+        </p:nvSpPr>
+        <p:spPr>
+          <a:xfrm>
+            <a:off x="609600" y="6150000"/>
+            <a:ext cx="10972800" cy="500000"/>
+          </a:xfrm>
+          <a:prstGeom prst="rect">
+            <a:avLst/>
+          </a:prstGeom>
+          <a:noFill/>
+        </p:spPr>
+        <p:txBody>
+          <a:bodyPr wrap="square" anchor="t" lIns="45720" rIns="45720">
+            <a:noAutofit/>
+          </a:bodyPr>
+          <a:lstStyle/>
+          <a:p>
+            <a:pPr algn="l"/>
+            <a:r>
+              <a:rPr lang="es-ES" sz="1400" b="1" dirty="0">
+                <a:solidFill>
+                  <a:srgbClr val="0F5499"/>
+                </a:solidFill>
+              </a:rPr>
+              <a:t>Document 91, sections 6 and 8.</a:t>
             </a:r>
           </a:p>
         </p:txBody>
@@ -7088,7 +7166,255 @@
       </p:grpSpPr>
       <p:sp>
         <p:nvSpPr>
-          <p:cNvPr id="250" name="Texto 250"/>
+          <p:cNvPr id="254" name="Marca"/>
+          <p:cNvSpPr/>
+          <p:nvPr/>
+        </p:nvSpPr>
+        <p:spPr>
+          <a:xfrm>
+            <a:off x="609600" y="365760"/>
+            <a:ext cx="182880" cy="182880"/>
+          </a:xfrm>
+          <a:prstGeom prst="rect">
+            <a:avLst/>
+          </a:prstGeom>
+          <a:solidFill>
+            <a:srgbClr val="990F3D"/>
+          </a:solidFill>
+        </p:spPr>
+        <p:txBody>
+          <a:bodyPr/>
+          <a:lstStyle/>
+          <a:p/>
+        </p:txBody>
+      </p:sp>
+      <p:sp>
+        <p:nvSpPr>
+          <p:cNvPr id="255" name="Texto 255"/>
+          <p:cNvSpPr txBox="1"/>
+          <p:nvPr/>
+        </p:nvSpPr>
+        <p:spPr>
+          <a:xfrm>
+            <a:off x="838200" y="300000"/>
+            <a:ext cx="10500000" cy="320000"/>
+          </a:xfrm>
+          <a:prstGeom prst="rect">
+            <a:avLst/>
+          </a:prstGeom>
+          <a:noFill/>
+        </p:spPr>
+        <p:txBody>
+          <a:bodyPr wrap="square" anchor="ctr" lIns="45720" rIns="45720">
+            <a:noAutofit/>
+          </a:bodyPr>
+          <a:lstStyle/>
+          <a:p>
+            <a:pPr algn="l"/>
+            <a:r>
+              <a:rPr lang="es-ES" sz="1400" b="1" dirty="0">
+                <a:solidFill>
+                  <a:srgbClr val="1A1817"/>
+                </a:solidFill>
+              </a:rPr>
+              <a:t>SEVEN-G · COURSE · CONSULTANT · SUPPORTING CLIENTS</a:t>
+            </a:r>
+          </a:p>
+        </p:txBody>
+      </p:sp>
+      <p:sp>
+        <p:nvSpPr>
+          <p:cNvPr id="256" name="Texto 256"/>
+          <p:cNvSpPr txBox="1"/>
+          <p:nvPr/>
+        </p:nvSpPr>
+        <p:spPr>
+          <a:xfrm>
+            <a:off x="609600" y="700000"/>
+            <a:ext cx="10972800" cy="650000"/>
+          </a:xfrm>
+          <a:prstGeom prst="rect">
+            <a:avLst/>
+          </a:prstGeom>
+          <a:noFill/>
+        </p:spPr>
+        <p:txBody>
+          <a:bodyPr wrap="square" anchor="t" lIns="45720" rIns="45720">
+            <a:noAutofit/>
+          </a:bodyPr>
+          <a:lstStyle/>
+          <a:p>
+            <a:pPr algn="l"/>
+            <a:r>
+              <a:rPr lang="es-ES" sz="2700" b="1" dirty="0">
+                <a:solidFill>
+                  <a:srgbClr val="990F3D"/>
+                </a:solidFill>
+              </a:rPr>
+              <a:t>Your templates and leaving the engagement</a:t>
+            </a:r>
+          </a:p>
+        </p:txBody>
+      </p:sp>
+      <p:sp>
+        <p:nvSpPr>
+          <p:cNvPr id="253" name="Texto 253"/>
+          <p:cNvSpPr txBox="1"/>
+          <p:nvPr/>
+        </p:nvSpPr>
+        <p:spPr>
+          <a:xfrm>
+            <a:off x="609600" y="1750000"/>
+            <a:ext cx="10972800" cy="4400000"/>
+          </a:xfrm>
+          <a:prstGeom prst="rect">
+            <a:avLst/>
+          </a:prstGeom>
+          <a:noFill/>
+        </p:spPr>
+        <p:txBody>
+          <a:bodyPr wrap="square" anchor="t" lIns="45720" rIns="45720">
+            <a:noAutofit/>
+          </a:bodyPr>
+          <a:lstStyle/>
+          <a:p>
+            <a:pPr marL="285750" indent="-285750">
+              <a:spcAft>
+                <a:spcPts val="400"/>
+              </a:spcAft>
+              <a:buClr>
+                <a:srgbClr val="990F3D"/>
+              </a:buClr>
+              <a:buFont typeface="Arial"/>
+              <a:buChar char="•"/>
+            </a:pPr>
+            <a:r>
+              <a:rPr lang="es-ES" sz="1800" dirty="0">
+                <a:solidFill>
+                  <a:srgbClr val="2F2B28"/>
+                </a:solidFill>
+              </a:rPr>
+              <a:t>P70 Proposal and engagement letter: scope, model (M1–M5), out of scope, roles on both sides and independence.</a:t>
+            </a:r>
+          </a:p>
+          <a:p>
+            <a:pPr marL="285750" indent="-285750">
+              <a:spcAft>
+                <a:spcPts val="400"/>
+              </a:spcAft>
+              <a:buClr>
+                <a:srgbClr val="990F3D"/>
+              </a:buClr>
+              <a:buFont typeface="Arial"/>
+              <a:buChar char="•"/>
+            </a:pPr>
+            <a:r>
+              <a:rPr lang="es-ES" sz="1800" dirty="0">
+                <a:solidFill>
+                  <a:srgbClr val="2F2B28"/>
+                </a:solidFill>
+              </a:rPr>
+              <a:t>P41 Declaration of independence and conflicts of interest, at the start of every M3 or M4 service.</a:t>
+            </a:r>
+          </a:p>
+          <a:p>
+            <a:pPr marL="285750" indent="-285750">
+              <a:spcAft>
+                <a:spcPts val="400"/>
+              </a:spcAft>
+              <a:buClr>
+                <a:srgbClr val="990F3D"/>
+              </a:buClr>
+              <a:buFont typeface="Arial"/>
+              <a:buChar char="•"/>
+            </a:pPr>
+            <a:r>
+              <a:rPr lang="es-ES" sz="1800" dirty="0">
+                <a:solidFill>
+                  <a:srgbClr val="2F2B28"/>
+                </a:solidFill>
+              </a:rPr>
+              <a:t>Quality: every deliverable states version and adaptations, links its evidence and is reviewed by a second professional.</a:t>
+            </a:r>
+          </a:p>
+          <a:p>
+            <a:pPr marL="285750" indent="-285750">
+              <a:spcAft>
+                <a:spcPts val="400"/>
+              </a:spcAft>
+              <a:buClr>
+                <a:srgbClr val="990F3D"/>
+              </a:buClr>
+              <a:buFont typeface="Arial"/>
+              <a:buChar char="•"/>
+            </a:pPr>
+            <a:r>
+              <a:rPr lang="es-ES" sz="1800" dirty="0">
+                <a:solidFill>
+                  <a:srgbClr val="2F2B28"/>
+                </a:solidFill>
+              </a:rPr>
+              <a:t>P71 Transfer plan and exit note: registers in open format, evidence located, pending items with an owner and open risks.</a:t>
+            </a:r>
+          </a:p>
+          <a:p>
+            <a:pPr marL="285750" indent="-285750">
+              <a:spcAft>
+                <a:spcPts val="400"/>
+              </a:spcAft>
+              <a:buClr>
+                <a:srgbClr val="990F3D"/>
+              </a:buClr>
+              <a:buFont typeface="Arial"/>
+              <a:buChar char="•"/>
+            </a:pPr>
+            <a:r>
+              <a:rPr lang="es-ES" sz="1800" dirty="0">
+                <a:solidFill>
+                  <a:srgbClr val="2F2B28"/>
+                </a:solidFill>
+              </a:rPr>
+              <a:t>The test of good work: the company does not need you to read or maintain anything you delivered.</a:t>
+            </a:r>
+          </a:p>
+        </p:txBody>
+      </p:sp>
+    </p:spTree>
+  </p:cSld>
+  <p:clrMapOvr>
+    <a:overrideClrMapping bg1="lt1" tx1="dk1" bg2="lt2" tx2="dk2" accent1="accent1" accent2="accent2" accent3="accent3" accent4="accent4" accent5="accent5" accent6="accent6" hlink="hlink" folHlink="folHlink"/>
+  </p:clrMapOvr>
+</p:sld>
+</file>
+
+<file path=ppt/slides/slide27.xml><?xml version="1.0" encoding="utf-8"?>
+<p:sld xmlns:a="http://schemas.openxmlformats.org/drawingml/2006/main" xmlns:r="http://schemas.openxmlformats.org/officeDocument/2006/relationships" xmlns:p="http://schemas.openxmlformats.org/presentationml/2006/main">
+  <p:cSld>
+    <p:bg>
+      <p:bgPr>
+        <a:solidFill>
+          <a:srgbClr val="FBE2CD"/>
+        </a:solidFill>
+        <a:effectLst/>
+      </p:bgPr>
+    </p:bg>
+    <p:spTree>
+      <p:nvGrpSpPr>
+        <p:cNvPr id="1" name=""/>
+        <p:cNvGrpSpPr/>
+        <p:nvPr/>
+      </p:nvGrpSpPr>
+      <p:grpSpPr>
+        <a:xfrm>
+          <a:off x="0" y="0"/>
+          <a:ext cx="0" cy="0"/>
+          <a:chOff x="0" y="0"/>
+          <a:chExt cx="0" cy="0"/>
+        </a:xfrm>
+      </p:grpSpPr>
+      <p:sp>
+        <p:nvSpPr>
+          <p:cNvPr id="257" name="Texto 257"/>
           <p:cNvSpPr txBox="1"/>
           <p:nvPr/>
         </p:nvSpPr>
@@ -7122,7 +7448,7 @@
       </p:sp>
       <p:sp>
         <p:nvSpPr>
-          <p:cNvPr id="251" name="Texto 251"/>
+          <p:cNvPr id="258" name="Texto 258"/>
           <p:cNvSpPr txBox="1"/>
           <p:nvPr/>
         </p:nvSpPr>
@@ -7156,7 +7482,7 @@
       </p:sp>
       <p:sp>
         <p:nvSpPr>
-          <p:cNvPr id="252" name="Texto 252"/>
+          <p:cNvPr id="259" name="Texto 259"/>
           <p:cNvSpPr txBox="1"/>
           <p:nvPr/>
         </p:nvSpPr>
@@ -7190,7 +7516,7 @@
       </p:sp>
       <p:sp>
         <p:nvSpPr>
-          <p:cNvPr id="253" name="Texto 253"/>
+          <p:cNvPr id="260" name="Texto 260"/>
           <p:cNvSpPr txBox="1"/>
           <p:nvPr/>
         </p:nvSpPr>
@@ -7224,7 +7550,7 @@
       </p:sp>
       <p:sp>
         <p:nvSpPr>
-          <p:cNvPr id="254" name="Texto 254"/>
+          <p:cNvPr id="261" name="Texto 261"/>
           <p:cNvSpPr txBox="1"/>
           <p:nvPr/>
         </p:nvSpPr>
